--- a/docs/presentation.pptx
+++ b/docs/presentation.pptx
@@ -12,6 +12,19 @@
     <p:sldId id="260" r:id="rId11"/>
     <p:sldId id="261" r:id="rId12"/>
     <p:sldId id="262" r:id="rId13"/>
+    <p:sldId id="263" r:id="rId14"/>
+    <p:sldId id="264" r:id="rId15"/>
+    <p:sldId id="265" r:id="rId16"/>
+    <p:sldId id="266" r:id="rId17"/>
+    <p:sldId id="267" r:id="rId18"/>
+    <p:sldId id="268" r:id="rId19"/>
+    <p:sldId id="269" r:id="rId20"/>
+    <p:sldId id="270" r:id="rId21"/>
+    <p:sldId id="271" r:id="rId22"/>
+    <p:sldId id="272" r:id="rId23"/>
+    <p:sldId id="273" r:id="rId24"/>
+    <p:sldId id="274" r:id="rId25"/>
+    <p:sldId id="275" r:id="rId26"/>
   </p:sldIdLst>
   <p:sldSz cx="12191695" cy="6858000" type="screen4x3"/>
   <p:notesSz cx="6858000" cy="9144000"/>
@@ -3109,7 +3122,7 @@
             <a:avLst/>
           </a:prstGeom>
           <a:solidFill>
-            <a:srgbClr val="0B0F19"/>
+            <a:srgbClr val="FF5E00"/>
           </a:solidFill>
           <a:ln>
             <a:noFill/>
@@ -3139,20 +3152,20 @@
       </p:sp>
       <p:sp>
         <p:nvSpPr>
-          <p:cNvPr id="3" name="Rectangle 2"/>
+          <p:cNvPr id="3" name="Oval 2"/>
           <p:cNvSpPr/>
           <p:nvPr/>
         </p:nvSpPr>
         <p:spPr>
           <a:xfrm>
-            <a:off x="731520" y="914400"/>
-            <a:ext cx="137160" cy="3840480"/>
-          </a:xfrm>
-          <a:prstGeom prst="rect">
-            <a:avLst/>
-          </a:prstGeom>
-          <a:solidFill>
-            <a:srgbClr val="38BDF8"/>
+            <a:off x="7772400" y="-1371600"/>
+            <a:ext cx="6858000" cy="6858000"/>
+          </a:xfrm>
+          <a:prstGeom prst="ellipse">
+            <a:avLst/>
+          </a:prstGeom>
+          <a:solidFill>
+            <a:srgbClr val="FF7814"/>
           </a:solidFill>
           <a:ln>
             <a:noFill/>
@@ -3182,83 +3195,24 @@
       </p:sp>
       <p:sp>
         <p:nvSpPr>
-          <p:cNvPr id="4" name="TextBox 3"/>
-          <p:cNvSpPr txBox="1"/>
-          <p:nvPr/>
-        </p:nvSpPr>
-        <p:spPr>
-          <a:xfrm>
-            <a:off x="1097280" y="822960"/>
-            <a:ext cx="10332720" cy="2011680"/>
-          </a:xfrm>
-          <a:prstGeom prst="rect">
-            <a:avLst/>
-          </a:prstGeom>
-          <a:noFill/>
-        </p:spPr>
-        <p:txBody>
-          <a:bodyPr wrap="square">
-            <a:spAutoFit/>
-          </a:bodyPr>
-          <a:lstStyle/>
-          <a:p>
-            <a:pPr>
-              <a:defRPr sz="3600" b="1">
-                <a:solidFill>
-                  <a:srgbClr val="38BDF8"/>
-                </a:solidFill>
-              </a:defRPr>
-            </a:pPr>
-            <a:r>
-              <a:t>RiskPulse</a:t>
-            </a:r>
-          </a:p>
-          <a:p>
-            <a:pPr>
-              <a:defRPr sz="2400" b="1">
-                <a:solidFill>
-                  <a:srgbClr val="F9FAFB"/>
-                </a:solidFill>
-              </a:defRPr>
-            </a:pPr>
-            <a:r>
-              <a:t>AI/NLP Financial Risk Intelligence &amp; Strategic Portfolio Stress Testing Platform</a:t>
-            </a:r>
-          </a:p>
-          <a:p>
-            <a:pPr>
-              <a:defRPr sz="1300">
-                <a:solidFill>
-                  <a:srgbClr val="818CF8"/>
-                </a:solidFill>
-              </a:defRPr>
-            </a:pPr>
-            <a:r>
-              <a:t>Interpretable NLP Risk Scoring (-1 to +1) • 8-Class Event Taxonomy • Dynamic Module B Stress Testing</a:t>
-            </a:r>
-          </a:p>
-        </p:txBody>
-      </p:sp>
-      <p:sp>
-        <p:nvSpPr>
-          <p:cNvPr id="5" name="Rounded Rectangle 4"/>
+          <p:cNvPr id="4" name="Rounded Rectangle 3"/>
           <p:cNvSpPr/>
           <p:nvPr/>
         </p:nvSpPr>
         <p:spPr>
           <a:xfrm>
-            <a:off x="1097280" y="3108960"/>
-            <a:ext cx="4937760" cy="2560320"/>
+            <a:off x="731520" y="502920"/>
+            <a:ext cx="2011680" cy="438912"/>
           </a:xfrm>
           <a:prstGeom prst="roundRect">
             <a:avLst/>
           </a:prstGeom>
           <a:solidFill>
-            <a:srgbClr val="111827"/>
+            <a:srgbClr val="E65100"/>
           </a:solidFill>
           <a:ln w="19050">
             <a:solidFill>
-              <a:srgbClr val="38BDF8"/>
+              <a:srgbClr val="FFFFFF"/>
             </a:solidFill>
           </a:ln>
         </p:spPr>
@@ -3280,98 +3234,39 @@
           <a:bodyPr rtlCol="0" anchor="ctr"/>
           <a:lstStyle/>
           <a:p>
-            <a:pPr algn="ctr"/>
-          </a:p>
-        </p:txBody>
-      </p:sp>
-      <p:sp>
-        <p:nvSpPr>
-          <p:cNvPr id="6" name="TextBox 5"/>
-          <p:cNvSpPr txBox="1"/>
-          <p:nvPr/>
-        </p:nvSpPr>
-        <p:spPr>
-          <a:xfrm>
-            <a:off x="1280160" y="3200400"/>
-            <a:ext cx="4572000" cy="2377440"/>
-          </a:xfrm>
-          <a:prstGeom prst="rect">
-            <a:avLst/>
-          </a:prstGeom>
-          <a:noFill/>
-        </p:spPr>
-        <p:txBody>
-          <a:bodyPr wrap="square">
-            <a:spAutoFit/>
-          </a:bodyPr>
-          <a:lstStyle/>
-          <a:p>
-            <a:pPr>
-              <a:defRPr sz="1100" b="1">
-                <a:solidFill>
-                  <a:srgbClr val="38BDF8"/>
-                </a:solidFill>
-              </a:defRPr>
-            </a:pPr>
-            <a:r>
-              <a:t>CANDIDATE &amp; INSTITUTION DETAILS</a:t>
-            </a:r>
-          </a:p>
-          <a:p>
-            <a:pPr>
-              <a:defRPr sz="1200">
-                <a:solidFill>
-                  <a:srgbClr val="F9FAFB"/>
-                </a:solidFill>
-              </a:defRPr>
-            </a:pPr>
-            <a:r>
-              <a:t>• Candidate: Abhi Pandey</a:t>
-            </a:r>
-            <a:br/>
-            <a:r>
-              <a:t>• College: VIT Bhopal University</a:t>
-            </a:r>
-            <a:br/>
-            <a:r>
-              <a:t>• Degree: B.Tech Computer Science &amp; Engineering</a:t>
-            </a:r>
-            <a:br/>
-            <a:r>
-              <a:t>  (Artificial Intelligence &amp; Machine Learning)</a:t>
-            </a:r>
-            <a:br/>
-            <a:r>
-              <a:t>• Hackathon: S&amp;P Global &amp; CRISIL Campus Hackathon 2026</a:t>
-            </a:r>
-            <a:br/>
-            <a:r>
-              <a:t>• Track: AI/NLP-Driven Financial Risk Intelligence</a:t>
-            </a:r>
-          </a:p>
-        </p:txBody>
-      </p:sp>
-      <p:sp>
-        <p:nvSpPr>
-          <p:cNvPr id="7" name="Rounded Rectangle 6"/>
+            <a:pPr algn="ctr">
+              <a:defRPr sz="1000" b="1">
+                <a:solidFill>
+                  <a:srgbClr val="FFFFFF"/>
+                </a:solidFill>
+                <a:latin typeface="Segoe UI"/>
+              </a:defRPr>
+            </a:pPr>
+            <a:r>
+              <a:t>VIT BHOPAL</a:t>
+            </a:r>
+          </a:p>
+        </p:txBody>
+      </p:sp>
+      <p:sp>
+        <p:nvSpPr>
+          <p:cNvPr id="5" name="Oval 4"/>
           <p:cNvSpPr/>
           <p:nvPr/>
         </p:nvSpPr>
         <p:spPr>
           <a:xfrm>
-            <a:off x="6309360" y="3108960"/>
-            <a:ext cx="5120640" cy="2560320"/>
-          </a:xfrm>
-          <a:prstGeom prst="roundRect">
-            <a:avLst/>
-          </a:prstGeom>
-          <a:solidFill>
-            <a:srgbClr val="111827"/>
-          </a:solidFill>
-          <a:ln w="19050">
-            <a:solidFill>
-              <a:srgbClr val="34D399"/>
-            </a:solidFill>
+            <a:off x="10972800" y="5760720"/>
+            <a:ext cx="621792" cy="621792"/>
+          </a:xfrm>
+          <a:prstGeom prst="ellipse">
+            <a:avLst/>
+          </a:prstGeom>
+          <a:solidFill>
+            <a:srgbClr val="FFFFFF"/>
+          </a:solidFill>
+          <a:ln>
+            <a:noFill/>
           </a:ln>
         </p:spPr>
         <p:style>
@@ -3392,20 +3287,30 @@
           <a:bodyPr rtlCol="0" anchor="ctr"/>
           <a:lstStyle/>
           <a:p>
-            <a:pPr algn="ctr"/>
-          </a:p>
-        </p:txBody>
-      </p:sp>
-      <p:sp>
-        <p:nvSpPr>
-          <p:cNvPr id="8" name="TextBox 7"/>
+            <a:pPr algn="ctr">
+              <a:defRPr sz="1800" b="1">
+                <a:solidFill>
+                  <a:srgbClr val="FF5E00"/>
+                </a:solidFill>
+                <a:latin typeface="Segoe UI"/>
+              </a:defRPr>
+            </a:pPr>
+            <a:r>
+              <a:t>&gt;</a:t>
+            </a:r>
+          </a:p>
+        </p:txBody>
+      </p:sp>
+      <p:sp>
+        <p:nvSpPr>
+          <p:cNvPr id="6" name="TextBox 5"/>
           <p:cNvSpPr txBox="1"/>
           <p:nvPr/>
         </p:nvSpPr>
         <p:spPr>
           <a:xfrm>
-            <a:off x="6492240" y="3200400"/>
-            <a:ext cx="4754880" cy="2377440"/>
+            <a:off x="731520" y="1371600"/>
+            <a:ext cx="10515600" cy="1371600"/>
           </a:xfrm>
           <a:prstGeom prst="rect">
             <a:avLst/>
@@ -3419,60 +3324,3549 @@
           <a:lstStyle/>
           <a:p>
             <a:pPr>
-              <a:defRPr sz="1100" b="1">
-                <a:solidFill>
-                  <a:srgbClr val="34D399"/>
-                </a:solidFill>
-              </a:defRPr>
-            </a:pPr>
-            <a:r>
-              <a:t>SUBMISSION &amp; ENGINEERING HIGHLIGHTS</a:t>
+              <a:defRPr sz="3600" b="1">
+                <a:solidFill>
+                  <a:srgbClr val="FFFFFF"/>
+                </a:solidFill>
+                <a:latin typeface="Segoe UI"/>
+              </a:defRPr>
+            </a:pPr>
+            <a:r>
+              <a:t>ARTIFICIAL INTELLIGENCE IN FINANCIAL RISK</a:t>
             </a:r>
           </a:p>
           <a:p>
             <a:pPr>
-              <a:defRPr sz="1200">
-                <a:solidFill>
-                  <a:srgbClr val="F9FAFB"/>
-                </a:solidFill>
-              </a:defRPr>
-            </a:pPr>
-            <a:r>
-              <a:t>• Fully Completed Technical &amp; Submission Requirements</a:t>
+              <a:defRPr sz="1600">
+                <a:solidFill>
+                  <a:srgbClr val="FFEDD5"/>
+                </a:solidFill>
+                <a:latin typeface="Segoe UI"/>
+              </a:defRPr>
+            </a:pPr>
+            <a:r>
+              <a:t>RiskPulse: NLP Sentiment Engine &amp; Strategic Portfolio Stress Testing Platform</a:t>
+            </a:r>
+          </a:p>
+        </p:txBody>
+      </p:sp>
+      <p:sp>
+        <p:nvSpPr>
+          <p:cNvPr id="7" name="TextBox 6"/>
+          <p:cNvSpPr txBox="1"/>
+          <p:nvPr/>
+        </p:nvSpPr>
+        <p:spPr>
+          <a:xfrm>
+            <a:off x="731520" y="2926080"/>
+            <a:ext cx="5486400" cy="3200400"/>
+          </a:xfrm>
+          <a:prstGeom prst="rect">
+            <a:avLst/>
+          </a:prstGeom>
+          <a:noFill/>
+        </p:spPr>
+        <p:txBody>
+          <a:bodyPr wrap="square">
+            <a:spAutoFit/>
+          </a:bodyPr>
+          <a:lstStyle/>
+          <a:p>
+            <a:pPr>
+              <a:defRPr sz="2400" b="1">
+                <a:solidFill>
+                  <a:srgbClr val="FFFFFF"/>
+                </a:solidFill>
+                <a:latin typeface="Segoe UI"/>
+              </a:defRPr>
+            </a:pPr>
+            <a:r>
+              <a:t>SHAPING THE FUTURE</a:t>
             </a:r>
             <a:br/>
             <a:r>
-              <a:t>• Dual-Source Ingestion: Financial News Wire &amp; Social Feed</a:t>
-            </a:r>
+              <a:t>OF RISK INTELLIGENCE</a:t>
+            </a:r>
+          </a:p>
+          <a:p>
             <a:br/>
-            <a:r>
-              <a:t>• Optional Real-Time Public RSS Ingestion with Fallback</a:t>
+            <a:pPr>
+              <a:defRPr sz="1300">
+                <a:solidFill>
+                  <a:srgbClr val="FFFFFF"/>
+                </a:solidFill>
+                <a:latin typeface="Segoe UI"/>
+              </a:defRPr>
+            </a:pPr>
+            <a:r>
+              <a:t>Candidate: Abhi Pandey (21BCE10462)</a:t>
             </a:r>
             <a:br/>
             <a:r>
-              <a:t>• 30/30 Unit &amp; Integration Tests Passed (100% Pass Rate)</a:t>
+              <a:t>B.Tech CSE (AI &amp; Machine Learning)</a:t>
             </a:r>
             <a:br/>
             <a:r>
-              <a:t>• Sub-15ms NLP Inference Latency | Zero Cloud Vendor Lock-in</a:t>
+              <a:t>VIT Bhopal University, Madhya Pradesh</a:t>
             </a:r>
             <a:br/>
             <a:r>
-              <a:t>• Complete End-to-End React 18 + FastAPI + SQLite Architecture</a:t>
-            </a:r>
-          </a:p>
-        </p:txBody>
-      </p:sp>
-      <p:sp>
-        <p:nvSpPr>
-          <p:cNvPr id="9" name="TextBox 8"/>
+              <a:t>S&amp;P Global &amp; CRISIL Campus Hackathon 2026</a:t>
+            </a:r>
+          </a:p>
+        </p:txBody>
+      </p:sp>
+      <p:pic>
+        <p:nvPicPr>
+          <p:cNvPr id="8" name="Picture 7" descr="slide1_hero_graphic.png"/>
+          <p:cNvPicPr>
+            <a:picLocks noChangeAspect="1"/>
+          </p:cNvPicPr>
+          <p:nvPr/>
+        </p:nvPicPr>
+        <p:blipFill>
+          <a:blip r:embed="rId2"/>
+          <a:stretch>
+            <a:fillRect/>
+          </a:stretch>
+        </p:blipFill>
+        <p:spPr>
+          <a:xfrm>
+            <a:off x="6400800" y="2011680"/>
+            <a:ext cx="5303520" cy="3474720"/>
+          </a:xfrm>
+          <a:prstGeom prst="rect">
+            <a:avLst/>
+          </a:prstGeom>
+        </p:spPr>
+      </p:pic>
+    </p:spTree>
+  </p:cSld>
+  <p:clrMapOvr>
+    <a:masterClrMapping/>
+  </p:clrMapOvr>
+</p:sld>
+</file>
+
+<file path=ppt/slides/slide10.xml><?xml version="1.0" encoding="utf-8"?>
+<p:sld xmlns:a="http://schemas.openxmlformats.org/drawingml/2006/main" xmlns:p="http://schemas.openxmlformats.org/presentationml/2006/main" xmlns:r="http://schemas.openxmlformats.org/officeDocument/2006/relationships">
+  <p:cSld>
+    <p:spTree>
+      <p:nvGrpSpPr>
+        <p:cNvPr id="1" name=""/>
+        <p:cNvGrpSpPr/>
+        <p:nvPr/>
+      </p:nvGrpSpPr>
+      <p:grpSpPr/>
+      <p:sp>
+        <p:nvSpPr>
+          <p:cNvPr id="2" name="Rectangle 1"/>
+          <p:cNvSpPr/>
+          <p:nvPr/>
+        </p:nvSpPr>
+        <p:spPr>
+          <a:xfrm>
+            <a:off x="0" y="0"/>
+            <a:ext cx="12191695" cy="6858000"/>
+          </a:xfrm>
+          <a:prstGeom prst="rect">
+            <a:avLst/>
+          </a:prstGeom>
+          <a:solidFill>
+            <a:srgbClr val="FF5E00"/>
+          </a:solidFill>
+          <a:ln>
+            <a:noFill/>
+          </a:ln>
+        </p:spPr>
+        <p:style>
+          <a:lnRef idx="1">
+            <a:schemeClr val="accent1"/>
+          </a:lnRef>
+          <a:fillRef idx="3">
+            <a:schemeClr val="accent1"/>
+          </a:fillRef>
+          <a:effectRef idx="2">
+            <a:schemeClr val="accent1"/>
+          </a:effectRef>
+          <a:fontRef idx="minor">
+            <a:schemeClr val="lt1"/>
+          </a:fontRef>
+        </p:style>
+        <p:txBody>
+          <a:bodyPr rtlCol="0" anchor="ctr"/>
+          <a:lstStyle/>
+          <a:p>
+            <a:pPr algn="ctr"/>
+          </a:p>
+        </p:txBody>
+      </p:sp>
+      <p:sp>
+        <p:nvSpPr>
+          <p:cNvPr id="3" name="Oval 2"/>
+          <p:cNvSpPr/>
+          <p:nvPr/>
+        </p:nvSpPr>
+        <p:spPr>
+          <a:xfrm>
+            <a:off x="7772400" y="-1371600"/>
+            <a:ext cx="6858000" cy="6858000"/>
+          </a:xfrm>
+          <a:prstGeom prst="ellipse">
+            <a:avLst/>
+          </a:prstGeom>
+          <a:solidFill>
+            <a:srgbClr val="FF7814"/>
+          </a:solidFill>
+          <a:ln>
+            <a:noFill/>
+          </a:ln>
+        </p:spPr>
+        <p:style>
+          <a:lnRef idx="1">
+            <a:schemeClr val="accent1"/>
+          </a:lnRef>
+          <a:fillRef idx="3">
+            <a:schemeClr val="accent1"/>
+          </a:fillRef>
+          <a:effectRef idx="2">
+            <a:schemeClr val="accent1"/>
+          </a:effectRef>
+          <a:fontRef idx="minor">
+            <a:schemeClr val="lt1"/>
+          </a:fontRef>
+        </p:style>
+        <p:txBody>
+          <a:bodyPr rtlCol="0" anchor="ctr"/>
+          <a:lstStyle/>
+          <a:p>
+            <a:pPr algn="ctr"/>
+          </a:p>
+        </p:txBody>
+      </p:sp>
+      <p:sp>
+        <p:nvSpPr>
+          <p:cNvPr id="4" name="Rounded Rectangle 3"/>
+          <p:cNvSpPr/>
+          <p:nvPr/>
+        </p:nvSpPr>
+        <p:spPr>
+          <a:xfrm>
+            <a:off x="731520" y="502920"/>
+            <a:ext cx="2011680" cy="438912"/>
+          </a:xfrm>
+          <a:prstGeom prst="roundRect">
+            <a:avLst/>
+          </a:prstGeom>
+          <a:solidFill>
+            <a:srgbClr val="E65100"/>
+          </a:solidFill>
+          <a:ln w="19050">
+            <a:solidFill>
+              <a:srgbClr val="FFFFFF"/>
+            </a:solidFill>
+          </a:ln>
+        </p:spPr>
+        <p:style>
+          <a:lnRef idx="1">
+            <a:schemeClr val="accent1"/>
+          </a:lnRef>
+          <a:fillRef idx="3">
+            <a:schemeClr val="accent1"/>
+          </a:fillRef>
+          <a:effectRef idx="2">
+            <a:schemeClr val="accent1"/>
+          </a:effectRef>
+          <a:fontRef idx="minor">
+            <a:schemeClr val="lt1"/>
+          </a:fontRef>
+        </p:style>
+        <p:txBody>
+          <a:bodyPr rtlCol="0" anchor="ctr"/>
+          <a:lstStyle/>
+          <a:p>
+            <a:pPr algn="ctr">
+              <a:defRPr sz="1000" b="1">
+                <a:solidFill>
+                  <a:srgbClr val="FFFFFF"/>
+                </a:solidFill>
+                <a:latin typeface="Segoe UI"/>
+              </a:defRPr>
+            </a:pPr>
+            <a:r>
+              <a:t>RISKPULSE</a:t>
+            </a:r>
+          </a:p>
+        </p:txBody>
+      </p:sp>
+      <p:sp>
+        <p:nvSpPr>
+          <p:cNvPr id="5" name="Oval 4"/>
+          <p:cNvSpPr/>
+          <p:nvPr/>
+        </p:nvSpPr>
+        <p:spPr>
+          <a:xfrm>
+            <a:off x="10972800" y="5760720"/>
+            <a:ext cx="621792" cy="621792"/>
+          </a:xfrm>
+          <a:prstGeom prst="ellipse">
+            <a:avLst/>
+          </a:prstGeom>
+          <a:solidFill>
+            <a:srgbClr val="FFFFFF"/>
+          </a:solidFill>
+          <a:ln>
+            <a:noFill/>
+          </a:ln>
+        </p:spPr>
+        <p:style>
+          <a:lnRef idx="1">
+            <a:schemeClr val="accent1"/>
+          </a:lnRef>
+          <a:fillRef idx="3">
+            <a:schemeClr val="accent1"/>
+          </a:fillRef>
+          <a:effectRef idx="2">
+            <a:schemeClr val="accent1"/>
+          </a:effectRef>
+          <a:fontRef idx="minor">
+            <a:schemeClr val="lt1"/>
+          </a:fontRef>
+        </p:style>
+        <p:txBody>
+          <a:bodyPr rtlCol="0" anchor="ctr"/>
+          <a:lstStyle/>
+          <a:p>
+            <a:pPr algn="ctr">
+              <a:defRPr sz="1800" b="1">
+                <a:solidFill>
+                  <a:srgbClr val="FF5E00"/>
+                </a:solidFill>
+                <a:latin typeface="Segoe UI"/>
+              </a:defRPr>
+            </a:pPr>
+            <a:r>
+              <a:t>&gt;</a:t>
+            </a:r>
+          </a:p>
+        </p:txBody>
+      </p:sp>
+      <p:sp>
+        <p:nvSpPr>
+          <p:cNvPr id="6" name="TextBox 5"/>
           <p:cNvSpPr txBox="1"/>
           <p:nvPr/>
         </p:nvSpPr>
         <p:spPr>
           <a:xfrm>
-            <a:off x="731520" y="6217920"/>
-            <a:ext cx="10698480" cy="365760"/>
+            <a:off x="731520" y="1371600"/>
+            <a:ext cx="10515600" cy="1371600"/>
+          </a:xfrm>
+          <a:prstGeom prst="rect">
+            <a:avLst/>
+          </a:prstGeom>
+          <a:noFill/>
+        </p:spPr>
+        <p:txBody>
+          <a:bodyPr wrap="square">
+            <a:spAutoFit/>
+          </a:bodyPr>
+          <a:lstStyle/>
+          <a:p>
+            <a:pPr>
+              <a:defRPr sz="3600" b="1">
+                <a:solidFill>
+                  <a:srgbClr val="FFFFFF"/>
+                </a:solidFill>
+                <a:latin typeface="Segoe UI"/>
+              </a:defRPr>
+            </a:pPr>
+            <a:r>
+              <a:t>END-TO-END SYSTEM WORKFLOW</a:t>
+            </a:r>
+          </a:p>
+          <a:p>
+            <a:pPr>
+              <a:defRPr sz="1600">
+                <a:solidFill>
+                  <a:srgbClr val="FFEDD5"/>
+                </a:solidFill>
+                <a:latin typeface="Segoe UI"/>
+              </a:defRPr>
+            </a:pPr>
+            <a:r>
+              <a:t>Sequential Pipeline Execution Across Six Critical Stages</a:t>
+            </a:r>
+          </a:p>
+        </p:txBody>
+      </p:sp>
+      <p:pic>
+        <p:nvPicPr>
+          <p:cNvPr id="7" name="Picture 6" descr="slide9_workflow_flowchart.png"/>
+          <p:cNvPicPr>
+            <a:picLocks noChangeAspect="1"/>
+          </p:cNvPicPr>
+          <p:nvPr/>
+        </p:nvPicPr>
+        <p:blipFill>
+          <a:blip r:embed="rId2"/>
+          <a:stretch>
+            <a:fillRect/>
+          </a:stretch>
+        </p:blipFill>
+        <p:spPr>
+          <a:xfrm>
+            <a:off x="914400" y="2560320"/>
+            <a:ext cx="10332720" cy="3474720"/>
+          </a:xfrm>
+          <a:prstGeom prst="rect">
+            <a:avLst/>
+          </a:prstGeom>
+        </p:spPr>
+      </p:pic>
+    </p:spTree>
+  </p:cSld>
+  <p:clrMapOvr>
+    <a:masterClrMapping/>
+  </p:clrMapOvr>
+</p:sld>
+</file>
+
+<file path=ppt/slides/slide11.xml><?xml version="1.0" encoding="utf-8"?>
+<p:sld xmlns:a="http://schemas.openxmlformats.org/drawingml/2006/main" xmlns:p="http://schemas.openxmlformats.org/presentationml/2006/main" xmlns:r="http://schemas.openxmlformats.org/officeDocument/2006/relationships">
+  <p:cSld>
+    <p:spTree>
+      <p:nvGrpSpPr>
+        <p:cNvPr id="1" name=""/>
+        <p:cNvGrpSpPr/>
+        <p:nvPr/>
+      </p:nvGrpSpPr>
+      <p:grpSpPr/>
+      <p:sp>
+        <p:nvSpPr>
+          <p:cNvPr id="2" name="Rectangle 1"/>
+          <p:cNvSpPr/>
+          <p:nvPr/>
+        </p:nvSpPr>
+        <p:spPr>
+          <a:xfrm>
+            <a:off x="0" y="0"/>
+            <a:ext cx="12191695" cy="6858000"/>
+          </a:xfrm>
+          <a:prstGeom prst="rect">
+            <a:avLst/>
+          </a:prstGeom>
+          <a:solidFill>
+            <a:srgbClr val="FFFFFF"/>
+          </a:solidFill>
+          <a:ln>
+            <a:noFill/>
+          </a:ln>
+        </p:spPr>
+        <p:style>
+          <a:lnRef idx="1">
+            <a:schemeClr val="accent1"/>
+          </a:lnRef>
+          <a:fillRef idx="3">
+            <a:schemeClr val="accent1"/>
+          </a:fillRef>
+          <a:effectRef idx="2">
+            <a:schemeClr val="accent1"/>
+          </a:effectRef>
+          <a:fontRef idx="minor">
+            <a:schemeClr val="lt1"/>
+          </a:fontRef>
+        </p:style>
+        <p:txBody>
+          <a:bodyPr rtlCol="0" anchor="ctr"/>
+          <a:lstStyle/>
+          <a:p>
+            <a:pPr algn="ctr"/>
+          </a:p>
+        </p:txBody>
+      </p:sp>
+      <p:sp>
+        <p:nvSpPr>
+          <p:cNvPr id="3" name="Rectangle 2"/>
+          <p:cNvSpPr/>
+          <p:nvPr/>
+        </p:nvSpPr>
+        <p:spPr>
+          <a:xfrm>
+            <a:off x="0" y="0"/>
+            <a:ext cx="12191695" cy="137160"/>
+          </a:xfrm>
+          <a:prstGeom prst="rect">
+            <a:avLst/>
+          </a:prstGeom>
+          <a:solidFill>
+            <a:srgbClr val="FF5E00"/>
+          </a:solidFill>
+          <a:ln>
+            <a:noFill/>
+          </a:ln>
+        </p:spPr>
+        <p:style>
+          <a:lnRef idx="1">
+            <a:schemeClr val="accent1"/>
+          </a:lnRef>
+          <a:fillRef idx="3">
+            <a:schemeClr val="accent1"/>
+          </a:fillRef>
+          <a:effectRef idx="2">
+            <a:schemeClr val="accent1"/>
+          </a:effectRef>
+          <a:fontRef idx="minor">
+            <a:schemeClr val="lt1"/>
+          </a:fontRef>
+        </p:style>
+        <p:txBody>
+          <a:bodyPr rtlCol="0" anchor="ctr"/>
+          <a:lstStyle/>
+          <a:p>
+            <a:pPr algn="ctr"/>
+          </a:p>
+        </p:txBody>
+      </p:sp>
+      <p:sp>
+        <p:nvSpPr>
+          <p:cNvPr id="4" name="Rounded Rectangle 3"/>
+          <p:cNvSpPr/>
+          <p:nvPr/>
+        </p:nvSpPr>
+        <p:spPr>
+          <a:xfrm>
+            <a:off x="9418320" y="502920"/>
+            <a:ext cx="2011680" cy="438912"/>
+          </a:xfrm>
+          <a:prstGeom prst="roundRect">
+            <a:avLst/>
+          </a:prstGeom>
+          <a:solidFill>
+            <a:srgbClr val="FFFFFF"/>
+          </a:solidFill>
+          <a:ln w="19050">
+            <a:solidFill>
+              <a:srgbClr val="FF5E00"/>
+            </a:solidFill>
+          </a:ln>
+        </p:spPr>
+        <p:style>
+          <a:lnRef idx="1">
+            <a:schemeClr val="accent1"/>
+          </a:lnRef>
+          <a:fillRef idx="3">
+            <a:schemeClr val="accent1"/>
+          </a:fillRef>
+          <a:effectRef idx="2">
+            <a:schemeClr val="accent1"/>
+          </a:effectRef>
+          <a:fontRef idx="minor">
+            <a:schemeClr val="lt1"/>
+          </a:fontRef>
+        </p:style>
+        <p:txBody>
+          <a:bodyPr rtlCol="0" anchor="ctr"/>
+          <a:lstStyle/>
+          <a:p>
+            <a:pPr algn="ctr">
+              <a:defRPr sz="1000" b="1">
+                <a:solidFill>
+                  <a:srgbClr val="FF5E00"/>
+                </a:solidFill>
+                <a:latin typeface="Segoe UI"/>
+              </a:defRPr>
+            </a:pPr>
+            <a:r>
+              <a:t>VIT BHOPAL</a:t>
+            </a:r>
+          </a:p>
+        </p:txBody>
+      </p:sp>
+      <p:sp>
+        <p:nvSpPr>
+          <p:cNvPr id="5" name="Oval 4"/>
+          <p:cNvSpPr/>
+          <p:nvPr/>
+        </p:nvSpPr>
+        <p:spPr>
+          <a:xfrm>
+            <a:off x="10972800" y="5760720"/>
+            <a:ext cx="621792" cy="621792"/>
+          </a:xfrm>
+          <a:prstGeom prst="ellipse">
+            <a:avLst/>
+          </a:prstGeom>
+          <a:solidFill>
+            <a:srgbClr val="FF5E00"/>
+          </a:solidFill>
+          <a:ln>
+            <a:noFill/>
+          </a:ln>
+        </p:spPr>
+        <p:style>
+          <a:lnRef idx="1">
+            <a:schemeClr val="accent1"/>
+          </a:lnRef>
+          <a:fillRef idx="3">
+            <a:schemeClr val="accent1"/>
+          </a:fillRef>
+          <a:effectRef idx="2">
+            <a:schemeClr val="accent1"/>
+          </a:effectRef>
+          <a:fontRef idx="minor">
+            <a:schemeClr val="lt1"/>
+          </a:fontRef>
+        </p:style>
+        <p:txBody>
+          <a:bodyPr rtlCol="0" anchor="ctr"/>
+          <a:lstStyle/>
+          <a:p>
+            <a:pPr algn="ctr">
+              <a:defRPr sz="1800" b="1">
+                <a:solidFill>
+                  <a:srgbClr val="FFFFFF"/>
+                </a:solidFill>
+                <a:latin typeface="Segoe UI"/>
+              </a:defRPr>
+            </a:pPr>
+            <a:r>
+              <a:t>&gt;</a:t>
+            </a:r>
+          </a:p>
+        </p:txBody>
+      </p:sp>
+      <p:sp>
+        <p:nvSpPr>
+          <p:cNvPr id="6" name="TextBox 5"/>
+          <p:cNvSpPr txBox="1"/>
+          <p:nvPr/>
+        </p:nvSpPr>
+        <p:spPr>
+          <a:xfrm>
+            <a:off x="731520" y="822960"/>
+            <a:ext cx="8229600" cy="1188720"/>
+          </a:xfrm>
+          <a:prstGeom prst="rect">
+            <a:avLst/>
+          </a:prstGeom>
+          <a:noFill/>
+        </p:spPr>
+        <p:txBody>
+          <a:bodyPr wrap="square">
+            <a:spAutoFit/>
+          </a:bodyPr>
+          <a:lstStyle/>
+          <a:p>
+            <a:pPr>
+              <a:defRPr sz="3000" b="1">
+                <a:solidFill>
+                  <a:srgbClr val="FF5E00"/>
+                </a:solidFill>
+                <a:latin typeface="Segoe UI"/>
+              </a:defRPr>
+            </a:pPr>
+            <a:r>
+              <a:t>METHODOLOGY &amp;</a:t>
+            </a:r>
+            <a:br/>
+            <a:r>
+              <a:t>FORMULATIONS</a:t>
+            </a:r>
+          </a:p>
+        </p:txBody>
+      </p:sp>
+      <p:pic>
+        <p:nvPicPr>
+          <p:cNvPr id="7" name="Picture 6" descr="slide10_methodology_pipeline.png"/>
+          <p:cNvPicPr>
+            <a:picLocks noChangeAspect="1"/>
+          </p:cNvPicPr>
+          <p:nvPr/>
+        </p:nvPicPr>
+        <p:blipFill>
+          <a:blip r:embed="rId2"/>
+          <a:stretch>
+            <a:fillRect/>
+          </a:stretch>
+        </p:blipFill>
+        <p:spPr>
+          <a:xfrm>
+            <a:off x="731520" y="1920240"/>
+            <a:ext cx="10515600" cy="3291840"/>
+          </a:xfrm>
+          <a:prstGeom prst="rect">
+            <a:avLst/>
+          </a:prstGeom>
+        </p:spPr>
+      </p:pic>
+      <p:sp>
+        <p:nvSpPr>
+          <p:cNvPr id="8" name="TextBox 7"/>
+          <p:cNvSpPr txBox="1"/>
+          <p:nvPr/>
+        </p:nvSpPr>
+        <p:spPr>
+          <a:xfrm>
+            <a:off x="731520" y="5303520"/>
+            <a:ext cx="10058400" cy="1097280"/>
+          </a:xfrm>
+          <a:prstGeom prst="rect">
+            <a:avLst/>
+          </a:prstGeom>
+          <a:noFill/>
+        </p:spPr>
+        <p:txBody>
+          <a:bodyPr wrap="square">
+            <a:spAutoFit/>
+          </a:bodyPr>
+          <a:lstStyle/>
+          <a:p>
+            <a:pPr>
+              <a:defRPr sz="1200" b="1">
+                <a:solidFill>
+                  <a:srgbClr val="1E293B"/>
+                </a:solidFill>
+                <a:latin typeface="Segoe UI"/>
+              </a:defRPr>
+            </a:pPr>
+            <a:r>
+              <a:t>• Sentiment Polarity: S = P(Positive) - P(Negative) ∈ [-1.0, +1.0]</a:t>
+            </a:r>
+            <a:br/>
+            <a:r>
+              <a:t>• Asset Shock Formula: ΔP_i = Base_Shock · β_i · (1 + I_i / 10)  |  Tail Risk: VaR_α = V_p · z_α · σ_p</a:t>
+            </a:r>
+          </a:p>
+        </p:txBody>
+      </p:sp>
+    </p:spTree>
+  </p:cSld>
+  <p:clrMapOvr>
+    <a:masterClrMapping/>
+  </p:clrMapOvr>
+</p:sld>
+</file>
+
+<file path=ppt/slides/slide12.xml><?xml version="1.0" encoding="utf-8"?>
+<p:sld xmlns:a="http://schemas.openxmlformats.org/drawingml/2006/main" xmlns:p="http://schemas.openxmlformats.org/presentationml/2006/main" xmlns:r="http://schemas.openxmlformats.org/officeDocument/2006/relationships">
+  <p:cSld>
+    <p:spTree>
+      <p:nvGrpSpPr>
+        <p:cNvPr id="1" name=""/>
+        <p:cNvGrpSpPr/>
+        <p:nvPr/>
+      </p:nvGrpSpPr>
+      <p:grpSpPr/>
+      <p:sp>
+        <p:nvSpPr>
+          <p:cNvPr id="2" name="Rectangle 1"/>
+          <p:cNvSpPr/>
+          <p:nvPr/>
+        </p:nvSpPr>
+        <p:spPr>
+          <a:xfrm>
+            <a:off x="0" y="0"/>
+            <a:ext cx="12191695" cy="6858000"/>
+          </a:xfrm>
+          <a:prstGeom prst="rect">
+            <a:avLst/>
+          </a:prstGeom>
+          <a:solidFill>
+            <a:srgbClr val="FFFFFF"/>
+          </a:solidFill>
+          <a:ln>
+            <a:noFill/>
+          </a:ln>
+        </p:spPr>
+        <p:style>
+          <a:lnRef idx="1">
+            <a:schemeClr val="accent1"/>
+          </a:lnRef>
+          <a:fillRef idx="3">
+            <a:schemeClr val="accent1"/>
+          </a:fillRef>
+          <a:effectRef idx="2">
+            <a:schemeClr val="accent1"/>
+          </a:effectRef>
+          <a:fontRef idx="minor">
+            <a:schemeClr val="lt1"/>
+          </a:fontRef>
+        </p:style>
+        <p:txBody>
+          <a:bodyPr rtlCol="0" anchor="ctr"/>
+          <a:lstStyle/>
+          <a:p>
+            <a:pPr algn="ctr"/>
+          </a:p>
+        </p:txBody>
+      </p:sp>
+      <p:sp>
+        <p:nvSpPr>
+          <p:cNvPr id="3" name="Rectangle 2"/>
+          <p:cNvSpPr/>
+          <p:nvPr/>
+        </p:nvSpPr>
+        <p:spPr>
+          <a:xfrm>
+            <a:off x="0" y="0"/>
+            <a:ext cx="12191695" cy="137160"/>
+          </a:xfrm>
+          <a:prstGeom prst="rect">
+            <a:avLst/>
+          </a:prstGeom>
+          <a:solidFill>
+            <a:srgbClr val="FF5E00"/>
+          </a:solidFill>
+          <a:ln>
+            <a:noFill/>
+          </a:ln>
+        </p:spPr>
+        <p:style>
+          <a:lnRef idx="1">
+            <a:schemeClr val="accent1"/>
+          </a:lnRef>
+          <a:fillRef idx="3">
+            <a:schemeClr val="accent1"/>
+          </a:fillRef>
+          <a:effectRef idx="2">
+            <a:schemeClr val="accent1"/>
+          </a:effectRef>
+          <a:fontRef idx="minor">
+            <a:schemeClr val="lt1"/>
+          </a:fontRef>
+        </p:style>
+        <p:txBody>
+          <a:bodyPr rtlCol="0" anchor="ctr"/>
+          <a:lstStyle/>
+          <a:p>
+            <a:pPr algn="ctr"/>
+          </a:p>
+        </p:txBody>
+      </p:sp>
+      <p:sp>
+        <p:nvSpPr>
+          <p:cNvPr id="4" name="Rounded Rectangle 3"/>
+          <p:cNvSpPr/>
+          <p:nvPr/>
+        </p:nvSpPr>
+        <p:spPr>
+          <a:xfrm>
+            <a:off x="9418320" y="502920"/>
+            <a:ext cx="2011680" cy="438912"/>
+          </a:xfrm>
+          <a:prstGeom prst="roundRect">
+            <a:avLst/>
+          </a:prstGeom>
+          <a:solidFill>
+            <a:srgbClr val="FFFFFF"/>
+          </a:solidFill>
+          <a:ln w="19050">
+            <a:solidFill>
+              <a:srgbClr val="FF5E00"/>
+            </a:solidFill>
+          </a:ln>
+        </p:spPr>
+        <p:style>
+          <a:lnRef idx="1">
+            <a:schemeClr val="accent1"/>
+          </a:lnRef>
+          <a:fillRef idx="3">
+            <a:schemeClr val="accent1"/>
+          </a:fillRef>
+          <a:effectRef idx="2">
+            <a:schemeClr val="accent1"/>
+          </a:effectRef>
+          <a:fontRef idx="minor">
+            <a:schemeClr val="lt1"/>
+          </a:fontRef>
+        </p:style>
+        <p:txBody>
+          <a:bodyPr rtlCol="0" anchor="ctr"/>
+          <a:lstStyle/>
+          <a:p>
+            <a:pPr algn="ctr">
+              <a:defRPr sz="1000" b="1">
+                <a:solidFill>
+                  <a:srgbClr val="FF5E00"/>
+                </a:solidFill>
+                <a:latin typeface="Segoe UI"/>
+              </a:defRPr>
+            </a:pPr>
+            <a:r>
+              <a:t>RISKPULSE</a:t>
+            </a:r>
+          </a:p>
+        </p:txBody>
+      </p:sp>
+      <p:sp>
+        <p:nvSpPr>
+          <p:cNvPr id="5" name="Oval 4"/>
+          <p:cNvSpPr/>
+          <p:nvPr/>
+        </p:nvSpPr>
+        <p:spPr>
+          <a:xfrm>
+            <a:off x="10972800" y="5760720"/>
+            <a:ext cx="621792" cy="621792"/>
+          </a:xfrm>
+          <a:prstGeom prst="ellipse">
+            <a:avLst/>
+          </a:prstGeom>
+          <a:solidFill>
+            <a:srgbClr val="FF5E00"/>
+          </a:solidFill>
+          <a:ln>
+            <a:noFill/>
+          </a:ln>
+        </p:spPr>
+        <p:style>
+          <a:lnRef idx="1">
+            <a:schemeClr val="accent1"/>
+          </a:lnRef>
+          <a:fillRef idx="3">
+            <a:schemeClr val="accent1"/>
+          </a:fillRef>
+          <a:effectRef idx="2">
+            <a:schemeClr val="accent1"/>
+          </a:effectRef>
+          <a:fontRef idx="minor">
+            <a:schemeClr val="lt1"/>
+          </a:fontRef>
+        </p:style>
+        <p:txBody>
+          <a:bodyPr rtlCol="0" anchor="ctr"/>
+          <a:lstStyle/>
+          <a:p>
+            <a:pPr algn="ctr">
+              <a:defRPr sz="1800" b="1">
+                <a:solidFill>
+                  <a:srgbClr val="FFFFFF"/>
+                </a:solidFill>
+                <a:latin typeface="Segoe UI"/>
+              </a:defRPr>
+            </a:pPr>
+            <a:r>
+              <a:t>&gt;</a:t>
+            </a:r>
+          </a:p>
+        </p:txBody>
+      </p:sp>
+      <p:sp>
+        <p:nvSpPr>
+          <p:cNvPr id="6" name="TextBox 5"/>
+          <p:cNvSpPr txBox="1"/>
+          <p:nvPr/>
+        </p:nvSpPr>
+        <p:spPr>
+          <a:xfrm>
+            <a:off x="731520" y="822960"/>
+            <a:ext cx="8229600" cy="1188720"/>
+          </a:xfrm>
+          <a:prstGeom prst="rect">
+            <a:avLst/>
+          </a:prstGeom>
+          <a:noFill/>
+        </p:spPr>
+        <p:txBody>
+          <a:bodyPr wrap="square">
+            <a:spAutoFit/>
+          </a:bodyPr>
+          <a:lstStyle/>
+          <a:p>
+            <a:pPr>
+              <a:defRPr sz="3000" b="1">
+                <a:solidFill>
+                  <a:srgbClr val="FF5E00"/>
+                </a:solidFill>
+                <a:latin typeface="Segoe UI"/>
+              </a:defRPr>
+            </a:pPr>
+            <a:r>
+              <a:t>TECHNOLOGY STACK</a:t>
+            </a:r>
+          </a:p>
+        </p:txBody>
+      </p:sp>
+      <p:sp>
+        <p:nvSpPr>
+          <p:cNvPr id="7" name="Rounded Rectangle 6"/>
+          <p:cNvSpPr/>
+          <p:nvPr/>
+        </p:nvSpPr>
+        <p:spPr>
+          <a:xfrm>
+            <a:off x="731520" y="2194560"/>
+            <a:ext cx="3291840" cy="1737360"/>
+          </a:xfrm>
+          <a:prstGeom prst="roundRect">
+            <a:avLst/>
+          </a:prstGeom>
+          <a:solidFill>
+            <a:srgbClr val="F8FAFC"/>
+          </a:solidFill>
+          <a:ln w="19050">
+            <a:solidFill>
+              <a:srgbClr val="FF5E00"/>
+            </a:solidFill>
+          </a:ln>
+        </p:spPr>
+        <p:style>
+          <a:lnRef idx="1">
+            <a:schemeClr val="accent1"/>
+          </a:lnRef>
+          <a:fillRef idx="3">
+            <a:schemeClr val="accent1"/>
+          </a:fillRef>
+          <a:effectRef idx="2">
+            <a:schemeClr val="accent1"/>
+          </a:effectRef>
+          <a:fontRef idx="minor">
+            <a:schemeClr val="lt1"/>
+          </a:fontRef>
+        </p:style>
+        <p:txBody>
+          <a:bodyPr rtlCol="0" anchor="ctr"/>
+          <a:lstStyle/>
+          <a:p>
+            <a:pPr algn="ctr"/>
+          </a:p>
+        </p:txBody>
+      </p:sp>
+      <p:sp>
+        <p:nvSpPr>
+          <p:cNvPr id="8" name="TextBox 7"/>
+          <p:cNvSpPr txBox="1"/>
+          <p:nvPr/>
+        </p:nvSpPr>
+        <p:spPr>
+          <a:xfrm>
+            <a:off x="914400" y="2331720"/>
+            <a:ext cx="2926080" cy="1463040"/>
+          </a:xfrm>
+          <a:prstGeom prst="rect">
+            <a:avLst/>
+          </a:prstGeom>
+          <a:noFill/>
+        </p:spPr>
+        <p:txBody>
+          <a:bodyPr wrap="square">
+            <a:spAutoFit/>
+          </a:bodyPr>
+          <a:lstStyle/>
+          <a:p>
+            <a:pPr>
+              <a:defRPr sz="1300" b="1">
+                <a:solidFill>
+                  <a:srgbClr val="FF5E00"/>
+                </a:solidFill>
+                <a:latin typeface="Segoe UI"/>
+              </a:defRPr>
+            </a:pPr>
+            <a:r>
+              <a:t>Frontend</a:t>
+            </a:r>
+          </a:p>
+          <a:p>
+            <a:pPr>
+              <a:defRPr sz="1100">
+                <a:solidFill>
+                  <a:srgbClr val="1E293B"/>
+                </a:solidFill>
+                <a:latin typeface="Segoe UI"/>
+              </a:defRPr>
+            </a:pPr>
+            <a:r>
+              <a:t>React 18, Vite, Tailwind CSS, Lucide Icons, Axios</a:t>
+            </a:r>
+          </a:p>
+        </p:txBody>
+      </p:sp>
+      <p:sp>
+        <p:nvSpPr>
+          <p:cNvPr id="9" name="Rounded Rectangle 8"/>
+          <p:cNvSpPr/>
+          <p:nvPr/>
+        </p:nvSpPr>
+        <p:spPr>
+          <a:xfrm>
+            <a:off x="4297680" y="2194560"/>
+            <a:ext cx="3291840" cy="1737360"/>
+          </a:xfrm>
+          <a:prstGeom prst="roundRect">
+            <a:avLst/>
+          </a:prstGeom>
+          <a:solidFill>
+            <a:srgbClr val="F8FAFC"/>
+          </a:solidFill>
+          <a:ln w="19050">
+            <a:solidFill>
+              <a:srgbClr val="FF5E00"/>
+            </a:solidFill>
+          </a:ln>
+        </p:spPr>
+        <p:style>
+          <a:lnRef idx="1">
+            <a:schemeClr val="accent1"/>
+          </a:lnRef>
+          <a:fillRef idx="3">
+            <a:schemeClr val="accent1"/>
+          </a:fillRef>
+          <a:effectRef idx="2">
+            <a:schemeClr val="accent1"/>
+          </a:effectRef>
+          <a:fontRef idx="minor">
+            <a:schemeClr val="lt1"/>
+          </a:fontRef>
+        </p:style>
+        <p:txBody>
+          <a:bodyPr rtlCol="0" anchor="ctr"/>
+          <a:lstStyle/>
+          <a:p>
+            <a:pPr algn="ctr"/>
+          </a:p>
+        </p:txBody>
+      </p:sp>
+      <p:sp>
+        <p:nvSpPr>
+          <p:cNvPr id="10" name="TextBox 9"/>
+          <p:cNvSpPr txBox="1"/>
+          <p:nvPr/>
+        </p:nvSpPr>
+        <p:spPr>
+          <a:xfrm>
+            <a:off x="4480560" y="2331720"/>
+            <a:ext cx="2926080" cy="1463040"/>
+          </a:xfrm>
+          <a:prstGeom prst="rect">
+            <a:avLst/>
+          </a:prstGeom>
+          <a:noFill/>
+        </p:spPr>
+        <p:txBody>
+          <a:bodyPr wrap="square">
+            <a:spAutoFit/>
+          </a:bodyPr>
+          <a:lstStyle/>
+          <a:p>
+            <a:pPr>
+              <a:defRPr sz="1300" b="1">
+                <a:solidFill>
+                  <a:srgbClr val="FF5E00"/>
+                </a:solidFill>
+                <a:latin typeface="Segoe UI"/>
+              </a:defRPr>
+            </a:pPr>
+            <a:r>
+              <a:t>Backend</a:t>
+            </a:r>
+          </a:p>
+          <a:p>
+            <a:pPr>
+              <a:defRPr sz="1100">
+                <a:solidFill>
+                  <a:srgbClr val="1E293B"/>
+                </a:solidFill>
+                <a:latin typeface="Segoe UI"/>
+              </a:defRPr>
+            </a:pPr>
+            <a:r>
+              <a:t>Python 3.11+, FastAPI (ASGI), Uvicorn, Pydantic v2</a:t>
+            </a:r>
+          </a:p>
+        </p:txBody>
+      </p:sp>
+      <p:sp>
+        <p:nvSpPr>
+          <p:cNvPr id="11" name="Rounded Rectangle 10"/>
+          <p:cNvSpPr/>
+          <p:nvPr/>
+        </p:nvSpPr>
+        <p:spPr>
+          <a:xfrm>
+            <a:off x="7863840" y="2194560"/>
+            <a:ext cx="3291840" cy="1737360"/>
+          </a:xfrm>
+          <a:prstGeom prst="roundRect">
+            <a:avLst/>
+          </a:prstGeom>
+          <a:solidFill>
+            <a:srgbClr val="F8FAFC"/>
+          </a:solidFill>
+          <a:ln w="19050">
+            <a:solidFill>
+              <a:srgbClr val="FF5E00"/>
+            </a:solidFill>
+          </a:ln>
+        </p:spPr>
+        <p:style>
+          <a:lnRef idx="1">
+            <a:schemeClr val="accent1"/>
+          </a:lnRef>
+          <a:fillRef idx="3">
+            <a:schemeClr val="accent1"/>
+          </a:fillRef>
+          <a:effectRef idx="2">
+            <a:schemeClr val="accent1"/>
+          </a:effectRef>
+          <a:fontRef idx="minor">
+            <a:schemeClr val="lt1"/>
+          </a:fontRef>
+        </p:style>
+        <p:txBody>
+          <a:bodyPr rtlCol="0" anchor="ctr"/>
+          <a:lstStyle/>
+          <a:p>
+            <a:pPr algn="ctr"/>
+          </a:p>
+        </p:txBody>
+      </p:sp>
+      <p:sp>
+        <p:nvSpPr>
+          <p:cNvPr id="12" name="TextBox 11"/>
+          <p:cNvSpPr txBox="1"/>
+          <p:nvPr/>
+        </p:nvSpPr>
+        <p:spPr>
+          <a:xfrm>
+            <a:off x="8046720" y="2331720"/>
+            <a:ext cx="2926080" cy="1463040"/>
+          </a:xfrm>
+          <a:prstGeom prst="rect">
+            <a:avLst/>
+          </a:prstGeom>
+          <a:noFill/>
+        </p:spPr>
+        <p:txBody>
+          <a:bodyPr wrap="square">
+            <a:spAutoFit/>
+          </a:bodyPr>
+          <a:lstStyle/>
+          <a:p>
+            <a:pPr>
+              <a:defRPr sz="1300" b="1">
+                <a:solidFill>
+                  <a:srgbClr val="FF5E00"/>
+                </a:solidFill>
+                <a:latin typeface="Segoe UI"/>
+              </a:defRPr>
+            </a:pPr>
+            <a:r>
+              <a:t>AI / ML</a:t>
+            </a:r>
+          </a:p>
+          <a:p>
+            <a:pPr>
+              <a:defRPr sz="1100">
+                <a:solidFill>
+                  <a:srgbClr val="1E293B"/>
+                </a:solidFill>
+                <a:latin typeface="Segoe UI"/>
+              </a:defRPr>
+            </a:pPr>
+            <a:r>
+              <a:t>FinBERT (ProsusAI), PyTorch, Hugging Face Transformers</a:t>
+            </a:r>
+          </a:p>
+        </p:txBody>
+      </p:sp>
+      <p:sp>
+        <p:nvSpPr>
+          <p:cNvPr id="13" name="Rounded Rectangle 12"/>
+          <p:cNvSpPr/>
+          <p:nvPr/>
+        </p:nvSpPr>
+        <p:spPr>
+          <a:xfrm>
+            <a:off x="731520" y="4206240"/>
+            <a:ext cx="3291840" cy="1737360"/>
+          </a:xfrm>
+          <a:prstGeom prst="roundRect">
+            <a:avLst/>
+          </a:prstGeom>
+          <a:solidFill>
+            <a:srgbClr val="F8FAFC"/>
+          </a:solidFill>
+          <a:ln w="19050">
+            <a:solidFill>
+              <a:srgbClr val="FF5E00"/>
+            </a:solidFill>
+          </a:ln>
+        </p:spPr>
+        <p:style>
+          <a:lnRef idx="1">
+            <a:schemeClr val="accent1"/>
+          </a:lnRef>
+          <a:fillRef idx="3">
+            <a:schemeClr val="accent1"/>
+          </a:fillRef>
+          <a:effectRef idx="2">
+            <a:schemeClr val="accent1"/>
+          </a:effectRef>
+          <a:fontRef idx="minor">
+            <a:schemeClr val="lt1"/>
+          </a:fontRef>
+        </p:style>
+        <p:txBody>
+          <a:bodyPr rtlCol="0" anchor="ctr"/>
+          <a:lstStyle/>
+          <a:p>
+            <a:pPr algn="ctr"/>
+          </a:p>
+        </p:txBody>
+      </p:sp>
+      <p:sp>
+        <p:nvSpPr>
+          <p:cNvPr id="14" name="TextBox 13"/>
+          <p:cNvSpPr txBox="1"/>
+          <p:nvPr/>
+        </p:nvSpPr>
+        <p:spPr>
+          <a:xfrm>
+            <a:off x="914400" y="4343400"/>
+            <a:ext cx="2926080" cy="1463040"/>
+          </a:xfrm>
+          <a:prstGeom prst="rect">
+            <a:avLst/>
+          </a:prstGeom>
+          <a:noFill/>
+        </p:spPr>
+        <p:txBody>
+          <a:bodyPr wrap="square">
+            <a:spAutoFit/>
+          </a:bodyPr>
+          <a:lstStyle/>
+          <a:p>
+            <a:pPr>
+              <a:defRPr sz="1300" b="1">
+                <a:solidFill>
+                  <a:srgbClr val="FF5E00"/>
+                </a:solidFill>
+                <a:latin typeface="Segoe UI"/>
+              </a:defRPr>
+            </a:pPr>
+            <a:r>
+              <a:t>Database</a:t>
+            </a:r>
+          </a:p>
+          <a:p>
+            <a:pPr>
+              <a:defRPr sz="1100">
+                <a:solidFill>
+                  <a:srgbClr val="1E293B"/>
+                </a:solidFill>
+                <a:latin typeface="Segoe UI"/>
+              </a:defRPr>
+            </a:pPr>
+            <a:r>
+              <a:t>SQLite 3, SQLAlchemy ORM, Indexed Signal Schema</a:t>
+            </a:r>
+          </a:p>
+        </p:txBody>
+      </p:sp>
+      <p:sp>
+        <p:nvSpPr>
+          <p:cNvPr id="15" name="Rounded Rectangle 14"/>
+          <p:cNvSpPr/>
+          <p:nvPr/>
+        </p:nvSpPr>
+        <p:spPr>
+          <a:xfrm>
+            <a:off x="4297680" y="4206240"/>
+            <a:ext cx="3291840" cy="1737360"/>
+          </a:xfrm>
+          <a:prstGeom prst="roundRect">
+            <a:avLst/>
+          </a:prstGeom>
+          <a:solidFill>
+            <a:srgbClr val="F8FAFC"/>
+          </a:solidFill>
+          <a:ln w="19050">
+            <a:solidFill>
+              <a:srgbClr val="FF5E00"/>
+            </a:solidFill>
+          </a:ln>
+        </p:spPr>
+        <p:style>
+          <a:lnRef idx="1">
+            <a:schemeClr val="accent1"/>
+          </a:lnRef>
+          <a:fillRef idx="3">
+            <a:schemeClr val="accent1"/>
+          </a:fillRef>
+          <a:effectRef idx="2">
+            <a:schemeClr val="accent1"/>
+          </a:effectRef>
+          <a:fontRef idx="minor">
+            <a:schemeClr val="lt1"/>
+          </a:fontRef>
+        </p:style>
+        <p:txBody>
+          <a:bodyPr rtlCol="0" anchor="ctr"/>
+          <a:lstStyle/>
+          <a:p>
+            <a:pPr algn="ctr"/>
+          </a:p>
+        </p:txBody>
+      </p:sp>
+      <p:sp>
+        <p:nvSpPr>
+          <p:cNvPr id="16" name="TextBox 15"/>
+          <p:cNvSpPr txBox="1"/>
+          <p:nvPr/>
+        </p:nvSpPr>
+        <p:spPr>
+          <a:xfrm>
+            <a:off x="4480560" y="4343400"/>
+            <a:ext cx="2926080" cy="1463040"/>
+          </a:xfrm>
+          <a:prstGeom prst="rect">
+            <a:avLst/>
+          </a:prstGeom>
+          <a:noFill/>
+        </p:spPr>
+        <p:txBody>
+          <a:bodyPr wrap="square">
+            <a:spAutoFit/>
+          </a:bodyPr>
+          <a:lstStyle/>
+          <a:p>
+            <a:pPr>
+              <a:defRPr sz="1300" b="1">
+                <a:solidFill>
+                  <a:srgbClr val="FF5E00"/>
+                </a:solidFill>
+                <a:latin typeface="Segoe UI"/>
+              </a:defRPr>
+            </a:pPr>
+            <a:r>
+              <a:t>Ingestion</a:t>
+            </a:r>
+          </a:p>
+          <a:p>
+            <a:pPr>
+              <a:defRPr sz="1100">
+                <a:solidFill>
+                  <a:srgbClr val="1E293B"/>
+                </a:solidFill>
+                <a:latin typeface="Segoe UI"/>
+              </a:defRPr>
+            </a:pPr>
+            <a:r>
+              <a:t>Feedparser, Requests, Regex Ticker Entity Parser</a:t>
+            </a:r>
+          </a:p>
+        </p:txBody>
+      </p:sp>
+      <p:sp>
+        <p:nvSpPr>
+          <p:cNvPr id="17" name="Rounded Rectangle 16"/>
+          <p:cNvSpPr/>
+          <p:nvPr/>
+        </p:nvSpPr>
+        <p:spPr>
+          <a:xfrm>
+            <a:off x="7863840" y="4206240"/>
+            <a:ext cx="3291840" cy="1737360"/>
+          </a:xfrm>
+          <a:prstGeom prst="roundRect">
+            <a:avLst/>
+          </a:prstGeom>
+          <a:solidFill>
+            <a:srgbClr val="F8FAFC"/>
+          </a:solidFill>
+          <a:ln w="19050">
+            <a:solidFill>
+              <a:srgbClr val="FF5E00"/>
+            </a:solidFill>
+          </a:ln>
+        </p:spPr>
+        <p:style>
+          <a:lnRef idx="1">
+            <a:schemeClr val="accent1"/>
+          </a:lnRef>
+          <a:fillRef idx="3">
+            <a:schemeClr val="accent1"/>
+          </a:fillRef>
+          <a:effectRef idx="2">
+            <a:schemeClr val="accent1"/>
+          </a:effectRef>
+          <a:fontRef idx="minor">
+            <a:schemeClr val="lt1"/>
+          </a:fontRef>
+        </p:style>
+        <p:txBody>
+          <a:bodyPr rtlCol="0" anchor="ctr"/>
+          <a:lstStyle/>
+          <a:p>
+            <a:pPr algn="ctr"/>
+          </a:p>
+        </p:txBody>
+      </p:sp>
+      <p:sp>
+        <p:nvSpPr>
+          <p:cNvPr id="18" name="TextBox 17"/>
+          <p:cNvSpPr txBox="1"/>
+          <p:nvPr/>
+        </p:nvSpPr>
+        <p:spPr>
+          <a:xfrm>
+            <a:off x="8046720" y="4343400"/>
+            <a:ext cx="2926080" cy="1463040"/>
+          </a:xfrm>
+          <a:prstGeom prst="rect">
+            <a:avLst/>
+          </a:prstGeom>
+          <a:noFill/>
+        </p:spPr>
+        <p:txBody>
+          <a:bodyPr wrap="square">
+            <a:spAutoFit/>
+          </a:bodyPr>
+          <a:lstStyle/>
+          <a:p>
+            <a:pPr>
+              <a:defRPr sz="1300" b="1">
+                <a:solidFill>
+                  <a:srgbClr val="FF5E00"/>
+                </a:solidFill>
+                <a:latin typeface="Segoe UI"/>
+              </a:defRPr>
+            </a:pPr>
+            <a:r>
+              <a:t>Testing &amp; Cloud</a:t>
+            </a:r>
+          </a:p>
+          <a:p>
+            <a:pPr>
+              <a:defRPr sz="1100">
+                <a:solidFill>
+                  <a:srgbClr val="1E293B"/>
+                </a:solidFill>
+                <a:latin typeface="Segoe UI"/>
+              </a:defRPr>
+            </a:pPr>
+            <a:r>
+              <a:t>Pytest (30 test suites), HTTPX, Vercel, Render</a:t>
+            </a:r>
+          </a:p>
+        </p:txBody>
+      </p:sp>
+    </p:spTree>
+  </p:cSld>
+  <p:clrMapOvr>
+    <a:masterClrMapping/>
+  </p:clrMapOvr>
+</p:sld>
+</file>
+
+<file path=ppt/slides/slide13.xml><?xml version="1.0" encoding="utf-8"?>
+<p:sld xmlns:a="http://schemas.openxmlformats.org/drawingml/2006/main" xmlns:p="http://schemas.openxmlformats.org/presentationml/2006/main" xmlns:r="http://schemas.openxmlformats.org/officeDocument/2006/relationships">
+  <p:cSld>
+    <p:spTree>
+      <p:nvGrpSpPr>
+        <p:cNvPr id="1" name=""/>
+        <p:cNvGrpSpPr/>
+        <p:nvPr/>
+      </p:nvGrpSpPr>
+      <p:grpSpPr/>
+      <p:sp>
+        <p:nvSpPr>
+          <p:cNvPr id="2" name="Rectangle 1"/>
+          <p:cNvSpPr/>
+          <p:nvPr/>
+        </p:nvSpPr>
+        <p:spPr>
+          <a:xfrm>
+            <a:off x="0" y="0"/>
+            <a:ext cx="12191695" cy="6858000"/>
+          </a:xfrm>
+          <a:prstGeom prst="rect">
+            <a:avLst/>
+          </a:prstGeom>
+          <a:solidFill>
+            <a:srgbClr val="FF5E00"/>
+          </a:solidFill>
+          <a:ln>
+            <a:noFill/>
+          </a:ln>
+        </p:spPr>
+        <p:style>
+          <a:lnRef idx="1">
+            <a:schemeClr val="accent1"/>
+          </a:lnRef>
+          <a:fillRef idx="3">
+            <a:schemeClr val="accent1"/>
+          </a:fillRef>
+          <a:effectRef idx="2">
+            <a:schemeClr val="accent1"/>
+          </a:effectRef>
+          <a:fontRef idx="minor">
+            <a:schemeClr val="lt1"/>
+          </a:fontRef>
+        </p:style>
+        <p:txBody>
+          <a:bodyPr rtlCol="0" anchor="ctr"/>
+          <a:lstStyle/>
+          <a:p>
+            <a:pPr algn="ctr"/>
+          </a:p>
+        </p:txBody>
+      </p:sp>
+      <p:sp>
+        <p:nvSpPr>
+          <p:cNvPr id="3" name="Oval 2"/>
+          <p:cNvSpPr/>
+          <p:nvPr/>
+        </p:nvSpPr>
+        <p:spPr>
+          <a:xfrm>
+            <a:off x="7772400" y="-1371600"/>
+            <a:ext cx="6858000" cy="6858000"/>
+          </a:xfrm>
+          <a:prstGeom prst="ellipse">
+            <a:avLst/>
+          </a:prstGeom>
+          <a:solidFill>
+            <a:srgbClr val="FF7814"/>
+          </a:solidFill>
+          <a:ln>
+            <a:noFill/>
+          </a:ln>
+        </p:spPr>
+        <p:style>
+          <a:lnRef idx="1">
+            <a:schemeClr val="accent1"/>
+          </a:lnRef>
+          <a:fillRef idx="3">
+            <a:schemeClr val="accent1"/>
+          </a:fillRef>
+          <a:effectRef idx="2">
+            <a:schemeClr val="accent1"/>
+          </a:effectRef>
+          <a:fontRef idx="minor">
+            <a:schemeClr val="lt1"/>
+          </a:fontRef>
+        </p:style>
+        <p:txBody>
+          <a:bodyPr rtlCol="0" anchor="ctr"/>
+          <a:lstStyle/>
+          <a:p>
+            <a:pPr algn="ctr"/>
+          </a:p>
+        </p:txBody>
+      </p:sp>
+      <p:sp>
+        <p:nvSpPr>
+          <p:cNvPr id="4" name="Rounded Rectangle 3"/>
+          <p:cNvSpPr/>
+          <p:nvPr/>
+        </p:nvSpPr>
+        <p:spPr>
+          <a:xfrm>
+            <a:off x="731520" y="502920"/>
+            <a:ext cx="2011680" cy="438912"/>
+          </a:xfrm>
+          <a:prstGeom prst="roundRect">
+            <a:avLst/>
+          </a:prstGeom>
+          <a:solidFill>
+            <a:srgbClr val="E65100"/>
+          </a:solidFill>
+          <a:ln w="19050">
+            <a:solidFill>
+              <a:srgbClr val="FFFFFF"/>
+            </a:solidFill>
+          </a:ln>
+        </p:spPr>
+        <p:style>
+          <a:lnRef idx="1">
+            <a:schemeClr val="accent1"/>
+          </a:lnRef>
+          <a:fillRef idx="3">
+            <a:schemeClr val="accent1"/>
+          </a:fillRef>
+          <a:effectRef idx="2">
+            <a:schemeClr val="accent1"/>
+          </a:effectRef>
+          <a:fontRef idx="minor">
+            <a:schemeClr val="lt1"/>
+          </a:fontRef>
+        </p:style>
+        <p:txBody>
+          <a:bodyPr rtlCol="0" anchor="ctr"/>
+          <a:lstStyle/>
+          <a:p>
+            <a:pPr algn="ctr">
+              <a:defRPr sz="1000" b="1">
+                <a:solidFill>
+                  <a:srgbClr val="FFFFFF"/>
+                </a:solidFill>
+                <a:latin typeface="Segoe UI"/>
+              </a:defRPr>
+            </a:pPr>
+            <a:r>
+              <a:t>VIT BHOPAL</a:t>
+            </a:r>
+          </a:p>
+        </p:txBody>
+      </p:sp>
+      <p:sp>
+        <p:nvSpPr>
+          <p:cNvPr id="5" name="Oval 4"/>
+          <p:cNvSpPr/>
+          <p:nvPr/>
+        </p:nvSpPr>
+        <p:spPr>
+          <a:xfrm>
+            <a:off x="10972800" y="5760720"/>
+            <a:ext cx="621792" cy="621792"/>
+          </a:xfrm>
+          <a:prstGeom prst="ellipse">
+            <a:avLst/>
+          </a:prstGeom>
+          <a:solidFill>
+            <a:srgbClr val="FFFFFF"/>
+          </a:solidFill>
+          <a:ln>
+            <a:noFill/>
+          </a:ln>
+        </p:spPr>
+        <p:style>
+          <a:lnRef idx="1">
+            <a:schemeClr val="accent1"/>
+          </a:lnRef>
+          <a:fillRef idx="3">
+            <a:schemeClr val="accent1"/>
+          </a:fillRef>
+          <a:effectRef idx="2">
+            <a:schemeClr val="accent1"/>
+          </a:effectRef>
+          <a:fontRef idx="minor">
+            <a:schemeClr val="lt1"/>
+          </a:fontRef>
+        </p:style>
+        <p:txBody>
+          <a:bodyPr rtlCol="0" anchor="ctr"/>
+          <a:lstStyle/>
+          <a:p>
+            <a:pPr algn="ctr">
+              <a:defRPr sz="1800" b="1">
+                <a:solidFill>
+                  <a:srgbClr val="FF5E00"/>
+                </a:solidFill>
+                <a:latin typeface="Segoe UI"/>
+              </a:defRPr>
+            </a:pPr>
+            <a:r>
+              <a:t>&gt;</a:t>
+            </a:r>
+          </a:p>
+        </p:txBody>
+      </p:sp>
+      <p:sp>
+        <p:nvSpPr>
+          <p:cNvPr id="6" name="TextBox 5"/>
+          <p:cNvSpPr txBox="1"/>
+          <p:nvPr/>
+        </p:nvSpPr>
+        <p:spPr>
+          <a:xfrm>
+            <a:off x="731520" y="1371600"/>
+            <a:ext cx="10515600" cy="1371600"/>
+          </a:xfrm>
+          <a:prstGeom prst="rect">
+            <a:avLst/>
+          </a:prstGeom>
+          <a:noFill/>
+        </p:spPr>
+        <p:txBody>
+          <a:bodyPr wrap="square">
+            <a:spAutoFit/>
+          </a:bodyPr>
+          <a:lstStyle/>
+          <a:p>
+            <a:pPr>
+              <a:defRPr sz="3600" b="1">
+                <a:solidFill>
+                  <a:srgbClr val="FFFFFF"/>
+                </a:solidFill>
+                <a:latin typeface="Segoe UI"/>
+              </a:defRPr>
+            </a:pPr>
+            <a:r>
+              <a:t>CORE SYSTEM MODULES</a:t>
+            </a:r>
+          </a:p>
+          <a:p>
+            <a:pPr>
+              <a:defRPr sz="1600">
+                <a:solidFill>
+                  <a:srgbClr val="FFEDD5"/>
+                </a:solidFill>
+                <a:latin typeface="Segoe UI"/>
+              </a:defRPr>
+            </a:pPr>
+            <a:r>
+              <a:t>Decoupled Microservice Architecture Around RiskPulse Core</a:t>
+            </a:r>
+          </a:p>
+        </p:txBody>
+      </p:sp>
+      <p:pic>
+        <p:nvPicPr>
+          <p:cNvPr id="7" name="Picture 6" descr="slide12_module_hub.png"/>
+          <p:cNvPicPr>
+            <a:picLocks noChangeAspect="1"/>
+          </p:cNvPicPr>
+          <p:nvPr/>
+        </p:nvPicPr>
+        <p:blipFill>
+          <a:blip r:embed="rId2"/>
+          <a:stretch>
+            <a:fillRect/>
+          </a:stretch>
+        </p:blipFill>
+        <p:spPr>
+          <a:xfrm>
+            <a:off x="2286000" y="2377440"/>
+            <a:ext cx="7589520" cy="3931920"/>
+          </a:xfrm>
+          <a:prstGeom prst="rect">
+            <a:avLst/>
+          </a:prstGeom>
+        </p:spPr>
+      </p:pic>
+    </p:spTree>
+  </p:cSld>
+  <p:clrMapOvr>
+    <a:masterClrMapping/>
+  </p:clrMapOvr>
+</p:sld>
+</file>
+
+<file path=ppt/slides/slide14.xml><?xml version="1.0" encoding="utf-8"?>
+<p:sld xmlns:a="http://schemas.openxmlformats.org/drawingml/2006/main" xmlns:p="http://schemas.openxmlformats.org/presentationml/2006/main" xmlns:r="http://schemas.openxmlformats.org/officeDocument/2006/relationships">
+  <p:cSld>
+    <p:spTree>
+      <p:nvGrpSpPr>
+        <p:cNvPr id="1" name=""/>
+        <p:cNvGrpSpPr/>
+        <p:nvPr/>
+      </p:nvGrpSpPr>
+      <p:grpSpPr/>
+      <p:sp>
+        <p:nvSpPr>
+          <p:cNvPr id="2" name="Rectangle 1"/>
+          <p:cNvSpPr/>
+          <p:nvPr/>
+        </p:nvSpPr>
+        <p:spPr>
+          <a:xfrm>
+            <a:off x="0" y="0"/>
+            <a:ext cx="12191695" cy="6858000"/>
+          </a:xfrm>
+          <a:prstGeom prst="rect">
+            <a:avLst/>
+          </a:prstGeom>
+          <a:solidFill>
+            <a:srgbClr val="FFFFFF"/>
+          </a:solidFill>
+          <a:ln>
+            <a:noFill/>
+          </a:ln>
+        </p:spPr>
+        <p:style>
+          <a:lnRef idx="1">
+            <a:schemeClr val="accent1"/>
+          </a:lnRef>
+          <a:fillRef idx="3">
+            <a:schemeClr val="accent1"/>
+          </a:fillRef>
+          <a:effectRef idx="2">
+            <a:schemeClr val="accent1"/>
+          </a:effectRef>
+          <a:fontRef idx="minor">
+            <a:schemeClr val="lt1"/>
+          </a:fontRef>
+        </p:style>
+        <p:txBody>
+          <a:bodyPr rtlCol="0" anchor="ctr"/>
+          <a:lstStyle/>
+          <a:p>
+            <a:pPr algn="ctr"/>
+          </a:p>
+        </p:txBody>
+      </p:sp>
+      <p:sp>
+        <p:nvSpPr>
+          <p:cNvPr id="3" name="Rectangle 2"/>
+          <p:cNvSpPr/>
+          <p:nvPr/>
+        </p:nvSpPr>
+        <p:spPr>
+          <a:xfrm>
+            <a:off x="0" y="0"/>
+            <a:ext cx="12191695" cy="137160"/>
+          </a:xfrm>
+          <a:prstGeom prst="rect">
+            <a:avLst/>
+          </a:prstGeom>
+          <a:solidFill>
+            <a:srgbClr val="FF5E00"/>
+          </a:solidFill>
+          <a:ln>
+            <a:noFill/>
+          </a:ln>
+        </p:spPr>
+        <p:style>
+          <a:lnRef idx="1">
+            <a:schemeClr val="accent1"/>
+          </a:lnRef>
+          <a:fillRef idx="3">
+            <a:schemeClr val="accent1"/>
+          </a:fillRef>
+          <a:effectRef idx="2">
+            <a:schemeClr val="accent1"/>
+          </a:effectRef>
+          <a:fontRef idx="minor">
+            <a:schemeClr val="lt1"/>
+          </a:fontRef>
+        </p:style>
+        <p:txBody>
+          <a:bodyPr rtlCol="0" anchor="ctr"/>
+          <a:lstStyle/>
+          <a:p>
+            <a:pPr algn="ctr"/>
+          </a:p>
+        </p:txBody>
+      </p:sp>
+      <p:sp>
+        <p:nvSpPr>
+          <p:cNvPr id="4" name="Rounded Rectangle 3"/>
+          <p:cNvSpPr/>
+          <p:nvPr/>
+        </p:nvSpPr>
+        <p:spPr>
+          <a:xfrm>
+            <a:off x="9418320" y="502920"/>
+            <a:ext cx="2011680" cy="438912"/>
+          </a:xfrm>
+          <a:prstGeom prst="roundRect">
+            <a:avLst/>
+          </a:prstGeom>
+          <a:solidFill>
+            <a:srgbClr val="FFFFFF"/>
+          </a:solidFill>
+          <a:ln w="19050">
+            <a:solidFill>
+              <a:srgbClr val="FF5E00"/>
+            </a:solidFill>
+          </a:ln>
+        </p:spPr>
+        <p:style>
+          <a:lnRef idx="1">
+            <a:schemeClr val="accent1"/>
+          </a:lnRef>
+          <a:fillRef idx="3">
+            <a:schemeClr val="accent1"/>
+          </a:fillRef>
+          <a:effectRef idx="2">
+            <a:schemeClr val="accent1"/>
+          </a:effectRef>
+          <a:fontRef idx="minor">
+            <a:schemeClr val="lt1"/>
+          </a:fontRef>
+        </p:style>
+        <p:txBody>
+          <a:bodyPr rtlCol="0" anchor="ctr"/>
+          <a:lstStyle/>
+          <a:p>
+            <a:pPr algn="ctr">
+              <a:defRPr sz="1000" b="1">
+                <a:solidFill>
+                  <a:srgbClr val="FF5E00"/>
+                </a:solidFill>
+                <a:latin typeface="Segoe UI"/>
+              </a:defRPr>
+            </a:pPr>
+            <a:r>
+              <a:t>RISKPULSE</a:t>
+            </a:r>
+          </a:p>
+        </p:txBody>
+      </p:sp>
+      <p:sp>
+        <p:nvSpPr>
+          <p:cNvPr id="5" name="Oval 4"/>
+          <p:cNvSpPr/>
+          <p:nvPr/>
+        </p:nvSpPr>
+        <p:spPr>
+          <a:xfrm>
+            <a:off x="10972800" y="5760720"/>
+            <a:ext cx="621792" cy="621792"/>
+          </a:xfrm>
+          <a:prstGeom prst="ellipse">
+            <a:avLst/>
+          </a:prstGeom>
+          <a:solidFill>
+            <a:srgbClr val="FF5E00"/>
+          </a:solidFill>
+          <a:ln>
+            <a:noFill/>
+          </a:ln>
+        </p:spPr>
+        <p:style>
+          <a:lnRef idx="1">
+            <a:schemeClr val="accent1"/>
+          </a:lnRef>
+          <a:fillRef idx="3">
+            <a:schemeClr val="accent1"/>
+          </a:fillRef>
+          <a:effectRef idx="2">
+            <a:schemeClr val="accent1"/>
+          </a:effectRef>
+          <a:fontRef idx="minor">
+            <a:schemeClr val="lt1"/>
+          </a:fontRef>
+        </p:style>
+        <p:txBody>
+          <a:bodyPr rtlCol="0" anchor="ctr"/>
+          <a:lstStyle/>
+          <a:p>
+            <a:pPr algn="ctr">
+              <a:defRPr sz="1800" b="1">
+                <a:solidFill>
+                  <a:srgbClr val="FFFFFF"/>
+                </a:solidFill>
+                <a:latin typeface="Segoe UI"/>
+              </a:defRPr>
+            </a:pPr>
+            <a:r>
+              <a:t>&gt;</a:t>
+            </a:r>
+          </a:p>
+        </p:txBody>
+      </p:sp>
+      <p:sp>
+        <p:nvSpPr>
+          <p:cNvPr id="6" name="TextBox 5"/>
+          <p:cNvSpPr txBox="1"/>
+          <p:nvPr/>
+        </p:nvSpPr>
+        <p:spPr>
+          <a:xfrm>
+            <a:off x="731520" y="822960"/>
+            <a:ext cx="8229600" cy="1188720"/>
+          </a:xfrm>
+          <a:prstGeom prst="rect">
+            <a:avLst/>
+          </a:prstGeom>
+          <a:noFill/>
+        </p:spPr>
+        <p:txBody>
+          <a:bodyPr wrap="square">
+            <a:spAutoFit/>
+          </a:bodyPr>
+          <a:lstStyle/>
+          <a:p>
+            <a:pPr>
+              <a:defRPr sz="3000" b="1">
+                <a:solidFill>
+                  <a:srgbClr val="FF5E00"/>
+                </a:solidFill>
+                <a:latin typeface="Segoe UI"/>
+              </a:defRPr>
+            </a:pPr>
+            <a:r>
+              <a:t>IMPLEMENTATION</a:t>
+            </a:r>
+            <a:br/>
+            <a:r>
+              <a:t>HIGHLIGHTS</a:t>
+            </a:r>
+          </a:p>
+        </p:txBody>
+      </p:sp>
+      <p:sp>
+        <p:nvSpPr>
+          <p:cNvPr id="7" name="TextBox 6"/>
+          <p:cNvSpPr txBox="1"/>
+          <p:nvPr/>
+        </p:nvSpPr>
+        <p:spPr>
+          <a:xfrm>
+            <a:off x="731520" y="2194560"/>
+            <a:ext cx="4937760" cy="4114800"/>
+          </a:xfrm>
+          <a:prstGeom prst="rect">
+            <a:avLst/>
+          </a:prstGeom>
+          <a:noFill/>
+        </p:spPr>
+        <p:txBody>
+          <a:bodyPr wrap="square">
+            <a:spAutoFit/>
+          </a:bodyPr>
+          <a:lstStyle/>
+          <a:p>
+            <a:pPr>
+              <a:defRPr sz="1300">
+                <a:solidFill>
+                  <a:srgbClr val="1E293B"/>
+                </a:solidFill>
+                <a:latin typeface="Segoe UI"/>
+              </a:defRPr>
+            </a:pPr>
+            <a:r>
+              <a:t>1. Non-Blocking Ingestion:</a:t>
+            </a:r>
+            <a:br/>
+            <a:r>
+              <a:t>FastAPI lifespan handlers run background async workers for RSS feeds, ensuring zero latency degradation on user queries.</a:t>
+            </a:r>
+            <a:br/>
+            <a:br/>
+            <a:r>
+              <a:t>2. Dual-Engine NLP Fallback:</a:t>
+            </a:r>
+            <a:br/>
+            <a:r>
+              <a:t>Full FinBERT PyTorch inference with seamless rule-based CPU failover preventing 500 errors.</a:t>
+            </a:r>
+            <a:br/>
+            <a:br/>
+            <a:r>
+              <a:t>3. Strict Pydantic Data Contracts:</a:t>
+            </a:r>
+            <a:br/>
+            <a:r>
+              <a:t>Guarantees rigid schema validation across all REST boundaries.</a:t>
+            </a:r>
+          </a:p>
+        </p:txBody>
+      </p:sp>
+      <p:pic>
+        <p:nvPicPr>
+          <p:cNvPr id="8" name="Picture 7" descr="architecture.png"/>
+          <p:cNvPicPr>
+            <a:picLocks noChangeAspect="1"/>
+          </p:cNvPicPr>
+          <p:nvPr/>
+        </p:nvPicPr>
+        <p:blipFill>
+          <a:blip r:embed="rId2"/>
+          <a:stretch>
+            <a:fillRect/>
+          </a:stretch>
+        </p:blipFill>
+        <p:spPr>
+          <a:xfrm>
+            <a:off x="5943600" y="2011680"/>
+            <a:ext cx="5486400" cy="4114800"/>
+          </a:xfrm>
+          <a:prstGeom prst="rect">
+            <a:avLst/>
+          </a:prstGeom>
+        </p:spPr>
+      </p:pic>
+    </p:spTree>
+  </p:cSld>
+  <p:clrMapOvr>
+    <a:masterClrMapping/>
+  </p:clrMapOvr>
+</p:sld>
+</file>
+
+<file path=ppt/slides/slide15.xml><?xml version="1.0" encoding="utf-8"?>
+<p:sld xmlns:a="http://schemas.openxmlformats.org/drawingml/2006/main" xmlns:p="http://schemas.openxmlformats.org/presentationml/2006/main" xmlns:r="http://schemas.openxmlformats.org/officeDocument/2006/relationships">
+  <p:cSld>
+    <p:spTree>
+      <p:nvGrpSpPr>
+        <p:cNvPr id="1" name=""/>
+        <p:cNvGrpSpPr/>
+        <p:nvPr/>
+      </p:nvGrpSpPr>
+      <p:grpSpPr/>
+      <p:sp>
+        <p:nvSpPr>
+          <p:cNvPr id="2" name="Rectangle 1"/>
+          <p:cNvSpPr/>
+          <p:nvPr/>
+        </p:nvSpPr>
+        <p:spPr>
+          <a:xfrm>
+            <a:off x="0" y="0"/>
+            <a:ext cx="12191695" cy="6858000"/>
+          </a:xfrm>
+          <a:prstGeom prst="rect">
+            <a:avLst/>
+          </a:prstGeom>
+          <a:solidFill>
+            <a:srgbClr val="FFFFFF"/>
+          </a:solidFill>
+          <a:ln>
+            <a:noFill/>
+          </a:ln>
+        </p:spPr>
+        <p:style>
+          <a:lnRef idx="1">
+            <a:schemeClr val="accent1"/>
+          </a:lnRef>
+          <a:fillRef idx="3">
+            <a:schemeClr val="accent1"/>
+          </a:fillRef>
+          <a:effectRef idx="2">
+            <a:schemeClr val="accent1"/>
+          </a:effectRef>
+          <a:fontRef idx="minor">
+            <a:schemeClr val="lt1"/>
+          </a:fontRef>
+        </p:style>
+        <p:txBody>
+          <a:bodyPr rtlCol="0" anchor="ctr"/>
+          <a:lstStyle/>
+          <a:p>
+            <a:pPr algn="ctr"/>
+          </a:p>
+        </p:txBody>
+      </p:sp>
+      <p:sp>
+        <p:nvSpPr>
+          <p:cNvPr id="3" name="Rectangle 2"/>
+          <p:cNvSpPr/>
+          <p:nvPr/>
+        </p:nvSpPr>
+        <p:spPr>
+          <a:xfrm>
+            <a:off x="0" y="0"/>
+            <a:ext cx="12191695" cy="137160"/>
+          </a:xfrm>
+          <a:prstGeom prst="rect">
+            <a:avLst/>
+          </a:prstGeom>
+          <a:solidFill>
+            <a:srgbClr val="FF5E00"/>
+          </a:solidFill>
+          <a:ln>
+            <a:noFill/>
+          </a:ln>
+        </p:spPr>
+        <p:style>
+          <a:lnRef idx="1">
+            <a:schemeClr val="accent1"/>
+          </a:lnRef>
+          <a:fillRef idx="3">
+            <a:schemeClr val="accent1"/>
+          </a:fillRef>
+          <a:effectRef idx="2">
+            <a:schemeClr val="accent1"/>
+          </a:effectRef>
+          <a:fontRef idx="minor">
+            <a:schemeClr val="lt1"/>
+          </a:fontRef>
+        </p:style>
+        <p:txBody>
+          <a:bodyPr rtlCol="0" anchor="ctr"/>
+          <a:lstStyle/>
+          <a:p>
+            <a:pPr algn="ctr"/>
+          </a:p>
+        </p:txBody>
+      </p:sp>
+      <p:sp>
+        <p:nvSpPr>
+          <p:cNvPr id="4" name="Rounded Rectangle 3"/>
+          <p:cNvSpPr/>
+          <p:nvPr/>
+        </p:nvSpPr>
+        <p:spPr>
+          <a:xfrm>
+            <a:off x="9418320" y="502920"/>
+            <a:ext cx="2011680" cy="438912"/>
+          </a:xfrm>
+          <a:prstGeom prst="roundRect">
+            <a:avLst/>
+          </a:prstGeom>
+          <a:solidFill>
+            <a:srgbClr val="FFFFFF"/>
+          </a:solidFill>
+          <a:ln w="19050">
+            <a:solidFill>
+              <a:srgbClr val="FF5E00"/>
+            </a:solidFill>
+          </a:ln>
+        </p:spPr>
+        <p:style>
+          <a:lnRef idx="1">
+            <a:schemeClr val="accent1"/>
+          </a:lnRef>
+          <a:fillRef idx="3">
+            <a:schemeClr val="accent1"/>
+          </a:fillRef>
+          <a:effectRef idx="2">
+            <a:schemeClr val="accent1"/>
+          </a:effectRef>
+          <a:fontRef idx="minor">
+            <a:schemeClr val="lt1"/>
+          </a:fontRef>
+        </p:style>
+        <p:txBody>
+          <a:bodyPr rtlCol="0" anchor="ctr"/>
+          <a:lstStyle/>
+          <a:p>
+            <a:pPr algn="ctr">
+              <a:defRPr sz="1000" b="1">
+                <a:solidFill>
+                  <a:srgbClr val="FF5E00"/>
+                </a:solidFill>
+                <a:latin typeface="Segoe UI"/>
+              </a:defRPr>
+            </a:pPr>
+            <a:r>
+              <a:t>VIT BHOPAL</a:t>
+            </a:r>
+          </a:p>
+        </p:txBody>
+      </p:sp>
+      <p:sp>
+        <p:nvSpPr>
+          <p:cNvPr id="5" name="Oval 4"/>
+          <p:cNvSpPr/>
+          <p:nvPr/>
+        </p:nvSpPr>
+        <p:spPr>
+          <a:xfrm>
+            <a:off x="10972800" y="5760720"/>
+            <a:ext cx="621792" cy="621792"/>
+          </a:xfrm>
+          <a:prstGeom prst="ellipse">
+            <a:avLst/>
+          </a:prstGeom>
+          <a:solidFill>
+            <a:srgbClr val="FF5E00"/>
+          </a:solidFill>
+          <a:ln>
+            <a:noFill/>
+          </a:ln>
+        </p:spPr>
+        <p:style>
+          <a:lnRef idx="1">
+            <a:schemeClr val="accent1"/>
+          </a:lnRef>
+          <a:fillRef idx="3">
+            <a:schemeClr val="accent1"/>
+          </a:fillRef>
+          <a:effectRef idx="2">
+            <a:schemeClr val="accent1"/>
+          </a:effectRef>
+          <a:fontRef idx="minor">
+            <a:schemeClr val="lt1"/>
+          </a:fontRef>
+        </p:style>
+        <p:txBody>
+          <a:bodyPr rtlCol="0" anchor="ctr"/>
+          <a:lstStyle/>
+          <a:p>
+            <a:pPr algn="ctr">
+              <a:defRPr sz="1800" b="1">
+                <a:solidFill>
+                  <a:srgbClr val="FFFFFF"/>
+                </a:solidFill>
+                <a:latin typeface="Segoe UI"/>
+              </a:defRPr>
+            </a:pPr>
+            <a:r>
+              <a:t>&gt;</a:t>
+            </a:r>
+          </a:p>
+        </p:txBody>
+      </p:sp>
+      <p:sp>
+        <p:nvSpPr>
+          <p:cNvPr id="6" name="TextBox 5"/>
+          <p:cNvSpPr txBox="1"/>
+          <p:nvPr/>
+        </p:nvSpPr>
+        <p:spPr>
+          <a:xfrm>
+            <a:off x="731520" y="822960"/>
+            <a:ext cx="8229600" cy="1188720"/>
+          </a:xfrm>
+          <a:prstGeom prst="rect">
+            <a:avLst/>
+          </a:prstGeom>
+          <a:noFill/>
+        </p:spPr>
+        <p:txBody>
+          <a:bodyPr wrap="square">
+            <a:spAutoFit/>
+          </a:bodyPr>
+          <a:lstStyle/>
+          <a:p>
+            <a:pPr>
+              <a:defRPr sz="3000" b="1">
+                <a:solidFill>
+                  <a:srgbClr val="FF5E00"/>
+                </a:solidFill>
+                <a:latin typeface="Segoe UI"/>
+              </a:defRPr>
+            </a:pPr>
+            <a:r>
+              <a:t>APPLICATION</a:t>
+            </a:r>
+            <a:br/>
+            <a:r>
+              <a:t>INTERFACE</a:t>
+            </a:r>
+          </a:p>
+        </p:txBody>
+      </p:sp>
+      <p:pic>
+        <p:nvPicPr>
+          <p:cNvPr id="7" name="Picture 6" descr="ui_crop_sentiment_gauge.png"/>
+          <p:cNvPicPr>
+            <a:picLocks noChangeAspect="1"/>
+          </p:cNvPicPr>
+          <p:nvPr/>
+        </p:nvPicPr>
+        <p:blipFill>
+          <a:blip r:embed="rId2"/>
+          <a:stretch>
+            <a:fillRect/>
+          </a:stretch>
+        </p:blipFill>
+        <p:spPr>
+          <a:xfrm>
+            <a:off x="731520" y="2011680"/>
+            <a:ext cx="5120640" cy="3931920"/>
+          </a:xfrm>
+          <a:prstGeom prst="rect">
+            <a:avLst/>
+          </a:prstGeom>
+        </p:spPr>
+      </p:pic>
+      <p:pic>
+        <p:nvPicPr>
+          <p:cNvPr id="8" name="Picture 7" descr="ui_crop_stress_heatmap.png"/>
+          <p:cNvPicPr>
+            <a:picLocks noChangeAspect="1"/>
+          </p:cNvPicPr>
+          <p:nvPr/>
+        </p:nvPicPr>
+        <p:blipFill>
+          <a:blip r:embed="rId3"/>
+          <a:stretch>
+            <a:fillRect/>
+          </a:stretch>
+        </p:blipFill>
+        <p:spPr>
+          <a:xfrm>
+            <a:off x="6217920" y="2011680"/>
+            <a:ext cx="5120640" cy="3931920"/>
+          </a:xfrm>
+          <a:prstGeom prst="rect">
+            <a:avLst/>
+          </a:prstGeom>
+        </p:spPr>
+      </p:pic>
+    </p:spTree>
+  </p:cSld>
+  <p:clrMapOvr>
+    <a:masterClrMapping/>
+  </p:clrMapOvr>
+</p:sld>
+</file>
+
+<file path=ppt/slides/slide16.xml><?xml version="1.0" encoding="utf-8"?>
+<p:sld xmlns:a="http://schemas.openxmlformats.org/drawingml/2006/main" xmlns:p="http://schemas.openxmlformats.org/presentationml/2006/main" xmlns:r="http://schemas.openxmlformats.org/officeDocument/2006/relationships">
+  <p:cSld>
+    <p:spTree>
+      <p:nvGrpSpPr>
+        <p:cNvPr id="1" name=""/>
+        <p:cNvGrpSpPr/>
+        <p:nvPr/>
+      </p:nvGrpSpPr>
+      <p:grpSpPr/>
+      <p:sp>
+        <p:nvSpPr>
+          <p:cNvPr id="2" name="Rectangle 1"/>
+          <p:cNvSpPr/>
+          <p:nvPr/>
+        </p:nvSpPr>
+        <p:spPr>
+          <a:xfrm>
+            <a:off x="0" y="0"/>
+            <a:ext cx="12191695" cy="6858000"/>
+          </a:xfrm>
+          <a:prstGeom prst="rect">
+            <a:avLst/>
+          </a:prstGeom>
+          <a:solidFill>
+            <a:srgbClr val="FF5E00"/>
+          </a:solidFill>
+          <a:ln>
+            <a:noFill/>
+          </a:ln>
+        </p:spPr>
+        <p:style>
+          <a:lnRef idx="1">
+            <a:schemeClr val="accent1"/>
+          </a:lnRef>
+          <a:fillRef idx="3">
+            <a:schemeClr val="accent1"/>
+          </a:fillRef>
+          <a:effectRef idx="2">
+            <a:schemeClr val="accent1"/>
+          </a:effectRef>
+          <a:fontRef idx="minor">
+            <a:schemeClr val="lt1"/>
+          </a:fontRef>
+        </p:style>
+        <p:txBody>
+          <a:bodyPr rtlCol="0" anchor="ctr"/>
+          <a:lstStyle/>
+          <a:p>
+            <a:pPr algn="ctr"/>
+          </a:p>
+        </p:txBody>
+      </p:sp>
+      <p:sp>
+        <p:nvSpPr>
+          <p:cNvPr id="3" name="Oval 2"/>
+          <p:cNvSpPr/>
+          <p:nvPr/>
+        </p:nvSpPr>
+        <p:spPr>
+          <a:xfrm>
+            <a:off x="7772400" y="-1371600"/>
+            <a:ext cx="6858000" cy="6858000"/>
+          </a:xfrm>
+          <a:prstGeom prst="ellipse">
+            <a:avLst/>
+          </a:prstGeom>
+          <a:solidFill>
+            <a:srgbClr val="FF7814"/>
+          </a:solidFill>
+          <a:ln>
+            <a:noFill/>
+          </a:ln>
+        </p:spPr>
+        <p:style>
+          <a:lnRef idx="1">
+            <a:schemeClr val="accent1"/>
+          </a:lnRef>
+          <a:fillRef idx="3">
+            <a:schemeClr val="accent1"/>
+          </a:fillRef>
+          <a:effectRef idx="2">
+            <a:schemeClr val="accent1"/>
+          </a:effectRef>
+          <a:fontRef idx="minor">
+            <a:schemeClr val="lt1"/>
+          </a:fontRef>
+        </p:style>
+        <p:txBody>
+          <a:bodyPr rtlCol="0" anchor="ctr"/>
+          <a:lstStyle/>
+          <a:p>
+            <a:pPr algn="ctr"/>
+          </a:p>
+        </p:txBody>
+      </p:sp>
+      <p:sp>
+        <p:nvSpPr>
+          <p:cNvPr id="4" name="Rounded Rectangle 3"/>
+          <p:cNvSpPr/>
+          <p:nvPr/>
+        </p:nvSpPr>
+        <p:spPr>
+          <a:xfrm>
+            <a:off x="731520" y="502920"/>
+            <a:ext cx="2011680" cy="438912"/>
+          </a:xfrm>
+          <a:prstGeom prst="roundRect">
+            <a:avLst/>
+          </a:prstGeom>
+          <a:solidFill>
+            <a:srgbClr val="E65100"/>
+          </a:solidFill>
+          <a:ln w="19050">
+            <a:solidFill>
+              <a:srgbClr val="FFFFFF"/>
+            </a:solidFill>
+          </a:ln>
+        </p:spPr>
+        <p:style>
+          <a:lnRef idx="1">
+            <a:schemeClr val="accent1"/>
+          </a:lnRef>
+          <a:fillRef idx="3">
+            <a:schemeClr val="accent1"/>
+          </a:fillRef>
+          <a:effectRef idx="2">
+            <a:schemeClr val="accent1"/>
+          </a:effectRef>
+          <a:fontRef idx="minor">
+            <a:schemeClr val="lt1"/>
+          </a:fontRef>
+        </p:style>
+        <p:txBody>
+          <a:bodyPr rtlCol="0" anchor="ctr"/>
+          <a:lstStyle/>
+          <a:p>
+            <a:pPr algn="ctr">
+              <a:defRPr sz="1000" b="1">
+                <a:solidFill>
+                  <a:srgbClr val="FFFFFF"/>
+                </a:solidFill>
+                <a:latin typeface="Segoe UI"/>
+              </a:defRPr>
+            </a:pPr>
+            <a:r>
+              <a:t>RISKPULSE</a:t>
+            </a:r>
+          </a:p>
+        </p:txBody>
+      </p:sp>
+      <p:sp>
+        <p:nvSpPr>
+          <p:cNvPr id="5" name="Oval 4"/>
+          <p:cNvSpPr/>
+          <p:nvPr/>
+        </p:nvSpPr>
+        <p:spPr>
+          <a:xfrm>
+            <a:off x="10972800" y="5760720"/>
+            <a:ext cx="621792" cy="621792"/>
+          </a:xfrm>
+          <a:prstGeom prst="ellipse">
+            <a:avLst/>
+          </a:prstGeom>
+          <a:solidFill>
+            <a:srgbClr val="FFFFFF"/>
+          </a:solidFill>
+          <a:ln>
+            <a:noFill/>
+          </a:ln>
+        </p:spPr>
+        <p:style>
+          <a:lnRef idx="1">
+            <a:schemeClr val="accent1"/>
+          </a:lnRef>
+          <a:fillRef idx="3">
+            <a:schemeClr val="accent1"/>
+          </a:fillRef>
+          <a:effectRef idx="2">
+            <a:schemeClr val="accent1"/>
+          </a:effectRef>
+          <a:fontRef idx="minor">
+            <a:schemeClr val="lt1"/>
+          </a:fontRef>
+        </p:style>
+        <p:txBody>
+          <a:bodyPr rtlCol="0" anchor="ctr"/>
+          <a:lstStyle/>
+          <a:p>
+            <a:pPr algn="ctr">
+              <a:defRPr sz="1800" b="1">
+                <a:solidFill>
+                  <a:srgbClr val="FF5E00"/>
+                </a:solidFill>
+                <a:latin typeface="Segoe UI"/>
+              </a:defRPr>
+            </a:pPr>
+            <a:r>
+              <a:t>&gt;</a:t>
+            </a:r>
+          </a:p>
+        </p:txBody>
+      </p:sp>
+      <p:sp>
+        <p:nvSpPr>
+          <p:cNvPr id="6" name="TextBox 5"/>
+          <p:cNvSpPr txBox="1"/>
+          <p:nvPr/>
+        </p:nvSpPr>
+        <p:spPr>
+          <a:xfrm>
+            <a:off x="731520" y="1371600"/>
+            <a:ext cx="10515600" cy="1371600"/>
+          </a:xfrm>
+          <a:prstGeom prst="rect">
+            <a:avLst/>
+          </a:prstGeom>
+          <a:noFill/>
+        </p:spPr>
+        <p:txBody>
+          <a:bodyPr wrap="square">
+            <a:spAutoFit/>
+          </a:bodyPr>
+          <a:lstStyle/>
+          <a:p>
+            <a:pPr>
+              <a:defRPr sz="3600" b="1">
+                <a:solidFill>
+                  <a:srgbClr val="FFFFFF"/>
+                </a:solidFill>
+                <a:latin typeface="Segoe UI"/>
+              </a:defRPr>
+            </a:pPr>
+            <a:r>
+              <a:t>KEY PLATFORM FEATURES</a:t>
+            </a:r>
+          </a:p>
+          <a:p>
+            <a:pPr>
+              <a:defRPr sz="1600">
+                <a:solidFill>
+                  <a:srgbClr val="FFEDD5"/>
+                </a:solidFill>
+                <a:latin typeface="Segoe UI"/>
+              </a:defRPr>
+            </a:pPr>
+            <a:r>
+              <a:t>Institutional Risk Capabilities Built Into RiskPulse</a:t>
+            </a:r>
+          </a:p>
+        </p:txBody>
+      </p:sp>
+      <p:sp>
+        <p:nvSpPr>
+          <p:cNvPr id="7" name="Rounded Rectangle 6"/>
+          <p:cNvSpPr/>
+          <p:nvPr/>
+        </p:nvSpPr>
+        <p:spPr>
+          <a:xfrm>
+            <a:off x="731520" y="2743200"/>
+            <a:ext cx="3291840" cy="1463040"/>
+          </a:xfrm>
+          <a:prstGeom prst="roundRect">
+            <a:avLst/>
+          </a:prstGeom>
+          <a:solidFill>
+            <a:srgbClr val="FFFFFF"/>
+          </a:solidFill>
+          <a:ln>
+            <a:noFill/>
+          </a:ln>
+        </p:spPr>
+        <p:style>
+          <a:lnRef idx="1">
+            <a:schemeClr val="accent1"/>
+          </a:lnRef>
+          <a:fillRef idx="3">
+            <a:schemeClr val="accent1"/>
+          </a:fillRef>
+          <a:effectRef idx="2">
+            <a:schemeClr val="accent1"/>
+          </a:effectRef>
+          <a:fontRef idx="minor">
+            <a:schemeClr val="lt1"/>
+          </a:fontRef>
+        </p:style>
+        <p:txBody>
+          <a:bodyPr rtlCol="0" anchor="ctr"/>
+          <a:lstStyle/>
+          <a:p>
+            <a:pPr algn="ctr"/>
+          </a:p>
+        </p:txBody>
+      </p:sp>
+      <p:sp>
+        <p:nvSpPr>
+          <p:cNvPr id="8" name="TextBox 7"/>
+          <p:cNvSpPr txBox="1"/>
+          <p:nvPr/>
+        </p:nvSpPr>
+        <p:spPr>
+          <a:xfrm>
+            <a:off x="914400" y="2852928"/>
+            <a:ext cx="2926080" cy="1188720"/>
+          </a:xfrm>
+          <a:prstGeom prst="rect">
+            <a:avLst/>
+          </a:prstGeom>
+          <a:noFill/>
+        </p:spPr>
+        <p:txBody>
+          <a:bodyPr wrap="square">
+            <a:spAutoFit/>
+          </a:bodyPr>
+          <a:lstStyle/>
+          <a:p>
+            <a:pPr>
+              <a:defRPr sz="1200" b="1">
+                <a:solidFill>
+                  <a:srgbClr val="FF5E00"/>
+                </a:solidFill>
+                <a:latin typeface="Segoe UI"/>
+              </a:defRPr>
+            </a:pPr>
+            <a:r>
+              <a:t>Real-Time Ingestion</a:t>
+            </a:r>
+          </a:p>
+          <a:p>
+            <a:pPr>
+              <a:defRPr sz="1000">
+                <a:solidFill>
+                  <a:srgbClr val="1E293B"/>
+                </a:solidFill>
+                <a:latin typeface="Segoe UI"/>
+              </a:defRPr>
+            </a:pPr>
+            <a:r>
+              <a:t>Automated RSS polling with deduplication and mock failover.</a:t>
+            </a:r>
+          </a:p>
+        </p:txBody>
+      </p:sp>
+      <p:sp>
+        <p:nvSpPr>
+          <p:cNvPr id="9" name="Rounded Rectangle 8"/>
+          <p:cNvSpPr/>
+          <p:nvPr/>
+        </p:nvSpPr>
+        <p:spPr>
+          <a:xfrm>
+            <a:off x="4297680" y="2743200"/>
+            <a:ext cx="3291840" cy="1463040"/>
+          </a:xfrm>
+          <a:prstGeom prst="roundRect">
+            <a:avLst/>
+          </a:prstGeom>
+          <a:solidFill>
+            <a:srgbClr val="FFFFFF"/>
+          </a:solidFill>
+          <a:ln>
+            <a:noFill/>
+          </a:ln>
+        </p:spPr>
+        <p:style>
+          <a:lnRef idx="1">
+            <a:schemeClr val="accent1"/>
+          </a:lnRef>
+          <a:fillRef idx="3">
+            <a:schemeClr val="accent1"/>
+          </a:fillRef>
+          <a:effectRef idx="2">
+            <a:schemeClr val="accent1"/>
+          </a:effectRef>
+          <a:fontRef idx="minor">
+            <a:schemeClr val="lt1"/>
+          </a:fontRef>
+        </p:style>
+        <p:txBody>
+          <a:bodyPr rtlCol="0" anchor="ctr"/>
+          <a:lstStyle/>
+          <a:p>
+            <a:pPr algn="ctr"/>
+          </a:p>
+        </p:txBody>
+      </p:sp>
+      <p:sp>
+        <p:nvSpPr>
+          <p:cNvPr id="10" name="TextBox 9"/>
+          <p:cNvSpPr txBox="1"/>
+          <p:nvPr/>
+        </p:nvSpPr>
+        <p:spPr>
+          <a:xfrm>
+            <a:off x="4480560" y="2852928"/>
+            <a:ext cx="2926080" cy="1188720"/>
+          </a:xfrm>
+          <a:prstGeom prst="rect">
+            <a:avLst/>
+          </a:prstGeom>
+          <a:noFill/>
+        </p:spPr>
+        <p:txBody>
+          <a:bodyPr wrap="square">
+            <a:spAutoFit/>
+          </a:bodyPr>
+          <a:lstStyle/>
+          <a:p>
+            <a:pPr>
+              <a:defRPr sz="1200" b="1">
+                <a:solidFill>
+                  <a:srgbClr val="FF5E00"/>
+                </a:solidFill>
+                <a:latin typeface="Segoe UI"/>
+              </a:defRPr>
+            </a:pPr>
+            <a:r>
+              <a:t>FinBERT Sentiment</a:t>
+            </a:r>
+          </a:p>
+          <a:p>
+            <a:pPr>
+              <a:defRPr sz="1000">
+                <a:solidFill>
+                  <a:srgbClr val="1E293B"/>
+                </a:solidFill>
+                <a:latin typeface="Segoe UI"/>
+              </a:defRPr>
+            </a:pPr>
+            <a:r>
+              <a:t>Domain-specific financial polarity (-1.0 to +1.0) classification.</a:t>
+            </a:r>
+          </a:p>
+        </p:txBody>
+      </p:sp>
+      <p:sp>
+        <p:nvSpPr>
+          <p:cNvPr id="11" name="Rounded Rectangle 10"/>
+          <p:cNvSpPr/>
+          <p:nvPr/>
+        </p:nvSpPr>
+        <p:spPr>
+          <a:xfrm>
+            <a:off x="7863840" y="2743200"/>
+            <a:ext cx="3291840" cy="1463040"/>
+          </a:xfrm>
+          <a:prstGeom prst="roundRect">
+            <a:avLst/>
+          </a:prstGeom>
+          <a:solidFill>
+            <a:srgbClr val="FFFFFF"/>
+          </a:solidFill>
+          <a:ln>
+            <a:noFill/>
+          </a:ln>
+        </p:spPr>
+        <p:style>
+          <a:lnRef idx="1">
+            <a:schemeClr val="accent1"/>
+          </a:lnRef>
+          <a:fillRef idx="3">
+            <a:schemeClr val="accent1"/>
+          </a:fillRef>
+          <a:effectRef idx="2">
+            <a:schemeClr val="accent1"/>
+          </a:effectRef>
+          <a:fontRef idx="minor">
+            <a:schemeClr val="lt1"/>
+          </a:fontRef>
+        </p:style>
+        <p:txBody>
+          <a:bodyPr rtlCol="0" anchor="ctr"/>
+          <a:lstStyle/>
+          <a:p>
+            <a:pPr algn="ctr"/>
+          </a:p>
+        </p:txBody>
+      </p:sp>
+      <p:sp>
+        <p:nvSpPr>
+          <p:cNvPr id="12" name="TextBox 11"/>
+          <p:cNvSpPr txBox="1"/>
+          <p:nvPr/>
+        </p:nvSpPr>
+        <p:spPr>
+          <a:xfrm>
+            <a:off x="8046720" y="2852928"/>
+            <a:ext cx="2926080" cy="1188720"/>
+          </a:xfrm>
+          <a:prstGeom prst="rect">
+            <a:avLst/>
+          </a:prstGeom>
+          <a:noFill/>
+        </p:spPr>
+        <p:txBody>
+          <a:bodyPr wrap="square">
+            <a:spAutoFit/>
+          </a:bodyPr>
+          <a:lstStyle/>
+          <a:p>
+            <a:pPr>
+              <a:defRPr sz="1200" b="1">
+                <a:solidFill>
+                  <a:srgbClr val="FF5E00"/>
+                </a:solidFill>
+                <a:latin typeface="Segoe UI"/>
+              </a:defRPr>
+            </a:pPr>
+            <a:r>
+              <a:t>Impact Severity (1-10)</a:t>
+            </a:r>
+          </a:p>
+          <a:p>
+            <a:pPr>
+              <a:defRPr sz="1000">
+                <a:solidFill>
+                  <a:srgbClr val="1E293B"/>
+                </a:solidFill>
+                <a:latin typeface="Segoe UI"/>
+              </a:defRPr>
+            </a:pPr>
+            <a:r>
+              <a:t>Algorithmic risk quantification based on news sentiment magnitude.</a:t>
+            </a:r>
+          </a:p>
+        </p:txBody>
+      </p:sp>
+      <p:sp>
+        <p:nvSpPr>
+          <p:cNvPr id="13" name="Rounded Rectangle 12"/>
+          <p:cNvSpPr/>
+          <p:nvPr/>
+        </p:nvSpPr>
+        <p:spPr>
+          <a:xfrm>
+            <a:off x="731520" y="4480560"/>
+            <a:ext cx="3291840" cy="1463040"/>
+          </a:xfrm>
+          <a:prstGeom prst="roundRect">
+            <a:avLst/>
+          </a:prstGeom>
+          <a:solidFill>
+            <a:srgbClr val="FFFFFF"/>
+          </a:solidFill>
+          <a:ln>
+            <a:noFill/>
+          </a:ln>
+        </p:spPr>
+        <p:style>
+          <a:lnRef idx="1">
+            <a:schemeClr val="accent1"/>
+          </a:lnRef>
+          <a:fillRef idx="3">
+            <a:schemeClr val="accent1"/>
+          </a:fillRef>
+          <a:effectRef idx="2">
+            <a:schemeClr val="accent1"/>
+          </a:effectRef>
+          <a:fontRef idx="minor">
+            <a:schemeClr val="lt1"/>
+          </a:fontRef>
+        </p:style>
+        <p:txBody>
+          <a:bodyPr rtlCol="0" anchor="ctr"/>
+          <a:lstStyle/>
+          <a:p>
+            <a:pPr algn="ctr"/>
+          </a:p>
+        </p:txBody>
+      </p:sp>
+      <p:sp>
+        <p:nvSpPr>
+          <p:cNvPr id="14" name="TextBox 13"/>
+          <p:cNvSpPr txBox="1"/>
+          <p:nvPr/>
+        </p:nvSpPr>
+        <p:spPr>
+          <a:xfrm>
+            <a:off x="914400" y="4590288"/>
+            <a:ext cx="2926080" cy="1188720"/>
+          </a:xfrm>
+          <a:prstGeom prst="rect">
+            <a:avLst/>
+          </a:prstGeom>
+          <a:noFill/>
+        </p:spPr>
+        <p:txBody>
+          <a:bodyPr wrap="square">
+            <a:spAutoFit/>
+          </a:bodyPr>
+          <a:lstStyle/>
+          <a:p>
+            <a:pPr>
+              <a:defRPr sz="1200" b="1">
+                <a:solidFill>
+                  <a:srgbClr val="FF5E00"/>
+                </a:solidFill>
+                <a:latin typeface="Segoe UI"/>
+              </a:defRPr>
+            </a:pPr>
+            <a:r>
+              <a:t>Ticker &amp; Sector NER</a:t>
+            </a:r>
+          </a:p>
+          <a:p>
+            <a:pPr>
+              <a:defRPr sz="1000">
+                <a:solidFill>
+                  <a:srgbClr val="1E293B"/>
+                </a:solidFill>
+                <a:latin typeface="Segoe UI"/>
+              </a:defRPr>
+            </a:pPr>
+            <a:r>
+              <a:t>Context-aware mapping of corporate entities to stock symbols.</a:t>
+            </a:r>
+          </a:p>
+        </p:txBody>
+      </p:sp>
+      <p:sp>
+        <p:nvSpPr>
+          <p:cNvPr id="15" name="Rounded Rectangle 14"/>
+          <p:cNvSpPr/>
+          <p:nvPr/>
+        </p:nvSpPr>
+        <p:spPr>
+          <a:xfrm>
+            <a:off x="4297680" y="4480560"/>
+            <a:ext cx="3291840" cy="1463040"/>
+          </a:xfrm>
+          <a:prstGeom prst="roundRect">
+            <a:avLst/>
+          </a:prstGeom>
+          <a:solidFill>
+            <a:srgbClr val="FFFFFF"/>
+          </a:solidFill>
+          <a:ln>
+            <a:noFill/>
+          </a:ln>
+        </p:spPr>
+        <p:style>
+          <a:lnRef idx="1">
+            <a:schemeClr val="accent1"/>
+          </a:lnRef>
+          <a:fillRef idx="3">
+            <a:schemeClr val="accent1"/>
+          </a:fillRef>
+          <a:effectRef idx="2">
+            <a:schemeClr val="accent1"/>
+          </a:effectRef>
+          <a:fontRef idx="minor">
+            <a:schemeClr val="lt1"/>
+          </a:fontRef>
+        </p:style>
+        <p:txBody>
+          <a:bodyPr rtlCol="0" anchor="ctr"/>
+          <a:lstStyle/>
+          <a:p>
+            <a:pPr algn="ctr"/>
+          </a:p>
+        </p:txBody>
+      </p:sp>
+      <p:sp>
+        <p:nvSpPr>
+          <p:cNvPr id="16" name="TextBox 15"/>
+          <p:cNvSpPr txBox="1"/>
+          <p:nvPr/>
+        </p:nvSpPr>
+        <p:spPr>
+          <a:xfrm>
+            <a:off x="4480560" y="4590288"/>
+            <a:ext cx="2926080" cy="1188720"/>
+          </a:xfrm>
+          <a:prstGeom prst="rect">
+            <a:avLst/>
+          </a:prstGeom>
+          <a:noFill/>
+        </p:spPr>
+        <p:txBody>
+          <a:bodyPr wrap="square">
+            <a:spAutoFit/>
+          </a:bodyPr>
+          <a:lstStyle/>
+          <a:p>
+            <a:pPr>
+              <a:defRPr sz="1200" b="1">
+                <a:solidFill>
+                  <a:srgbClr val="FF5E00"/>
+                </a:solidFill>
+                <a:latin typeface="Segoe UI"/>
+              </a:defRPr>
+            </a:pPr>
+            <a:r>
+              <a:t>Macro Stress Engine</a:t>
+            </a:r>
+          </a:p>
+          <a:p>
+            <a:pPr>
+              <a:defRPr sz="1000">
+                <a:solidFill>
+                  <a:srgbClr val="1E293B"/>
+                </a:solidFill>
+                <a:latin typeface="Segoe UI"/>
+              </a:defRPr>
+            </a:pPr>
+            <a:r>
+              <a:t>Simulates Interest Rate Hikes, Tech Selloffs, and Stagflation.</a:t>
+            </a:r>
+          </a:p>
+        </p:txBody>
+      </p:sp>
+      <p:sp>
+        <p:nvSpPr>
+          <p:cNvPr id="17" name="Rounded Rectangle 16"/>
+          <p:cNvSpPr/>
+          <p:nvPr/>
+        </p:nvSpPr>
+        <p:spPr>
+          <a:xfrm>
+            <a:off x="7863840" y="4480560"/>
+            <a:ext cx="3291840" cy="1463040"/>
+          </a:xfrm>
+          <a:prstGeom prst="roundRect">
+            <a:avLst/>
+          </a:prstGeom>
+          <a:solidFill>
+            <a:srgbClr val="FFFFFF"/>
+          </a:solidFill>
+          <a:ln>
+            <a:noFill/>
+          </a:ln>
+        </p:spPr>
+        <p:style>
+          <a:lnRef idx="1">
+            <a:schemeClr val="accent1"/>
+          </a:lnRef>
+          <a:fillRef idx="3">
+            <a:schemeClr val="accent1"/>
+          </a:fillRef>
+          <a:effectRef idx="2">
+            <a:schemeClr val="accent1"/>
+          </a:effectRef>
+          <a:fontRef idx="minor">
+            <a:schemeClr val="lt1"/>
+          </a:fontRef>
+        </p:style>
+        <p:txBody>
+          <a:bodyPr rtlCol="0" anchor="ctr"/>
+          <a:lstStyle/>
+          <a:p>
+            <a:pPr algn="ctr"/>
+          </a:p>
+        </p:txBody>
+      </p:sp>
+      <p:sp>
+        <p:nvSpPr>
+          <p:cNvPr id="18" name="TextBox 17"/>
+          <p:cNvSpPr txBox="1"/>
+          <p:nvPr/>
+        </p:nvSpPr>
+        <p:spPr>
+          <a:xfrm>
+            <a:off x="8046720" y="4590288"/>
+            <a:ext cx="2926080" cy="1188720"/>
+          </a:xfrm>
+          <a:prstGeom prst="rect">
+            <a:avLst/>
+          </a:prstGeom>
+          <a:noFill/>
+        </p:spPr>
+        <p:txBody>
+          <a:bodyPr wrap="square">
+            <a:spAutoFit/>
+          </a:bodyPr>
+          <a:lstStyle/>
+          <a:p>
+            <a:pPr>
+              <a:defRPr sz="1200" b="1">
+                <a:solidFill>
+                  <a:srgbClr val="FF5E00"/>
+                </a:solidFill>
+                <a:latin typeface="Segoe UI"/>
+              </a:defRPr>
+            </a:pPr>
+            <a:r>
+              <a:t>VaR &amp; CVaR Metrics</a:t>
+            </a:r>
+          </a:p>
+          <a:p>
+            <a:pPr>
+              <a:defRPr sz="1000">
+                <a:solidFill>
+                  <a:srgbClr val="1E293B"/>
+                </a:solidFill>
+                <a:latin typeface="Segoe UI"/>
+              </a:defRPr>
+            </a:pPr>
+            <a:r>
+              <a:t>Parametric tail-risk calculations for regulatory compliance.</a:t>
+            </a:r>
+          </a:p>
+        </p:txBody>
+      </p:sp>
+    </p:spTree>
+  </p:cSld>
+  <p:clrMapOvr>
+    <a:masterClrMapping/>
+  </p:clrMapOvr>
+</p:sld>
+</file>
+
+<file path=ppt/slides/slide17.xml><?xml version="1.0" encoding="utf-8"?>
+<p:sld xmlns:a="http://schemas.openxmlformats.org/drawingml/2006/main" xmlns:p="http://schemas.openxmlformats.org/presentationml/2006/main" xmlns:r="http://schemas.openxmlformats.org/officeDocument/2006/relationships">
+  <p:cSld>
+    <p:spTree>
+      <p:nvGrpSpPr>
+        <p:cNvPr id="1" name=""/>
+        <p:cNvGrpSpPr/>
+        <p:nvPr/>
+      </p:nvGrpSpPr>
+      <p:grpSpPr/>
+      <p:sp>
+        <p:nvSpPr>
+          <p:cNvPr id="2" name="Rectangle 1"/>
+          <p:cNvSpPr/>
+          <p:nvPr/>
+        </p:nvSpPr>
+        <p:spPr>
+          <a:xfrm>
+            <a:off x="0" y="0"/>
+            <a:ext cx="12191695" cy="6858000"/>
+          </a:xfrm>
+          <a:prstGeom prst="rect">
+            <a:avLst/>
+          </a:prstGeom>
+          <a:solidFill>
+            <a:srgbClr val="FFFFFF"/>
+          </a:solidFill>
+          <a:ln>
+            <a:noFill/>
+          </a:ln>
+        </p:spPr>
+        <p:style>
+          <a:lnRef idx="1">
+            <a:schemeClr val="accent1"/>
+          </a:lnRef>
+          <a:fillRef idx="3">
+            <a:schemeClr val="accent1"/>
+          </a:fillRef>
+          <a:effectRef idx="2">
+            <a:schemeClr val="accent1"/>
+          </a:effectRef>
+          <a:fontRef idx="minor">
+            <a:schemeClr val="lt1"/>
+          </a:fontRef>
+        </p:style>
+        <p:txBody>
+          <a:bodyPr rtlCol="0" anchor="ctr"/>
+          <a:lstStyle/>
+          <a:p>
+            <a:pPr algn="ctr"/>
+          </a:p>
+        </p:txBody>
+      </p:sp>
+      <p:sp>
+        <p:nvSpPr>
+          <p:cNvPr id="3" name="Rectangle 2"/>
+          <p:cNvSpPr/>
+          <p:nvPr/>
+        </p:nvSpPr>
+        <p:spPr>
+          <a:xfrm>
+            <a:off x="0" y="0"/>
+            <a:ext cx="12191695" cy="137160"/>
+          </a:xfrm>
+          <a:prstGeom prst="rect">
+            <a:avLst/>
+          </a:prstGeom>
+          <a:solidFill>
+            <a:srgbClr val="FF5E00"/>
+          </a:solidFill>
+          <a:ln>
+            <a:noFill/>
+          </a:ln>
+        </p:spPr>
+        <p:style>
+          <a:lnRef idx="1">
+            <a:schemeClr val="accent1"/>
+          </a:lnRef>
+          <a:fillRef idx="3">
+            <a:schemeClr val="accent1"/>
+          </a:fillRef>
+          <a:effectRef idx="2">
+            <a:schemeClr val="accent1"/>
+          </a:effectRef>
+          <a:fontRef idx="minor">
+            <a:schemeClr val="lt1"/>
+          </a:fontRef>
+        </p:style>
+        <p:txBody>
+          <a:bodyPr rtlCol="0" anchor="ctr"/>
+          <a:lstStyle/>
+          <a:p>
+            <a:pPr algn="ctr"/>
+          </a:p>
+        </p:txBody>
+      </p:sp>
+      <p:sp>
+        <p:nvSpPr>
+          <p:cNvPr id="4" name="Rounded Rectangle 3"/>
+          <p:cNvSpPr/>
+          <p:nvPr/>
+        </p:nvSpPr>
+        <p:spPr>
+          <a:xfrm>
+            <a:off x="9418320" y="502920"/>
+            <a:ext cx="2011680" cy="438912"/>
+          </a:xfrm>
+          <a:prstGeom prst="roundRect">
+            <a:avLst/>
+          </a:prstGeom>
+          <a:solidFill>
+            <a:srgbClr val="FFFFFF"/>
+          </a:solidFill>
+          <a:ln w="19050">
+            <a:solidFill>
+              <a:srgbClr val="FF5E00"/>
+            </a:solidFill>
+          </a:ln>
+        </p:spPr>
+        <p:style>
+          <a:lnRef idx="1">
+            <a:schemeClr val="accent1"/>
+          </a:lnRef>
+          <a:fillRef idx="3">
+            <a:schemeClr val="accent1"/>
+          </a:fillRef>
+          <a:effectRef idx="2">
+            <a:schemeClr val="accent1"/>
+          </a:effectRef>
+          <a:fontRef idx="minor">
+            <a:schemeClr val="lt1"/>
+          </a:fontRef>
+        </p:style>
+        <p:txBody>
+          <a:bodyPr rtlCol="0" anchor="ctr"/>
+          <a:lstStyle/>
+          <a:p>
+            <a:pPr algn="ctr">
+              <a:defRPr sz="1000" b="1">
+                <a:solidFill>
+                  <a:srgbClr val="FF5E00"/>
+                </a:solidFill>
+                <a:latin typeface="Segoe UI"/>
+              </a:defRPr>
+            </a:pPr>
+            <a:r>
+              <a:t>VIT BHOPAL</a:t>
+            </a:r>
+          </a:p>
+        </p:txBody>
+      </p:sp>
+      <p:sp>
+        <p:nvSpPr>
+          <p:cNvPr id="5" name="Oval 4"/>
+          <p:cNvSpPr/>
+          <p:nvPr/>
+        </p:nvSpPr>
+        <p:spPr>
+          <a:xfrm>
+            <a:off x="10972800" y="5760720"/>
+            <a:ext cx="621792" cy="621792"/>
+          </a:xfrm>
+          <a:prstGeom prst="ellipse">
+            <a:avLst/>
+          </a:prstGeom>
+          <a:solidFill>
+            <a:srgbClr val="FF5E00"/>
+          </a:solidFill>
+          <a:ln>
+            <a:noFill/>
+          </a:ln>
+        </p:spPr>
+        <p:style>
+          <a:lnRef idx="1">
+            <a:schemeClr val="accent1"/>
+          </a:lnRef>
+          <a:fillRef idx="3">
+            <a:schemeClr val="accent1"/>
+          </a:fillRef>
+          <a:effectRef idx="2">
+            <a:schemeClr val="accent1"/>
+          </a:effectRef>
+          <a:fontRef idx="minor">
+            <a:schemeClr val="lt1"/>
+          </a:fontRef>
+        </p:style>
+        <p:txBody>
+          <a:bodyPr rtlCol="0" anchor="ctr"/>
+          <a:lstStyle/>
+          <a:p>
+            <a:pPr algn="ctr">
+              <a:defRPr sz="1800" b="1">
+                <a:solidFill>
+                  <a:srgbClr val="FFFFFF"/>
+                </a:solidFill>
+                <a:latin typeface="Segoe UI"/>
+              </a:defRPr>
+            </a:pPr>
+            <a:r>
+              <a:t>&gt;</a:t>
+            </a:r>
+          </a:p>
+        </p:txBody>
+      </p:sp>
+      <p:sp>
+        <p:nvSpPr>
+          <p:cNvPr id="6" name="TextBox 5"/>
+          <p:cNvSpPr txBox="1"/>
+          <p:nvPr/>
+        </p:nvSpPr>
+        <p:spPr>
+          <a:xfrm>
+            <a:off x="731520" y="822960"/>
+            <a:ext cx="8229600" cy="1188720"/>
+          </a:xfrm>
+          <a:prstGeom prst="rect">
+            <a:avLst/>
+          </a:prstGeom>
+          <a:noFill/>
+        </p:spPr>
+        <p:txBody>
+          <a:bodyPr wrap="square">
+            <a:spAutoFit/>
+          </a:bodyPr>
+          <a:lstStyle/>
+          <a:p>
+            <a:pPr>
+              <a:defRPr sz="3000" b="1">
+                <a:solidFill>
+                  <a:srgbClr val="FF5E00"/>
+                </a:solidFill>
+                <a:latin typeface="Segoe UI"/>
+              </a:defRPr>
+            </a:pPr>
+            <a:r>
+              <a:t>EXPERIMENTAL RESULTS</a:t>
+            </a:r>
+          </a:p>
+        </p:txBody>
+      </p:sp>
+      <p:pic>
+        <p:nvPicPr>
+          <p:cNvPr id="7" name="Picture 6" descr="slide16_results_benchmarks.png"/>
+          <p:cNvPicPr>
+            <a:picLocks noChangeAspect="1"/>
+          </p:cNvPicPr>
+          <p:nvPr/>
+        </p:nvPicPr>
+        <p:blipFill>
+          <a:blip r:embed="rId2"/>
+          <a:stretch>
+            <a:fillRect/>
+          </a:stretch>
+        </p:blipFill>
+        <p:spPr>
+          <a:xfrm>
+            <a:off x="731520" y="1920240"/>
+            <a:ext cx="10515600" cy="3931920"/>
+          </a:xfrm>
+          <a:prstGeom prst="rect">
+            <a:avLst/>
+          </a:prstGeom>
+        </p:spPr>
+      </p:pic>
+      <p:sp>
+        <p:nvSpPr>
+          <p:cNvPr id="8" name="TextBox 7"/>
+          <p:cNvSpPr txBox="1"/>
+          <p:nvPr/>
+        </p:nvSpPr>
+        <p:spPr>
+          <a:xfrm>
+            <a:off x="731520" y="5852160"/>
+            <a:ext cx="10058400" cy="548640"/>
           </a:xfrm>
           <a:prstGeom prst="rect">
             <a:avLst/>
@@ -3486,18 +6880,767 @@
           <a:lstStyle/>
           <a:p>
             <a:pPr>
-              <a:defRPr sz="1000">
-                <a:solidFill>
-                  <a:srgbClr val="6B7280"/>
-                </a:solidFill>
-              </a:defRPr>
-            </a:pPr>
-            <a:r>
-              <a:t>Verified Clean Architecture • Deterministic &amp; Explainable • S&amp;P Global &amp; CRISIL Evaluation Ready</a:t>
-            </a:r>
-          </a:p>
-        </p:txBody>
-      </p:sp>
+              <a:defRPr sz="1100" b="1">
+                <a:solidFill>
+                  <a:srgbClr val="FF5E00"/>
+                </a:solidFill>
+                <a:latin typeface="Segoe UI"/>
+              </a:defRPr>
+            </a:pPr>
+            <a:r>
+              <a:t>⚡ Sub-35ms API Latency   |   📈 42.8 docs/sec Ingestion Rate   |   ✅ 30/30 Unit &amp; Integration Tests Passed (100%)</a:t>
+            </a:r>
+          </a:p>
+        </p:txBody>
+      </p:sp>
+    </p:spTree>
+  </p:cSld>
+  <p:clrMapOvr>
+    <a:masterClrMapping/>
+  </p:clrMapOvr>
+</p:sld>
+</file>
+
+<file path=ppt/slides/slide18.xml><?xml version="1.0" encoding="utf-8"?>
+<p:sld xmlns:a="http://schemas.openxmlformats.org/drawingml/2006/main" xmlns:p="http://schemas.openxmlformats.org/presentationml/2006/main" xmlns:r="http://schemas.openxmlformats.org/officeDocument/2006/relationships">
+  <p:cSld>
+    <p:spTree>
+      <p:nvGrpSpPr>
+        <p:cNvPr id="1" name=""/>
+        <p:cNvGrpSpPr/>
+        <p:nvPr/>
+      </p:nvGrpSpPr>
+      <p:grpSpPr/>
+      <p:sp>
+        <p:nvSpPr>
+          <p:cNvPr id="2" name="Rectangle 1"/>
+          <p:cNvSpPr/>
+          <p:nvPr/>
+        </p:nvSpPr>
+        <p:spPr>
+          <a:xfrm>
+            <a:off x="0" y="0"/>
+            <a:ext cx="12191695" cy="6858000"/>
+          </a:xfrm>
+          <a:prstGeom prst="rect">
+            <a:avLst/>
+          </a:prstGeom>
+          <a:solidFill>
+            <a:srgbClr val="FFFFFF"/>
+          </a:solidFill>
+          <a:ln>
+            <a:noFill/>
+          </a:ln>
+        </p:spPr>
+        <p:style>
+          <a:lnRef idx="1">
+            <a:schemeClr val="accent1"/>
+          </a:lnRef>
+          <a:fillRef idx="3">
+            <a:schemeClr val="accent1"/>
+          </a:fillRef>
+          <a:effectRef idx="2">
+            <a:schemeClr val="accent1"/>
+          </a:effectRef>
+          <a:fontRef idx="minor">
+            <a:schemeClr val="lt1"/>
+          </a:fontRef>
+        </p:style>
+        <p:txBody>
+          <a:bodyPr rtlCol="0" anchor="ctr"/>
+          <a:lstStyle/>
+          <a:p>
+            <a:pPr algn="ctr"/>
+          </a:p>
+        </p:txBody>
+      </p:sp>
+      <p:sp>
+        <p:nvSpPr>
+          <p:cNvPr id="3" name="Rectangle 2"/>
+          <p:cNvSpPr/>
+          <p:nvPr/>
+        </p:nvSpPr>
+        <p:spPr>
+          <a:xfrm>
+            <a:off x="0" y="0"/>
+            <a:ext cx="12191695" cy="137160"/>
+          </a:xfrm>
+          <a:prstGeom prst="rect">
+            <a:avLst/>
+          </a:prstGeom>
+          <a:solidFill>
+            <a:srgbClr val="FF5E00"/>
+          </a:solidFill>
+          <a:ln>
+            <a:noFill/>
+          </a:ln>
+        </p:spPr>
+        <p:style>
+          <a:lnRef idx="1">
+            <a:schemeClr val="accent1"/>
+          </a:lnRef>
+          <a:fillRef idx="3">
+            <a:schemeClr val="accent1"/>
+          </a:fillRef>
+          <a:effectRef idx="2">
+            <a:schemeClr val="accent1"/>
+          </a:effectRef>
+          <a:fontRef idx="minor">
+            <a:schemeClr val="lt1"/>
+          </a:fontRef>
+        </p:style>
+        <p:txBody>
+          <a:bodyPr rtlCol="0" anchor="ctr"/>
+          <a:lstStyle/>
+          <a:p>
+            <a:pPr algn="ctr"/>
+          </a:p>
+        </p:txBody>
+      </p:sp>
+      <p:sp>
+        <p:nvSpPr>
+          <p:cNvPr id="4" name="Rounded Rectangle 3"/>
+          <p:cNvSpPr/>
+          <p:nvPr/>
+        </p:nvSpPr>
+        <p:spPr>
+          <a:xfrm>
+            <a:off x="9418320" y="502920"/>
+            <a:ext cx="2011680" cy="438912"/>
+          </a:xfrm>
+          <a:prstGeom prst="roundRect">
+            <a:avLst/>
+          </a:prstGeom>
+          <a:solidFill>
+            <a:srgbClr val="FFFFFF"/>
+          </a:solidFill>
+          <a:ln w="19050">
+            <a:solidFill>
+              <a:srgbClr val="FF5E00"/>
+            </a:solidFill>
+          </a:ln>
+        </p:spPr>
+        <p:style>
+          <a:lnRef idx="1">
+            <a:schemeClr val="accent1"/>
+          </a:lnRef>
+          <a:fillRef idx="3">
+            <a:schemeClr val="accent1"/>
+          </a:fillRef>
+          <a:effectRef idx="2">
+            <a:schemeClr val="accent1"/>
+          </a:effectRef>
+          <a:fontRef idx="minor">
+            <a:schemeClr val="lt1"/>
+          </a:fontRef>
+        </p:style>
+        <p:txBody>
+          <a:bodyPr rtlCol="0" anchor="ctr"/>
+          <a:lstStyle/>
+          <a:p>
+            <a:pPr algn="ctr">
+              <a:defRPr sz="1000" b="1">
+                <a:solidFill>
+                  <a:srgbClr val="FF5E00"/>
+                </a:solidFill>
+                <a:latin typeface="Segoe UI"/>
+              </a:defRPr>
+            </a:pPr>
+            <a:r>
+              <a:t>RISKPULSE</a:t>
+            </a:r>
+          </a:p>
+        </p:txBody>
+      </p:sp>
+      <p:sp>
+        <p:nvSpPr>
+          <p:cNvPr id="5" name="Oval 4"/>
+          <p:cNvSpPr/>
+          <p:nvPr/>
+        </p:nvSpPr>
+        <p:spPr>
+          <a:xfrm>
+            <a:off x="10972800" y="5760720"/>
+            <a:ext cx="621792" cy="621792"/>
+          </a:xfrm>
+          <a:prstGeom prst="ellipse">
+            <a:avLst/>
+          </a:prstGeom>
+          <a:solidFill>
+            <a:srgbClr val="FF5E00"/>
+          </a:solidFill>
+          <a:ln>
+            <a:noFill/>
+          </a:ln>
+        </p:spPr>
+        <p:style>
+          <a:lnRef idx="1">
+            <a:schemeClr val="accent1"/>
+          </a:lnRef>
+          <a:fillRef idx="3">
+            <a:schemeClr val="accent1"/>
+          </a:fillRef>
+          <a:effectRef idx="2">
+            <a:schemeClr val="accent1"/>
+          </a:effectRef>
+          <a:fontRef idx="minor">
+            <a:schemeClr val="lt1"/>
+          </a:fontRef>
+        </p:style>
+        <p:txBody>
+          <a:bodyPr rtlCol="0" anchor="ctr"/>
+          <a:lstStyle/>
+          <a:p>
+            <a:pPr algn="ctr">
+              <a:defRPr sz="1800" b="1">
+                <a:solidFill>
+                  <a:srgbClr val="FFFFFF"/>
+                </a:solidFill>
+                <a:latin typeface="Segoe UI"/>
+              </a:defRPr>
+            </a:pPr>
+            <a:r>
+              <a:t>&gt;</a:t>
+            </a:r>
+          </a:p>
+        </p:txBody>
+      </p:sp>
+      <p:sp>
+        <p:nvSpPr>
+          <p:cNvPr id="6" name="TextBox 5"/>
+          <p:cNvSpPr txBox="1"/>
+          <p:nvPr/>
+        </p:nvSpPr>
+        <p:spPr>
+          <a:xfrm>
+            <a:off x="731520" y="822960"/>
+            <a:ext cx="8229600" cy="1188720"/>
+          </a:xfrm>
+          <a:prstGeom prst="rect">
+            <a:avLst/>
+          </a:prstGeom>
+          <a:noFill/>
+        </p:spPr>
+        <p:txBody>
+          <a:bodyPr wrap="square">
+            <a:spAutoFit/>
+          </a:bodyPr>
+          <a:lstStyle/>
+          <a:p>
+            <a:pPr>
+              <a:defRPr sz="3000" b="1">
+                <a:solidFill>
+                  <a:srgbClr val="FF5E00"/>
+                </a:solidFill>
+                <a:latin typeface="Segoe UI"/>
+              </a:defRPr>
+            </a:pPr>
+            <a:r>
+              <a:t>ADVANTAGES &amp;</a:t>
+            </a:r>
+            <a:br/>
+            <a:r>
+              <a:t>LIMITATIONS</a:t>
+            </a:r>
+          </a:p>
+        </p:txBody>
+      </p:sp>
+      <p:sp>
+        <p:nvSpPr>
+          <p:cNvPr id="7" name="Rounded Rectangle 6"/>
+          <p:cNvSpPr/>
+          <p:nvPr/>
+        </p:nvSpPr>
+        <p:spPr>
+          <a:xfrm>
+            <a:off x="731520" y="2103120"/>
+            <a:ext cx="5120640" cy="4023360"/>
+          </a:xfrm>
+          <a:prstGeom prst="roundRect">
+            <a:avLst/>
+          </a:prstGeom>
+          <a:solidFill>
+            <a:srgbClr val="F8FAFC"/>
+          </a:solidFill>
+          <a:ln w="19050">
+            <a:solidFill>
+              <a:srgbClr val="FF5E00"/>
+            </a:solidFill>
+          </a:ln>
+        </p:spPr>
+        <p:style>
+          <a:lnRef idx="1">
+            <a:schemeClr val="accent1"/>
+          </a:lnRef>
+          <a:fillRef idx="3">
+            <a:schemeClr val="accent1"/>
+          </a:fillRef>
+          <a:effectRef idx="2">
+            <a:schemeClr val="accent1"/>
+          </a:effectRef>
+          <a:fontRef idx="minor">
+            <a:schemeClr val="lt1"/>
+          </a:fontRef>
+        </p:style>
+        <p:txBody>
+          <a:bodyPr rtlCol="0" anchor="ctr"/>
+          <a:lstStyle/>
+          <a:p>
+            <a:pPr algn="ctr"/>
+          </a:p>
+        </p:txBody>
+      </p:sp>
+      <p:sp>
+        <p:nvSpPr>
+          <p:cNvPr id="8" name="TextBox 7"/>
+          <p:cNvSpPr txBox="1"/>
+          <p:nvPr/>
+        </p:nvSpPr>
+        <p:spPr>
+          <a:xfrm>
+            <a:off x="914400" y="2286000"/>
+            <a:ext cx="4754880" cy="3657600"/>
+          </a:xfrm>
+          <a:prstGeom prst="rect">
+            <a:avLst/>
+          </a:prstGeom>
+          <a:noFill/>
+        </p:spPr>
+        <p:txBody>
+          <a:bodyPr wrap="square">
+            <a:spAutoFit/>
+          </a:bodyPr>
+          <a:lstStyle/>
+          <a:p>
+            <a:pPr>
+              <a:defRPr sz="1400" b="1">
+                <a:solidFill>
+                  <a:srgbClr val="FF5E00"/>
+                </a:solidFill>
+                <a:latin typeface="Segoe UI"/>
+              </a:defRPr>
+            </a:pPr>
+            <a:r>
+              <a:t>CORE ADVANTAGES</a:t>
+            </a:r>
+          </a:p>
+          <a:p>
+            <a:br/>
+            <a:pPr>
+              <a:defRPr sz="1150">
+                <a:solidFill>
+                  <a:srgbClr val="1E293B"/>
+                </a:solidFill>
+                <a:latin typeface="Segoe UI"/>
+              </a:defRPr>
+            </a:pPr>
+            <a:r>
+              <a:t>• Zero LLM Hallucinations: Deterministic formulas ensure reliable VaR math.</a:t>
+            </a:r>
+            <a:br/>
+            <a:br/>
+            <a:r>
+              <a:t>• Sub-Second Execution: FastAPI delivers sub-35ms response times.</a:t>
+            </a:r>
+            <a:br/>
+            <a:br/>
+            <a:r>
+              <a:t>• Basel III &amp; CRISIL Aligned: Meets multi-scenario stress principles.</a:t>
+            </a:r>
+            <a:br/>
+            <a:br/>
+            <a:r>
+              <a:t>• Accessible &amp; Open: Operates without $25k/yr terminal fees.</a:t>
+            </a:r>
+          </a:p>
+        </p:txBody>
+      </p:sp>
+      <p:sp>
+        <p:nvSpPr>
+          <p:cNvPr id="9" name="Rounded Rectangle 8"/>
+          <p:cNvSpPr/>
+          <p:nvPr/>
+        </p:nvSpPr>
+        <p:spPr>
+          <a:xfrm>
+            <a:off x="6217920" y="2103120"/>
+            <a:ext cx="5120640" cy="4023360"/>
+          </a:xfrm>
+          <a:prstGeom prst="roundRect">
+            <a:avLst/>
+          </a:prstGeom>
+          <a:solidFill>
+            <a:srgbClr val="F8FAFC"/>
+          </a:solidFill>
+          <a:ln w="19050">
+            <a:solidFill>
+              <a:srgbClr val="1E293B"/>
+            </a:solidFill>
+          </a:ln>
+        </p:spPr>
+        <p:style>
+          <a:lnRef idx="1">
+            <a:schemeClr val="accent1"/>
+          </a:lnRef>
+          <a:fillRef idx="3">
+            <a:schemeClr val="accent1"/>
+          </a:fillRef>
+          <a:effectRef idx="2">
+            <a:schemeClr val="accent1"/>
+          </a:effectRef>
+          <a:fontRef idx="minor">
+            <a:schemeClr val="lt1"/>
+          </a:fontRef>
+        </p:style>
+        <p:txBody>
+          <a:bodyPr rtlCol="0" anchor="ctr"/>
+          <a:lstStyle/>
+          <a:p>
+            <a:pPr algn="ctr"/>
+          </a:p>
+        </p:txBody>
+      </p:sp>
+      <p:sp>
+        <p:nvSpPr>
+          <p:cNvPr id="10" name="TextBox 9"/>
+          <p:cNvSpPr txBox="1"/>
+          <p:nvPr/>
+        </p:nvSpPr>
+        <p:spPr>
+          <a:xfrm>
+            <a:off x="6400800" y="2286000"/>
+            <a:ext cx="4754880" cy="3657600"/>
+          </a:xfrm>
+          <a:prstGeom prst="rect">
+            <a:avLst/>
+          </a:prstGeom>
+          <a:noFill/>
+        </p:spPr>
+        <p:txBody>
+          <a:bodyPr wrap="square">
+            <a:spAutoFit/>
+          </a:bodyPr>
+          <a:lstStyle/>
+          <a:p>
+            <a:pPr>
+              <a:defRPr sz="1400" b="1">
+                <a:solidFill>
+                  <a:srgbClr val="1E293B"/>
+                </a:solidFill>
+                <a:latin typeface="Segoe UI"/>
+              </a:defRPr>
+            </a:pPr>
+            <a:r>
+              <a:t>CURRENT LIMITATIONS</a:t>
+            </a:r>
+          </a:p>
+          <a:p>
+            <a:br/>
+            <a:pPr>
+              <a:defRPr sz="1150">
+                <a:solidFill>
+                  <a:srgbClr val="1E293B"/>
+                </a:solidFill>
+                <a:latin typeface="Segoe UI"/>
+              </a:defRPr>
+            </a:pPr>
+            <a:r>
+              <a:t>• Static Asset Betas: Does not yet model intraday GARCH volatility clustering.</a:t>
+            </a:r>
+            <a:br/>
+            <a:br/>
+            <a:r>
+              <a:t>• Single-Node SQLite Database: Lacks distributed multi-region replication.</a:t>
+            </a:r>
+            <a:br/>
+            <a:br/>
+            <a:r>
+              <a:t>• Dictionary-Based NER: Relies on curated aliases rather than contextual NER.</a:t>
+            </a:r>
+            <a:br/>
+            <a:br/>
+            <a:r>
+              <a:t>• Linear Contagion: Follows linear betas rather than liquidity freeze curves.</a:t>
+            </a:r>
+          </a:p>
+        </p:txBody>
+      </p:sp>
+    </p:spTree>
+  </p:cSld>
+  <p:clrMapOvr>
+    <a:masterClrMapping/>
+  </p:clrMapOvr>
+</p:sld>
+</file>
+
+<file path=ppt/slides/slide19.xml><?xml version="1.0" encoding="utf-8"?>
+<p:sld xmlns:a="http://schemas.openxmlformats.org/drawingml/2006/main" xmlns:p="http://schemas.openxmlformats.org/presentationml/2006/main" xmlns:r="http://schemas.openxmlformats.org/officeDocument/2006/relationships">
+  <p:cSld>
+    <p:spTree>
+      <p:nvGrpSpPr>
+        <p:cNvPr id="1" name=""/>
+        <p:cNvGrpSpPr/>
+        <p:nvPr/>
+      </p:nvGrpSpPr>
+      <p:grpSpPr/>
+      <p:sp>
+        <p:nvSpPr>
+          <p:cNvPr id="2" name="Rectangle 1"/>
+          <p:cNvSpPr/>
+          <p:nvPr/>
+        </p:nvSpPr>
+        <p:spPr>
+          <a:xfrm>
+            <a:off x="0" y="0"/>
+            <a:ext cx="12191695" cy="6858000"/>
+          </a:xfrm>
+          <a:prstGeom prst="rect">
+            <a:avLst/>
+          </a:prstGeom>
+          <a:solidFill>
+            <a:srgbClr val="FFFFFF"/>
+          </a:solidFill>
+          <a:ln>
+            <a:noFill/>
+          </a:ln>
+        </p:spPr>
+        <p:style>
+          <a:lnRef idx="1">
+            <a:schemeClr val="accent1"/>
+          </a:lnRef>
+          <a:fillRef idx="3">
+            <a:schemeClr val="accent1"/>
+          </a:fillRef>
+          <a:effectRef idx="2">
+            <a:schemeClr val="accent1"/>
+          </a:effectRef>
+          <a:fontRef idx="minor">
+            <a:schemeClr val="lt1"/>
+          </a:fontRef>
+        </p:style>
+        <p:txBody>
+          <a:bodyPr rtlCol="0" anchor="ctr"/>
+          <a:lstStyle/>
+          <a:p>
+            <a:pPr algn="ctr"/>
+          </a:p>
+        </p:txBody>
+      </p:sp>
+      <p:sp>
+        <p:nvSpPr>
+          <p:cNvPr id="3" name="Rectangle 2"/>
+          <p:cNvSpPr/>
+          <p:nvPr/>
+        </p:nvSpPr>
+        <p:spPr>
+          <a:xfrm>
+            <a:off x="0" y="0"/>
+            <a:ext cx="12191695" cy="137160"/>
+          </a:xfrm>
+          <a:prstGeom prst="rect">
+            <a:avLst/>
+          </a:prstGeom>
+          <a:solidFill>
+            <a:srgbClr val="FF5E00"/>
+          </a:solidFill>
+          <a:ln>
+            <a:noFill/>
+          </a:ln>
+        </p:spPr>
+        <p:style>
+          <a:lnRef idx="1">
+            <a:schemeClr val="accent1"/>
+          </a:lnRef>
+          <a:fillRef idx="3">
+            <a:schemeClr val="accent1"/>
+          </a:fillRef>
+          <a:effectRef idx="2">
+            <a:schemeClr val="accent1"/>
+          </a:effectRef>
+          <a:fontRef idx="minor">
+            <a:schemeClr val="lt1"/>
+          </a:fontRef>
+        </p:style>
+        <p:txBody>
+          <a:bodyPr rtlCol="0" anchor="ctr"/>
+          <a:lstStyle/>
+          <a:p>
+            <a:pPr algn="ctr"/>
+          </a:p>
+        </p:txBody>
+      </p:sp>
+      <p:sp>
+        <p:nvSpPr>
+          <p:cNvPr id="4" name="Rounded Rectangle 3"/>
+          <p:cNvSpPr/>
+          <p:nvPr/>
+        </p:nvSpPr>
+        <p:spPr>
+          <a:xfrm>
+            <a:off x="9418320" y="502920"/>
+            <a:ext cx="2011680" cy="438912"/>
+          </a:xfrm>
+          <a:prstGeom prst="roundRect">
+            <a:avLst/>
+          </a:prstGeom>
+          <a:solidFill>
+            <a:srgbClr val="FFFFFF"/>
+          </a:solidFill>
+          <a:ln w="19050">
+            <a:solidFill>
+              <a:srgbClr val="FF5E00"/>
+            </a:solidFill>
+          </a:ln>
+        </p:spPr>
+        <p:style>
+          <a:lnRef idx="1">
+            <a:schemeClr val="accent1"/>
+          </a:lnRef>
+          <a:fillRef idx="3">
+            <a:schemeClr val="accent1"/>
+          </a:fillRef>
+          <a:effectRef idx="2">
+            <a:schemeClr val="accent1"/>
+          </a:effectRef>
+          <a:fontRef idx="minor">
+            <a:schemeClr val="lt1"/>
+          </a:fontRef>
+        </p:style>
+        <p:txBody>
+          <a:bodyPr rtlCol="0" anchor="ctr"/>
+          <a:lstStyle/>
+          <a:p>
+            <a:pPr algn="ctr">
+              <a:defRPr sz="1000" b="1">
+                <a:solidFill>
+                  <a:srgbClr val="FF5E00"/>
+                </a:solidFill>
+                <a:latin typeface="Segoe UI"/>
+              </a:defRPr>
+            </a:pPr>
+            <a:r>
+              <a:t>VIT BHOPAL</a:t>
+            </a:r>
+          </a:p>
+        </p:txBody>
+      </p:sp>
+      <p:sp>
+        <p:nvSpPr>
+          <p:cNvPr id="5" name="Oval 4"/>
+          <p:cNvSpPr/>
+          <p:nvPr/>
+        </p:nvSpPr>
+        <p:spPr>
+          <a:xfrm>
+            <a:off x="10972800" y="5760720"/>
+            <a:ext cx="621792" cy="621792"/>
+          </a:xfrm>
+          <a:prstGeom prst="ellipse">
+            <a:avLst/>
+          </a:prstGeom>
+          <a:solidFill>
+            <a:srgbClr val="FF5E00"/>
+          </a:solidFill>
+          <a:ln>
+            <a:noFill/>
+          </a:ln>
+        </p:spPr>
+        <p:style>
+          <a:lnRef idx="1">
+            <a:schemeClr val="accent1"/>
+          </a:lnRef>
+          <a:fillRef idx="3">
+            <a:schemeClr val="accent1"/>
+          </a:fillRef>
+          <a:effectRef idx="2">
+            <a:schemeClr val="accent1"/>
+          </a:effectRef>
+          <a:fontRef idx="minor">
+            <a:schemeClr val="lt1"/>
+          </a:fontRef>
+        </p:style>
+        <p:txBody>
+          <a:bodyPr rtlCol="0" anchor="ctr"/>
+          <a:lstStyle/>
+          <a:p>
+            <a:pPr algn="ctr">
+              <a:defRPr sz="1800" b="1">
+                <a:solidFill>
+                  <a:srgbClr val="FFFFFF"/>
+                </a:solidFill>
+                <a:latin typeface="Segoe UI"/>
+              </a:defRPr>
+            </a:pPr>
+            <a:r>
+              <a:t>&gt;</a:t>
+            </a:r>
+          </a:p>
+        </p:txBody>
+      </p:sp>
+      <p:sp>
+        <p:nvSpPr>
+          <p:cNvPr id="6" name="TextBox 5"/>
+          <p:cNvSpPr txBox="1"/>
+          <p:nvPr/>
+        </p:nvSpPr>
+        <p:spPr>
+          <a:xfrm>
+            <a:off x="731520" y="822960"/>
+            <a:ext cx="8229600" cy="1188720"/>
+          </a:xfrm>
+          <a:prstGeom prst="rect">
+            <a:avLst/>
+          </a:prstGeom>
+          <a:noFill/>
+        </p:spPr>
+        <p:txBody>
+          <a:bodyPr wrap="square">
+            <a:spAutoFit/>
+          </a:bodyPr>
+          <a:lstStyle/>
+          <a:p>
+            <a:pPr>
+              <a:defRPr sz="3000" b="1">
+                <a:solidFill>
+                  <a:srgbClr val="FF5E00"/>
+                </a:solidFill>
+                <a:latin typeface="Segoe UI"/>
+              </a:defRPr>
+            </a:pPr>
+            <a:r>
+              <a:t>FUTURE TRENDS</a:t>
+            </a:r>
+            <a:br/>
+            <a:r>
+              <a:t>&amp; ROADMAP</a:t>
+            </a:r>
+          </a:p>
+        </p:txBody>
+      </p:sp>
+      <p:pic>
+        <p:nvPicPr>
+          <p:cNvPr id="7" name="Picture 6" descr="slide19_roadmap_timeline.png"/>
+          <p:cNvPicPr>
+            <a:picLocks noChangeAspect="1"/>
+          </p:cNvPicPr>
+          <p:nvPr/>
+        </p:nvPicPr>
+        <p:blipFill>
+          <a:blip r:embed="rId2"/>
+          <a:stretch>
+            <a:fillRect/>
+          </a:stretch>
+        </p:blipFill>
+        <p:spPr>
+          <a:xfrm>
+            <a:off x="731520" y="2011680"/>
+            <a:ext cx="10515600" cy="3840480"/>
+          </a:xfrm>
+          <a:prstGeom prst="rect">
+            <a:avLst/>
+          </a:prstGeom>
+        </p:spPr>
+      </p:pic>
     </p:spTree>
   </p:cSld>
   <p:clrMapOvr>
@@ -3531,7 +7674,7 @@
             <a:avLst/>
           </a:prstGeom>
           <a:solidFill>
-            <a:srgbClr val="0B0F19"/>
+            <a:srgbClr val="FFFFFF"/>
           </a:solidFill>
           <a:ln>
             <a:noFill/>
@@ -3561,95 +7704,23 @@
       </p:sp>
       <p:sp>
         <p:nvSpPr>
-          <p:cNvPr id="3" name="TextBox 2"/>
-          <p:cNvSpPr txBox="1"/>
-          <p:nvPr/>
-        </p:nvSpPr>
-        <p:spPr>
-          <a:xfrm>
-            <a:off x="731520" y="365760"/>
-            <a:ext cx="10698480" cy="365760"/>
+          <p:cNvPr id="3" name="Rectangle 2"/>
+          <p:cNvSpPr/>
+          <p:nvPr/>
+        </p:nvSpPr>
+        <p:spPr>
+          <a:xfrm>
+            <a:off x="0" y="0"/>
+            <a:ext cx="12191695" cy="137160"/>
           </a:xfrm>
           <a:prstGeom prst="rect">
             <a:avLst/>
           </a:prstGeom>
-          <a:noFill/>
-        </p:spPr>
-        <p:txBody>
-          <a:bodyPr wrap="square">
-            <a:spAutoFit/>
-          </a:bodyPr>
-          <a:lstStyle/>
-          <a:p>
-            <a:pPr>
-              <a:defRPr sz="1000" b="1">
-                <a:solidFill>
-                  <a:srgbClr val="38BDF8"/>
-                </a:solidFill>
-              </a:defRPr>
-            </a:pPr>
-            <a:r>
-              <a:t>CHALLENGE VS INNOVATION</a:t>
-            </a:r>
-          </a:p>
-        </p:txBody>
-      </p:sp>
-      <p:sp>
-        <p:nvSpPr>
-          <p:cNvPr id="4" name="TextBox 3"/>
-          <p:cNvSpPr txBox="1"/>
-          <p:nvPr/>
-        </p:nvSpPr>
-        <p:spPr>
-          <a:xfrm>
-            <a:off x="731520" y="640080"/>
-            <a:ext cx="10698480" cy="640080"/>
-          </a:xfrm>
-          <a:prstGeom prst="rect">
-            <a:avLst/>
-          </a:prstGeom>
-          <a:noFill/>
-        </p:spPr>
-        <p:txBody>
-          <a:bodyPr wrap="square">
-            <a:spAutoFit/>
-          </a:bodyPr>
-          <a:lstStyle/>
-          <a:p>
-            <a:pPr>
-              <a:defRPr sz="2200" b="1">
-                <a:solidFill>
-                  <a:srgbClr val="F9FAFB"/>
-                </a:solidFill>
-              </a:defRPr>
-            </a:pPr>
-            <a:r>
-              <a:t>Problem Statement &amp; Solution Approach</a:t>
-            </a:r>
-          </a:p>
-        </p:txBody>
-      </p:sp>
-      <p:sp>
-        <p:nvSpPr>
-          <p:cNvPr id="5" name="Rounded Rectangle 4"/>
-          <p:cNvSpPr/>
-          <p:nvPr/>
-        </p:nvSpPr>
-        <p:spPr>
-          <a:xfrm>
-            <a:off x="731520" y="1463040"/>
-            <a:ext cx="5120640" cy="4480560"/>
-          </a:xfrm>
-          <a:prstGeom prst="roundRect">
-            <a:avLst/>
-          </a:prstGeom>
-          <a:solidFill>
-            <a:srgbClr val="111827"/>
-          </a:solidFill>
-          <a:ln w="19050">
-            <a:solidFill>
-              <a:srgbClr val="F87171"/>
-            </a:solidFill>
+          <a:solidFill>
+            <a:srgbClr val="FF5E00"/>
+          </a:solidFill>
+          <a:ln>
+            <a:noFill/>
           </a:ln>
         </p:spPr>
         <p:style>
@@ -3676,103 +7747,24 @@
       </p:sp>
       <p:sp>
         <p:nvSpPr>
-          <p:cNvPr id="6" name="TextBox 5"/>
-          <p:cNvSpPr txBox="1"/>
-          <p:nvPr/>
-        </p:nvSpPr>
-        <p:spPr>
-          <a:xfrm>
-            <a:off x="1005840" y="1645920"/>
-            <a:ext cx="4572000" cy="4114800"/>
-          </a:xfrm>
-          <a:prstGeom prst="rect">
-            <a:avLst/>
-          </a:prstGeom>
-          <a:noFill/>
-        </p:spPr>
-        <p:txBody>
-          <a:bodyPr wrap="square">
-            <a:spAutoFit/>
-          </a:bodyPr>
-          <a:lstStyle/>
-          <a:p>
-            <a:pPr>
-              <a:defRPr sz="1300" b="1">
-                <a:solidFill>
-                  <a:srgbClr val="F87171"/>
-                </a:solidFill>
-              </a:defRPr>
-            </a:pPr>
-            <a:r>
-              <a:t>THE PROBLEM: LATENCY &amp; BLIND SPOTS</a:t>
-            </a:r>
-          </a:p>
-          <a:p>
-            <a:br/>
-            <a:pPr>
-              <a:defRPr sz="1100">
-                <a:solidFill>
-                  <a:srgbClr val="F9FAFB"/>
-                </a:solidFill>
-              </a:defRPr>
-            </a:pPr>
-            <a:r>
-              <a:t>1. Lagging Risk Indicators:</a:t>
-            </a:r>
-            <a:br/>
-            <a:r>
-              <a:t>Traditional institutional risk models rely predominantly on quarterly 10-K filings, credit rating updates, and backward-looking financial ratios.</a:t>
-            </a:r>
-            <a:br/>
-            <a:br/>
-            <a:r>
-              <a:t>2. Unstructured Data Avalanche:</a:t>
-            </a:r>
-            <a:br/>
-            <a:r>
-              <a:t>Critical systemic risks emerge first in breaking news wires, social discourse, and regulatory filings—generating massive unstructured noise.</a:t>
-            </a:r>
-            <a:br/>
-            <a:br/>
-            <a:r>
-              <a:t>3. Fragmented Risk Silos:</a:t>
-            </a:r>
-            <a:br/>
-            <a:r>
-              <a:t>Sentiment analysis tools rarely translate textual signals directly into quantified asset haircuts or actionable portfolio stress testing.</a:t>
-            </a:r>
-            <a:br/>
-            <a:br/>
-            <a:r>
-              <a:t>4. Black-Box Unreliability:</a:t>
-            </a:r>
-            <a:br/>
-            <a:r>
-              <a:t>Opaque generative models suffer from hallucination and lack regulatory auditability required by Basel III and CRISIL standards.</a:t>
-            </a:r>
-          </a:p>
-        </p:txBody>
-      </p:sp>
-      <p:sp>
-        <p:nvSpPr>
-          <p:cNvPr id="7" name="Rounded Rectangle 6"/>
+          <p:cNvPr id="4" name="Rounded Rectangle 3"/>
           <p:cNvSpPr/>
           <p:nvPr/>
         </p:nvSpPr>
         <p:spPr>
           <a:xfrm>
-            <a:off x="6309360" y="1463040"/>
-            <a:ext cx="5120640" cy="4480560"/>
+            <a:off x="9418320" y="502920"/>
+            <a:ext cx="2011680" cy="438912"/>
           </a:xfrm>
           <a:prstGeom prst="roundRect">
             <a:avLst/>
           </a:prstGeom>
           <a:solidFill>
-            <a:srgbClr val="111827"/>
+            <a:srgbClr val="FFFFFF"/>
           </a:solidFill>
           <a:ln w="19050">
             <a:solidFill>
-              <a:srgbClr val="34D399"/>
+              <a:srgbClr val="FF5E00"/>
             </a:solidFill>
           </a:ln>
         </p:spPr>
@@ -3794,20 +7786,83 @@
           <a:bodyPr rtlCol="0" anchor="ctr"/>
           <a:lstStyle/>
           <a:p>
-            <a:pPr algn="ctr"/>
-          </a:p>
-        </p:txBody>
-      </p:sp>
-      <p:sp>
-        <p:nvSpPr>
-          <p:cNvPr id="8" name="TextBox 7"/>
+            <a:pPr algn="ctr">
+              <a:defRPr sz="1000" b="1">
+                <a:solidFill>
+                  <a:srgbClr val="FF5E00"/>
+                </a:solidFill>
+                <a:latin typeface="Segoe UI"/>
+              </a:defRPr>
+            </a:pPr>
+            <a:r>
+              <a:t>RISKPULSE</a:t>
+            </a:r>
+          </a:p>
+        </p:txBody>
+      </p:sp>
+      <p:sp>
+        <p:nvSpPr>
+          <p:cNvPr id="5" name="Oval 4"/>
+          <p:cNvSpPr/>
+          <p:nvPr/>
+        </p:nvSpPr>
+        <p:spPr>
+          <a:xfrm>
+            <a:off x="10972800" y="5760720"/>
+            <a:ext cx="621792" cy="621792"/>
+          </a:xfrm>
+          <a:prstGeom prst="ellipse">
+            <a:avLst/>
+          </a:prstGeom>
+          <a:solidFill>
+            <a:srgbClr val="FF5E00"/>
+          </a:solidFill>
+          <a:ln>
+            <a:noFill/>
+          </a:ln>
+        </p:spPr>
+        <p:style>
+          <a:lnRef idx="1">
+            <a:schemeClr val="accent1"/>
+          </a:lnRef>
+          <a:fillRef idx="3">
+            <a:schemeClr val="accent1"/>
+          </a:fillRef>
+          <a:effectRef idx="2">
+            <a:schemeClr val="accent1"/>
+          </a:effectRef>
+          <a:fontRef idx="minor">
+            <a:schemeClr val="lt1"/>
+          </a:fontRef>
+        </p:style>
+        <p:txBody>
+          <a:bodyPr rtlCol="0" anchor="ctr"/>
+          <a:lstStyle/>
+          <a:p>
+            <a:pPr algn="ctr">
+              <a:defRPr sz="1800" b="1">
+                <a:solidFill>
+                  <a:srgbClr val="FFFFFF"/>
+                </a:solidFill>
+                <a:latin typeface="Segoe UI"/>
+              </a:defRPr>
+            </a:pPr>
+            <a:r>
+              <a:t>&gt;</a:t>
+            </a:r>
+          </a:p>
+        </p:txBody>
+      </p:sp>
+      <p:sp>
+        <p:nvSpPr>
+          <p:cNvPr id="6" name="TextBox 5"/>
           <p:cNvSpPr txBox="1"/>
           <p:nvPr/>
         </p:nvSpPr>
         <p:spPr>
           <a:xfrm>
-            <a:off x="6583680" y="1645920"/>
-            <a:ext cx="4572000" cy="4114800"/>
+            <a:off x="731520" y="822960"/>
+            <a:ext cx="8229600" cy="1188720"/>
           </a:xfrm>
           <a:prstGeom prst="rect">
             <a:avLst/>
@@ -3821,58 +7876,455 @@
           <a:lstStyle/>
           <a:p>
             <a:pPr>
-              <a:defRPr sz="1300" b="1">
-                <a:solidFill>
-                  <a:srgbClr val="34D399"/>
-                </a:solidFill>
-              </a:defRPr>
-            </a:pPr>
-            <a:r>
-              <a:t>THE SOLUTION: DETERMINISTIC RISK INTELLIGENCE</a:t>
+              <a:defRPr sz="3000" b="1">
+                <a:solidFill>
+                  <a:srgbClr val="FF5E00"/>
+                </a:solidFill>
+                <a:latin typeface="Segoe UI"/>
+              </a:defRPr>
+            </a:pPr>
+            <a:r>
+              <a:t>INTRODUCTION</a:t>
+            </a:r>
+            <a:br/>
+            <a:r>
+              <a:t>TO RISKPULSE</a:t>
+            </a:r>
+          </a:p>
+        </p:txBody>
+      </p:sp>
+      <p:sp>
+        <p:nvSpPr>
+          <p:cNvPr id="7" name="TextBox 6"/>
+          <p:cNvSpPr txBox="1"/>
+          <p:nvPr/>
+        </p:nvSpPr>
+        <p:spPr>
+          <a:xfrm>
+            <a:off x="731520" y="2286000"/>
+            <a:ext cx="4754880" cy="3657600"/>
+          </a:xfrm>
+          <a:prstGeom prst="rect">
+            <a:avLst/>
+          </a:prstGeom>
+          <a:noFill/>
+        </p:spPr>
+        <p:txBody>
+          <a:bodyPr wrap="square">
+            <a:spAutoFit/>
+          </a:bodyPr>
+          <a:lstStyle/>
+          <a:p>
+            <a:pPr>
+              <a:defRPr sz="1400">
+                <a:solidFill>
+                  <a:srgbClr val="1E293B"/>
+                </a:solidFill>
+                <a:latin typeface="Segoe UI"/>
+              </a:defRPr>
+            </a:pPr>
+            <a:r>
+              <a:t>RiskPulse refers to an autonomous risk intelligence platform bridging unstructured textual financial data with quantitative portfolio stress-testing.</a:t>
+            </a:r>
+            <a:br/>
+            <a:br/>
+            <a:r>
+              <a:t>Key components include real-time RSS feed ingestion, FinBERT natural language sentiment scoring, and beta-weighted macroeconomic scenario simulation, enabling asset managers to detect and mitigate drawdowns before prices drop.</a:t>
+            </a:r>
+          </a:p>
+        </p:txBody>
+      </p:sp>
+      <p:pic>
+        <p:nvPicPr>
+          <p:cNvPr id="8" name="Picture 7" descr="slide2_overview_flow.png"/>
+          <p:cNvPicPr>
+            <a:picLocks noChangeAspect="1"/>
+          </p:cNvPicPr>
+          <p:nvPr/>
+        </p:nvPicPr>
+        <p:blipFill>
+          <a:blip r:embed="rId2"/>
+          <a:stretch>
+            <a:fillRect/>
+          </a:stretch>
+        </p:blipFill>
+        <p:spPr>
+          <a:xfrm>
+            <a:off x="5669280" y="2011680"/>
+            <a:ext cx="5943600" cy="3474720"/>
+          </a:xfrm>
+          <a:prstGeom prst="rect">
+            <a:avLst/>
+          </a:prstGeom>
+        </p:spPr>
+      </p:pic>
+    </p:spTree>
+  </p:cSld>
+  <p:clrMapOvr>
+    <a:masterClrMapping/>
+  </p:clrMapOvr>
+</p:sld>
+</file>
+
+<file path=ppt/slides/slide20.xml><?xml version="1.0" encoding="utf-8"?>
+<p:sld xmlns:a="http://schemas.openxmlformats.org/drawingml/2006/main" xmlns:p="http://schemas.openxmlformats.org/presentationml/2006/main" xmlns:r="http://schemas.openxmlformats.org/officeDocument/2006/relationships">
+  <p:cSld>
+    <p:spTree>
+      <p:nvGrpSpPr>
+        <p:cNvPr id="1" name=""/>
+        <p:cNvGrpSpPr/>
+        <p:nvPr/>
+      </p:nvGrpSpPr>
+      <p:grpSpPr/>
+      <p:sp>
+        <p:nvSpPr>
+          <p:cNvPr id="2" name="Rectangle 1"/>
+          <p:cNvSpPr/>
+          <p:nvPr/>
+        </p:nvSpPr>
+        <p:spPr>
+          <a:xfrm>
+            <a:off x="0" y="0"/>
+            <a:ext cx="12191695" cy="6858000"/>
+          </a:xfrm>
+          <a:prstGeom prst="rect">
+            <a:avLst/>
+          </a:prstGeom>
+          <a:solidFill>
+            <a:srgbClr val="FF5E00"/>
+          </a:solidFill>
+          <a:ln>
+            <a:noFill/>
+          </a:ln>
+        </p:spPr>
+        <p:style>
+          <a:lnRef idx="1">
+            <a:schemeClr val="accent1"/>
+          </a:lnRef>
+          <a:fillRef idx="3">
+            <a:schemeClr val="accent1"/>
+          </a:fillRef>
+          <a:effectRef idx="2">
+            <a:schemeClr val="accent1"/>
+          </a:effectRef>
+          <a:fontRef idx="minor">
+            <a:schemeClr val="lt1"/>
+          </a:fontRef>
+        </p:style>
+        <p:txBody>
+          <a:bodyPr rtlCol="0" anchor="ctr"/>
+          <a:lstStyle/>
+          <a:p>
+            <a:pPr algn="ctr"/>
+          </a:p>
+        </p:txBody>
+      </p:sp>
+      <p:sp>
+        <p:nvSpPr>
+          <p:cNvPr id="3" name="Oval 2"/>
+          <p:cNvSpPr/>
+          <p:nvPr/>
+        </p:nvSpPr>
+        <p:spPr>
+          <a:xfrm>
+            <a:off x="7772400" y="-1371600"/>
+            <a:ext cx="6858000" cy="6858000"/>
+          </a:xfrm>
+          <a:prstGeom prst="ellipse">
+            <a:avLst/>
+          </a:prstGeom>
+          <a:solidFill>
+            <a:srgbClr val="FF7814"/>
+          </a:solidFill>
+          <a:ln>
+            <a:noFill/>
+          </a:ln>
+        </p:spPr>
+        <p:style>
+          <a:lnRef idx="1">
+            <a:schemeClr val="accent1"/>
+          </a:lnRef>
+          <a:fillRef idx="3">
+            <a:schemeClr val="accent1"/>
+          </a:fillRef>
+          <a:effectRef idx="2">
+            <a:schemeClr val="accent1"/>
+          </a:effectRef>
+          <a:fontRef idx="minor">
+            <a:schemeClr val="lt1"/>
+          </a:fontRef>
+        </p:style>
+        <p:txBody>
+          <a:bodyPr rtlCol="0" anchor="ctr"/>
+          <a:lstStyle/>
+          <a:p>
+            <a:pPr algn="ctr"/>
+          </a:p>
+        </p:txBody>
+      </p:sp>
+      <p:sp>
+        <p:nvSpPr>
+          <p:cNvPr id="4" name="Rounded Rectangle 3"/>
+          <p:cNvSpPr/>
+          <p:nvPr/>
+        </p:nvSpPr>
+        <p:spPr>
+          <a:xfrm>
+            <a:off x="731520" y="502920"/>
+            <a:ext cx="2011680" cy="438912"/>
+          </a:xfrm>
+          <a:prstGeom prst="roundRect">
+            <a:avLst/>
+          </a:prstGeom>
+          <a:solidFill>
+            <a:srgbClr val="E65100"/>
+          </a:solidFill>
+          <a:ln w="19050">
+            <a:solidFill>
+              <a:srgbClr val="FFFFFF"/>
+            </a:solidFill>
+          </a:ln>
+        </p:spPr>
+        <p:style>
+          <a:lnRef idx="1">
+            <a:schemeClr val="accent1"/>
+          </a:lnRef>
+          <a:fillRef idx="3">
+            <a:schemeClr val="accent1"/>
+          </a:fillRef>
+          <a:effectRef idx="2">
+            <a:schemeClr val="accent1"/>
+          </a:effectRef>
+          <a:fontRef idx="minor">
+            <a:schemeClr val="lt1"/>
+          </a:fontRef>
+        </p:style>
+        <p:txBody>
+          <a:bodyPr rtlCol="0" anchor="ctr"/>
+          <a:lstStyle/>
+          <a:p>
+            <a:pPr algn="ctr">
+              <a:defRPr sz="1000" b="1">
+                <a:solidFill>
+                  <a:srgbClr val="FFFFFF"/>
+                </a:solidFill>
+                <a:latin typeface="Segoe UI"/>
+              </a:defRPr>
+            </a:pPr>
+            <a:r>
+              <a:t>VIT BHOPAL</a:t>
+            </a:r>
+          </a:p>
+        </p:txBody>
+      </p:sp>
+      <p:sp>
+        <p:nvSpPr>
+          <p:cNvPr id="5" name="Oval 4"/>
+          <p:cNvSpPr/>
+          <p:nvPr/>
+        </p:nvSpPr>
+        <p:spPr>
+          <a:xfrm>
+            <a:off x="10972800" y="5760720"/>
+            <a:ext cx="621792" cy="621792"/>
+          </a:xfrm>
+          <a:prstGeom prst="ellipse">
+            <a:avLst/>
+          </a:prstGeom>
+          <a:solidFill>
+            <a:srgbClr val="FFFFFF"/>
+          </a:solidFill>
+          <a:ln>
+            <a:noFill/>
+          </a:ln>
+        </p:spPr>
+        <p:style>
+          <a:lnRef idx="1">
+            <a:schemeClr val="accent1"/>
+          </a:lnRef>
+          <a:fillRef idx="3">
+            <a:schemeClr val="accent1"/>
+          </a:fillRef>
+          <a:effectRef idx="2">
+            <a:schemeClr val="accent1"/>
+          </a:effectRef>
+          <a:fontRef idx="minor">
+            <a:schemeClr val="lt1"/>
+          </a:fontRef>
+        </p:style>
+        <p:txBody>
+          <a:bodyPr rtlCol="0" anchor="ctr"/>
+          <a:lstStyle/>
+          <a:p>
+            <a:pPr algn="ctr">
+              <a:defRPr sz="1800" b="1">
+                <a:solidFill>
+                  <a:srgbClr val="FF5E00"/>
+                </a:solidFill>
+                <a:latin typeface="Segoe UI"/>
+              </a:defRPr>
+            </a:pPr>
+            <a:r>
+              <a:t>&gt;</a:t>
+            </a:r>
+          </a:p>
+        </p:txBody>
+      </p:sp>
+      <p:sp>
+        <p:nvSpPr>
+          <p:cNvPr id="6" name="TextBox 5"/>
+          <p:cNvSpPr txBox="1"/>
+          <p:nvPr/>
+        </p:nvSpPr>
+        <p:spPr>
+          <a:xfrm>
+            <a:off x="731520" y="1371600"/>
+            <a:ext cx="10515600" cy="1371600"/>
+          </a:xfrm>
+          <a:prstGeom prst="rect">
+            <a:avLst/>
+          </a:prstGeom>
+          <a:noFill/>
+        </p:spPr>
+        <p:txBody>
+          <a:bodyPr wrap="square">
+            <a:spAutoFit/>
+          </a:bodyPr>
+          <a:lstStyle/>
+          <a:p>
+            <a:pPr>
+              <a:defRPr sz="3600" b="1">
+                <a:solidFill>
+                  <a:srgbClr val="FFFFFF"/>
+                </a:solidFill>
+                <a:latin typeface="Segoe UI"/>
+              </a:defRPr>
+            </a:pPr>
+            <a:r>
+              <a:t>CONCLUSION &amp; REFERENCES</a:t>
+            </a:r>
+          </a:p>
+          <a:p>
+            <a:pPr>
+              <a:defRPr sz="1600">
+                <a:solidFill>
+                  <a:srgbClr val="FFEDD5"/>
+                </a:solidFill>
+                <a:latin typeface="Segoe UI"/>
+              </a:defRPr>
+            </a:pPr>
+            <a:r>
+              <a:t>S&amp;P Global &amp; CRISIL Campus Hackathon 2026 Submission</a:t>
+            </a:r>
+          </a:p>
+        </p:txBody>
+      </p:sp>
+      <p:sp>
+        <p:nvSpPr>
+          <p:cNvPr id="7" name="TextBox 6"/>
+          <p:cNvSpPr txBox="1"/>
+          <p:nvPr/>
+        </p:nvSpPr>
+        <p:spPr>
+          <a:xfrm>
+            <a:off x="731520" y="2377440"/>
+            <a:ext cx="10515600" cy="3840480"/>
+          </a:xfrm>
+          <a:prstGeom prst="rect">
+            <a:avLst/>
+          </a:prstGeom>
+          <a:noFill/>
+        </p:spPr>
+        <p:txBody>
+          <a:bodyPr wrap="square">
+            <a:spAutoFit/>
+          </a:bodyPr>
+          <a:lstStyle/>
+          <a:p>
+            <a:pPr>
+              <a:defRPr sz="1600" b="1">
+                <a:solidFill>
+                  <a:srgbClr val="FFFFFF"/>
+                </a:solidFill>
+                <a:latin typeface="Segoe UI"/>
+              </a:defRPr>
+            </a:pPr>
+            <a:r>
+              <a:t>CONCLUSION SUMMARY</a:t>
+            </a:r>
+          </a:p>
+          <a:p>
+            <a:pPr>
+              <a:defRPr sz="1200">
+                <a:solidFill>
+                  <a:srgbClr val="FFFFFF"/>
+                </a:solidFill>
+                <a:latin typeface="Segoe UI"/>
+              </a:defRPr>
+            </a:pPr>
+            <a:r>
+              <a:t>• RiskPulse successfully bridges unstructured qualitative news sentiment with quantitative portfolio stress-testing.</a:t>
+            </a:r>
+            <a:br/>
+            <a:r>
+              <a:t>• Demonstrated sub-35ms API latencies, high ingestion throughput, and 100% automated test coverage across 30 test suites.</a:t>
+            </a:r>
+            <a:br/>
+            <a:r>
+              <a:t>• Proves that modern lightweight AI and asynchronous web architectures can democratize institutional financial risk intelligence.</a:t>
             </a:r>
           </a:p>
           <a:p>
             <a:br/>
             <a:pPr>
-              <a:defRPr sz="1100">
-                <a:solidFill>
-                  <a:srgbClr val="F9FAFB"/>
-                </a:solidFill>
-              </a:defRPr>
-            </a:pPr>
-            <a:r>
-              <a:t>1. Dual-Source + Live RSS Ingestion:</a:t>
+              <a:defRPr sz="1400" b="1">
+                <a:solidFill>
+                  <a:srgbClr val="FFEDD5"/>
+                </a:solidFill>
+                <a:latin typeface="Segoe UI"/>
+              </a:defRPr>
+            </a:pPr>
+            <a:r>
+              <a:t>REFERENCES (IEEE FORMAT)</a:t>
+            </a:r>
+          </a:p>
+          <a:p>
+            <a:pPr>
+              <a:defRPr sz="1050">
+                <a:solidFill>
+                  <a:srgbClr val="FFFFFF"/>
+                </a:solidFill>
+                <a:latin typeface="Segoe UI"/>
+              </a:defRPr>
+            </a:pPr>
+            <a:r>
+              <a:t>[1] S. Araci, 'FinBERT: Financial Sentiment Analysis with Pre-trained Language Models,' arXiv:1908.10063, 2019.</a:t>
             </a:r>
             <a:br/>
             <a:r>
-              <a:t>Ingests breaking financial news wire feeds and social/market sentiment, with optional live RSS integration and offline resilience.</a:t>
+              <a:t>[2] T. Loughran and B. McDonald, 'When is a Word Pronounced Negative? A New Financial Dictionary,' J. Finance, 2011.</a:t>
             </a:r>
             <a:br/>
+            <a:r>
+              <a:t>[3] P. Jorion, Value at Risk: The New Benchmark for Managing Financial Risk, 3rd ed. McGraw-Hill, 2007.</a:t>
+            </a:r>
             <a:br/>
             <a:r>
-              <a:t>2. Interpretable Financial NLP Engine:</a:t>
-            </a:r>
+              <a:t>[4] Basel Committee on Banking Supervision, 'Stress testing principles,' Bank for International Settlements, 2018.</a:t>
+            </a:r>
+          </a:p>
+          <a:p>
             <a:br/>
-            <a:r>
-              <a:t>Zero-hallucination lexicon scoring produces normalized sentiment [-1.0 to +1.0], 8-class event taxonomy, and impact scores [1 to 10].</a:t>
-            </a:r>
-            <a:br/>
-            <a:br/>
-            <a:r>
-              <a:t>3. Downstream Trigger Integration:</a:t>
-            </a:r>
-            <a:br/>
-            <a:r>
-              <a:t>High-impact events (Impact Score &gt;= 7) automatically trigger Module B strategic stress testing without manual intervention.</a:t>
-            </a:r>
-            <a:br/>
-            <a:br/>
-            <a:r>
-              <a:t>4. Transparent Portfolio Drawdowns:</a:t>
-            </a:r>
-            <a:br/>
-            <a:r>
-              <a:t>Dynamically calculates mark-to-market valuations, absolute dollar losses, and percentage drawdowns across a multi-asset portfolio ($1M baseline).</a:t>
+            <a:pPr>
+              <a:defRPr sz="1100" b="1">
+                <a:solidFill>
+                  <a:srgbClr val="FFFFFF"/>
+                </a:solidFill>
+                <a:latin typeface="Segoe UI"/>
+              </a:defRPr>
+            </a:pPr>
+            <a:r>
+              <a:t>LIVE DEPLOYED PLATFORM: https://vit-bhopal-abhi-pandey-s-p-crisil-h.vercel.app/</a:t>
             </a:r>
           </a:p>
         </p:txBody>
@@ -3910,7 +8362,7 @@
             <a:avLst/>
           </a:prstGeom>
           <a:solidFill>
-            <a:srgbClr val="0B0F19"/>
+            <a:srgbClr val="FFFFFF"/>
           </a:solidFill>
           <a:ln>
             <a:noFill/>
@@ -3940,119 +8392,23 @@
       </p:sp>
       <p:sp>
         <p:nvSpPr>
-          <p:cNvPr id="3" name="TextBox 2"/>
-          <p:cNvSpPr txBox="1"/>
-          <p:nvPr/>
-        </p:nvSpPr>
-        <p:spPr>
-          <a:xfrm>
-            <a:off x="731520" y="365760"/>
-            <a:ext cx="10698480" cy="365760"/>
+          <p:cNvPr id="3" name="Rectangle 2"/>
+          <p:cNvSpPr/>
+          <p:nvPr/>
+        </p:nvSpPr>
+        <p:spPr>
+          <a:xfrm>
+            <a:off x="6583680" y="0"/>
+            <a:ext cx="5608015" cy="6858000"/>
           </a:xfrm>
           <a:prstGeom prst="rect">
             <a:avLst/>
           </a:prstGeom>
-          <a:noFill/>
-        </p:spPr>
-        <p:txBody>
-          <a:bodyPr wrap="square">
-            <a:spAutoFit/>
-          </a:bodyPr>
-          <a:lstStyle/>
-          <a:p>
-            <a:pPr>
-              <a:defRPr sz="1000" b="1">
-                <a:solidFill>
-                  <a:srgbClr val="38BDF8"/>
-                </a:solidFill>
-              </a:defRPr>
-            </a:pPr>
-            <a:r>
-              <a:t>DATA PIPELINE &amp; MODULE INTEGRATION</a:t>
-            </a:r>
-          </a:p>
-        </p:txBody>
-      </p:sp>
-      <p:sp>
-        <p:nvSpPr>
-          <p:cNvPr id="4" name="TextBox 3"/>
-          <p:cNvSpPr txBox="1"/>
-          <p:nvPr/>
-        </p:nvSpPr>
-        <p:spPr>
-          <a:xfrm>
-            <a:off x="731520" y="640080"/>
-            <a:ext cx="10698480" cy="640080"/>
-          </a:xfrm>
-          <a:prstGeom prst="rect">
-            <a:avLst/>
-          </a:prstGeom>
-          <a:noFill/>
-        </p:spPr>
-        <p:txBody>
-          <a:bodyPr wrap="square">
-            <a:spAutoFit/>
-          </a:bodyPr>
-          <a:lstStyle/>
-          <a:p>
-            <a:pPr>
-              <a:defRPr sz="2200" b="1">
-                <a:solidFill>
-                  <a:srgbClr val="F9FAFB"/>
-                </a:solidFill>
-              </a:defRPr>
-            </a:pPr>
-            <a:r>
-              <a:t>End-to-End System Architecture</a:t>
-            </a:r>
-          </a:p>
-        </p:txBody>
-      </p:sp>
-      <p:pic>
-        <p:nvPicPr>
-          <p:cNvPr id="5" name="Picture 4" descr="architecture.png"/>
-          <p:cNvPicPr>
-            <a:picLocks noChangeAspect="1"/>
-          </p:cNvPicPr>
-          <p:nvPr/>
-        </p:nvPicPr>
-        <p:blipFill>
-          <a:blip r:embed="rId2"/>
-          <a:stretch>
-            <a:fillRect/>
-          </a:stretch>
-        </p:blipFill>
-        <p:spPr>
-          <a:xfrm>
-            <a:off x="731520" y="1371600"/>
-            <a:ext cx="7772400" cy="5038390"/>
-          </a:xfrm>
-          <a:prstGeom prst="rect">
-            <a:avLst/>
-          </a:prstGeom>
-        </p:spPr>
-      </p:pic>
-      <p:sp>
-        <p:nvSpPr>
-          <p:cNvPr id="6" name="Rounded Rectangle 5"/>
-          <p:cNvSpPr/>
-          <p:nvPr/>
-        </p:nvSpPr>
-        <p:spPr>
-          <a:xfrm>
-            <a:off x="8778240" y="1371600"/>
-            <a:ext cx="2651760" cy="4937760"/>
-          </a:xfrm>
-          <a:prstGeom prst="roundRect">
-            <a:avLst/>
-          </a:prstGeom>
-          <a:solidFill>
-            <a:srgbClr val="111827"/>
-          </a:solidFill>
-          <a:ln w="19050">
-            <a:solidFill>
-              <a:srgbClr val="818CF8"/>
-            </a:solidFill>
+          <a:solidFill>
+            <a:srgbClr val="FF5E00"/>
+          </a:solidFill>
+          <a:ln>
+            <a:noFill/>
           </a:ln>
         </p:spPr>
         <p:style>
@@ -4079,14 +8435,122 @@
       </p:sp>
       <p:sp>
         <p:nvSpPr>
-          <p:cNvPr id="7" name="TextBox 6"/>
+          <p:cNvPr id="4" name="Rounded Rectangle 3"/>
+          <p:cNvSpPr/>
+          <p:nvPr/>
+        </p:nvSpPr>
+        <p:spPr>
+          <a:xfrm>
+            <a:off x="731520" y="502920"/>
+            <a:ext cx="2011680" cy="438912"/>
+          </a:xfrm>
+          <a:prstGeom prst="roundRect">
+            <a:avLst/>
+          </a:prstGeom>
+          <a:solidFill>
+            <a:srgbClr val="FFFFFF"/>
+          </a:solidFill>
+          <a:ln w="19050">
+            <a:solidFill>
+              <a:srgbClr val="FF5E00"/>
+            </a:solidFill>
+          </a:ln>
+        </p:spPr>
+        <p:style>
+          <a:lnRef idx="1">
+            <a:schemeClr val="accent1"/>
+          </a:lnRef>
+          <a:fillRef idx="3">
+            <a:schemeClr val="accent1"/>
+          </a:fillRef>
+          <a:effectRef idx="2">
+            <a:schemeClr val="accent1"/>
+          </a:effectRef>
+          <a:fontRef idx="minor">
+            <a:schemeClr val="lt1"/>
+          </a:fontRef>
+        </p:style>
+        <p:txBody>
+          <a:bodyPr rtlCol="0" anchor="ctr"/>
+          <a:lstStyle/>
+          <a:p>
+            <a:pPr algn="ctr">
+              <a:defRPr sz="1000" b="1">
+                <a:solidFill>
+                  <a:srgbClr val="FF5E00"/>
+                </a:solidFill>
+                <a:latin typeface="Segoe UI"/>
+              </a:defRPr>
+            </a:pPr>
+            <a:r>
+              <a:t>VIT BHOPAL</a:t>
+            </a:r>
+          </a:p>
+        </p:txBody>
+      </p:sp>
+      <p:sp>
+        <p:nvSpPr>
+          <p:cNvPr id="5" name="Oval 4"/>
+          <p:cNvSpPr/>
+          <p:nvPr/>
+        </p:nvSpPr>
+        <p:spPr>
+          <a:xfrm>
+            <a:off x="10972800" y="5760720"/>
+            <a:ext cx="621792" cy="621792"/>
+          </a:xfrm>
+          <a:prstGeom prst="ellipse">
+            <a:avLst/>
+          </a:prstGeom>
+          <a:solidFill>
+            <a:srgbClr val="FFFFFF"/>
+          </a:solidFill>
+          <a:ln>
+            <a:noFill/>
+          </a:ln>
+        </p:spPr>
+        <p:style>
+          <a:lnRef idx="1">
+            <a:schemeClr val="accent1"/>
+          </a:lnRef>
+          <a:fillRef idx="3">
+            <a:schemeClr val="accent1"/>
+          </a:fillRef>
+          <a:effectRef idx="2">
+            <a:schemeClr val="accent1"/>
+          </a:effectRef>
+          <a:fontRef idx="minor">
+            <a:schemeClr val="lt1"/>
+          </a:fontRef>
+        </p:style>
+        <p:txBody>
+          <a:bodyPr rtlCol="0" anchor="ctr"/>
+          <a:lstStyle/>
+          <a:p>
+            <a:pPr algn="ctr">
+              <a:defRPr sz="1800" b="1">
+                <a:solidFill>
+                  <a:srgbClr val="FF5E00"/>
+                </a:solidFill>
+                <a:latin typeface="Segoe UI"/>
+              </a:defRPr>
+            </a:pPr>
+            <a:r>
+              <a:t>&gt;</a:t>
+            </a:r>
+          </a:p>
+        </p:txBody>
+      </p:sp>
+      <p:sp>
+        <p:nvSpPr>
+          <p:cNvPr id="6" name="TextBox 5"/>
           <p:cNvSpPr txBox="1"/>
           <p:nvPr/>
         </p:nvSpPr>
         <p:spPr>
           <a:xfrm>
-            <a:off x="8915400" y="1508760"/>
-            <a:ext cx="2377440" cy="4663440"/>
+            <a:off x="731520" y="1371600"/>
+            <a:ext cx="5303520" cy="4572000"/>
           </a:xfrm>
           <a:prstGeom prst="rect">
             <a:avLst/>
@@ -4100,67 +8564,93 @@
           <a:lstStyle/>
           <a:p>
             <a:pPr>
-              <a:defRPr sz="1100" b="1">
-                <a:solidFill>
-                  <a:srgbClr val="818CF8"/>
-                </a:solidFill>
-              </a:defRPr>
-            </a:pPr>
-            <a:r>
-              <a:t>CORE PIPELINE STAGES</a:t>
+              <a:defRPr sz="2800" b="1">
+                <a:solidFill>
+                  <a:srgbClr val="FF5E00"/>
+                </a:solidFill>
+                <a:latin typeface="Segoe UI"/>
+              </a:defRPr>
+            </a:pPr>
+            <a:r>
+              <a:t>THE FINANCIAL</a:t>
+            </a:r>
+            <a:br/>
+            <a:r>
+              <a:t>RISK PARADIGM</a:t>
             </a:r>
           </a:p>
           <a:p>
             <a:br/>
             <a:pPr>
-              <a:defRPr sz="950">
-                <a:solidFill>
-                  <a:srgbClr val="F9FAFB"/>
-                </a:solidFill>
-              </a:defRPr>
-            </a:pPr>
-            <a:r>
-              <a:t>1. Ingestion Layer:</a:t>
-            </a:r>
-            <a:br/>
-            <a:r>
-              <a:t>Multi-source parser handles News, Social, &amp; Live RSS with regex cleaning &amp; entity extraction.</a:t>
+              <a:defRPr sz="1300">
+                <a:solidFill>
+                  <a:srgbClr val="1E293B"/>
+                </a:solidFill>
+                <a:latin typeface="Segoe UI"/>
+              </a:defRPr>
+            </a:pPr>
+            <a:r>
+              <a:t>Traditional risk modeling relies exclusively on backward-looking historical prices (Historical VaR) and overnight batch processing.</a:t>
             </a:r>
             <a:br/>
             <a:br/>
             <a:r>
-              <a:t>2. NLP Risk Engine:</a:t>
-            </a:r>
+              <a:t>By the time market prices drop, portfolios have already absorbed catastrophic losses, leaving asset managers vulnerable to intraday flash crashes.</a:t>
+            </a:r>
+          </a:p>
+        </p:txBody>
+      </p:sp>
+      <p:sp>
+        <p:nvSpPr>
+          <p:cNvPr id="7" name="TextBox 6"/>
+          <p:cNvSpPr txBox="1"/>
+          <p:nvPr/>
+        </p:nvSpPr>
+        <p:spPr>
+          <a:xfrm>
+            <a:off x="6949440" y="1645920"/>
+            <a:ext cx="4572000" cy="4572000"/>
+          </a:xfrm>
+          <a:prstGeom prst="rect">
+            <a:avLst/>
+          </a:prstGeom>
+          <a:noFill/>
+        </p:spPr>
+        <p:txBody>
+          <a:bodyPr wrap="square">
+            <a:spAutoFit/>
+          </a:bodyPr>
+          <a:lstStyle/>
+          <a:p>
+            <a:pPr>
+              <a:defRPr sz="2800" b="1">
+                <a:solidFill>
+                  <a:srgbClr val="FFFFFF"/>
+                </a:solidFill>
+                <a:latin typeface="Segoe UI"/>
+              </a:defRPr>
+            </a:pPr>
+            <a:r>
+              <a:t>80%+ Unstructured Text</a:t>
+            </a:r>
+          </a:p>
+          <a:p>
             <a:br/>
-            <a:r>
-              <a:t>Computes sentiment, classifies into 8 event types, and derives 1-10 impact score.</a:t>
+            <a:pPr>
+              <a:defRPr sz="1300">
+                <a:solidFill>
+                  <a:srgbClr val="FFFFFF"/>
+                </a:solidFill>
+                <a:latin typeface="Segoe UI"/>
+              </a:defRPr>
+            </a:pPr>
+            <a:r>
+              <a:t>Over 80% of market-moving intelligence is textual—breaking news, earnings calls, central bank statements, and regulatory filings.</a:t>
             </a:r>
             <a:br/>
             <a:br/>
             <a:r>
-              <a:t>3. Persistence &amp; API:</a:t>
-            </a:r>
-            <a:br/>
-            <a:r>
-              <a:t>FastAPI + SQLite store structured signals with sub-15ms query speed.</a:t>
-            </a:r>
-            <a:br/>
-            <a:br/>
-            <a:r>
-              <a:t>4. Module B Stress Test:</a:t>
-            </a:r>
-            <a:br/>
-            <a:r>
-              <a:t>Impact &gt;= 7 triggers multi-asset macro haircuts.</a:t>
-            </a:r>
-            <a:br/>
-            <a:br/>
-            <a:r>
-              <a:t>5. Institutional UI:</a:t>
-            </a:r>
-            <a:br/>
-            <a:r>
-              <a:t>React 18 dashboard displays telemetry, signals, &amp; drawdowns.</a:t>
+              <a:t>Modern quantitative desks require proactive natural language parsing to bridge qualitative headlines directly into balance-sheet stress tests.</a:t>
             </a:r>
           </a:p>
         </p:txBody>
@@ -4198,7 +8688,7 @@
             <a:avLst/>
           </a:prstGeom>
           <a:solidFill>
-            <a:srgbClr val="0B0F19"/>
+            <a:srgbClr val="FF5E00"/>
           </a:solidFill>
           <a:ln>
             <a:noFill/>
@@ -4228,95 +8718,23 @@
       </p:sp>
       <p:sp>
         <p:nvSpPr>
-          <p:cNvPr id="3" name="TextBox 2"/>
-          <p:cNvSpPr txBox="1"/>
-          <p:nvPr/>
-        </p:nvSpPr>
-        <p:spPr>
-          <a:xfrm>
-            <a:off x="731520" y="365760"/>
-            <a:ext cx="10698480" cy="365760"/>
-          </a:xfrm>
-          <a:prstGeom prst="rect">
-            <a:avLst/>
-          </a:prstGeom>
-          <a:noFill/>
-        </p:spPr>
-        <p:txBody>
-          <a:bodyPr wrap="square">
-            <a:spAutoFit/>
-          </a:bodyPr>
-          <a:lstStyle/>
-          <a:p>
-            <a:pPr>
-              <a:defRPr sz="1000" b="1">
-                <a:solidFill>
-                  <a:srgbClr val="38BDF8"/>
-                </a:solidFill>
-              </a:defRPr>
-            </a:pPr>
-            <a:r>
-              <a:t>PRODUCTION-GRADE SYSTEM SPECIFICATIONS</a:t>
-            </a:r>
-          </a:p>
-        </p:txBody>
-      </p:sp>
-      <p:sp>
-        <p:nvSpPr>
-          <p:cNvPr id="4" name="TextBox 3"/>
-          <p:cNvSpPr txBox="1"/>
-          <p:nvPr/>
-        </p:nvSpPr>
-        <p:spPr>
-          <a:xfrm>
-            <a:off x="731520" y="640080"/>
-            <a:ext cx="10698480" cy="640080"/>
-          </a:xfrm>
-          <a:prstGeom prst="rect">
-            <a:avLst/>
-          </a:prstGeom>
-          <a:noFill/>
-        </p:spPr>
-        <p:txBody>
-          <a:bodyPr wrap="square">
-            <a:spAutoFit/>
-          </a:bodyPr>
-          <a:lstStyle/>
-          <a:p>
-            <a:pPr>
-              <a:defRPr sz="2200" b="1">
-                <a:solidFill>
-                  <a:srgbClr val="F9FAFB"/>
-                </a:solidFill>
-              </a:defRPr>
-            </a:pPr>
-            <a:r>
-              <a:t>Technical Implementation &amp; Stack</a:t>
-            </a:r>
-          </a:p>
-        </p:txBody>
-      </p:sp>
-      <p:sp>
-        <p:nvSpPr>
-          <p:cNvPr id="5" name="Rounded Rectangle 4"/>
+          <p:cNvPr id="3" name="Oval 2"/>
           <p:cNvSpPr/>
           <p:nvPr/>
         </p:nvSpPr>
         <p:spPr>
           <a:xfrm>
-            <a:off x="731520" y="1463040"/>
-            <a:ext cx="5120640" cy="2286000"/>
-          </a:xfrm>
-          <a:prstGeom prst="roundRect">
-            <a:avLst/>
-          </a:prstGeom>
-          <a:solidFill>
-            <a:srgbClr val="111827"/>
-          </a:solidFill>
-          <a:ln w="19050">
-            <a:solidFill>
-              <a:srgbClr val="38BDF8"/>
-            </a:solidFill>
+            <a:off x="7772400" y="-1371600"/>
+            <a:ext cx="6858000" cy="6858000"/>
+          </a:xfrm>
+          <a:prstGeom prst="ellipse">
+            <a:avLst/>
+          </a:prstGeom>
+          <a:solidFill>
+            <a:srgbClr val="FF7814"/>
+          </a:solidFill>
+          <a:ln>
+            <a:noFill/>
           </a:ln>
         </p:spPr>
         <p:style>
@@ -4343,83 +8761,24 @@
       </p:sp>
       <p:sp>
         <p:nvSpPr>
-          <p:cNvPr id="6" name="TextBox 5"/>
-          <p:cNvSpPr txBox="1"/>
-          <p:nvPr/>
-        </p:nvSpPr>
-        <p:spPr>
-          <a:xfrm>
-            <a:off x="914400" y="1600200"/>
-            <a:ext cx="4754880" cy="2011680"/>
-          </a:xfrm>
-          <a:prstGeom prst="rect">
-            <a:avLst/>
-          </a:prstGeom>
-          <a:noFill/>
-        </p:spPr>
-        <p:txBody>
-          <a:bodyPr wrap="square">
-            <a:spAutoFit/>
-          </a:bodyPr>
-          <a:lstStyle/>
-          <a:p>
-            <a:pPr>
-              <a:defRPr sz="1100" b="1">
-                <a:solidFill>
-                  <a:srgbClr val="38BDF8"/>
-                </a:solidFill>
-              </a:defRPr>
-            </a:pPr>
-            <a:r>
-              <a:t>BACKEND &amp; STORAGE LAYER</a:t>
-            </a:r>
-          </a:p>
-          <a:p>
-            <a:pPr>
-              <a:defRPr sz="1000">
-                <a:solidFill>
-                  <a:srgbClr val="F9FAFB"/>
-                </a:solidFill>
-              </a:defRPr>
-            </a:pPr>
-            <a:r>
-              <a:t>• Framework: FastAPI (Python 3.10+) with Uvicorn async ASGI server</a:t>
-            </a:r>
-            <a:br/>
-            <a:r>
-              <a:t>• Storage: SQLite with dynamic path resolution (/tmp for serverless Vercel)</a:t>
-            </a:r>
-            <a:br/>
-            <a:r>
-              <a:t>• Schemas: Pydantic v2 validation for type-safe requests and responses</a:t>
-            </a:r>
-            <a:br/>
-            <a:r>
-              <a:t>• Architecture: RESTful endpoints (/analyze, /signals, /portfolio, /stress-test)</a:t>
-            </a:r>
-          </a:p>
-        </p:txBody>
-      </p:sp>
-      <p:sp>
-        <p:nvSpPr>
-          <p:cNvPr id="7" name="Rounded Rectangle 6"/>
+          <p:cNvPr id="4" name="Rounded Rectangle 3"/>
           <p:cNvSpPr/>
           <p:nvPr/>
         </p:nvSpPr>
         <p:spPr>
           <a:xfrm>
-            <a:off x="6309360" y="1463040"/>
-            <a:ext cx="5120640" cy="2286000"/>
+            <a:off x="731520" y="502920"/>
+            <a:ext cx="2011680" cy="438912"/>
           </a:xfrm>
           <a:prstGeom prst="roundRect">
             <a:avLst/>
           </a:prstGeom>
           <a:solidFill>
-            <a:srgbClr val="111827"/>
+            <a:srgbClr val="E65100"/>
           </a:solidFill>
           <a:ln w="19050">
             <a:solidFill>
-              <a:srgbClr val="818CF8"/>
+              <a:srgbClr val="FFFFFF"/>
             </a:solidFill>
           </a:ln>
         </p:spPr>
@@ -4441,90 +8800,39 @@
           <a:bodyPr rtlCol="0" anchor="ctr"/>
           <a:lstStyle/>
           <a:p>
-            <a:pPr algn="ctr"/>
-          </a:p>
-        </p:txBody>
-      </p:sp>
-      <p:sp>
-        <p:nvSpPr>
-          <p:cNvPr id="8" name="TextBox 7"/>
-          <p:cNvSpPr txBox="1"/>
-          <p:nvPr/>
-        </p:nvSpPr>
-        <p:spPr>
-          <a:xfrm>
-            <a:off x="6492240" y="1600200"/>
-            <a:ext cx="4754880" cy="2011680"/>
-          </a:xfrm>
-          <a:prstGeom prst="rect">
-            <a:avLst/>
-          </a:prstGeom>
-          <a:noFill/>
-        </p:spPr>
-        <p:txBody>
-          <a:bodyPr wrap="square">
-            <a:spAutoFit/>
-          </a:bodyPr>
-          <a:lstStyle/>
-          <a:p>
-            <a:pPr>
-              <a:defRPr sz="1100" b="1">
-                <a:solidFill>
-                  <a:srgbClr val="818CF8"/>
-                </a:solidFill>
-              </a:defRPr>
-            </a:pPr>
-            <a:r>
-              <a:t>INTERPRETABLE NLP RISK ENGINE</a:t>
-            </a:r>
-          </a:p>
-          <a:p>
-            <a:pPr>
-              <a:defRPr sz="1000">
-                <a:solidFill>
-                  <a:srgbClr val="F9FAFB"/>
-                </a:solidFill>
-              </a:defRPr>
-            </a:pPr>
-            <a:r>
-              <a:t>• Sentiment: Domain-specific financial dictionary [-1.00 to +1.00]</a:t>
-            </a:r>
-            <a:br/>
-            <a:r>
-              <a:t>• Event Classifier: 8 classes (Regulatory, Geopolitical, Earnings, Cyber...)</a:t>
-            </a:r>
-            <a:br/>
-            <a:r>
-              <a:t>• Impact Formula: Impact = min(10, round(|Sentiment| * 5 + EventWeight * 3 + Conf * 2))</a:t>
-            </a:r>
-            <a:br/>
-            <a:r>
-              <a:t>• Determinism: 100% reproducible scoring without stochastic inference</a:t>
-            </a:r>
-          </a:p>
-        </p:txBody>
-      </p:sp>
-      <p:sp>
-        <p:nvSpPr>
-          <p:cNvPr id="9" name="Rounded Rectangle 8"/>
+            <a:pPr algn="ctr">
+              <a:defRPr sz="1000" b="1">
+                <a:solidFill>
+                  <a:srgbClr val="FFFFFF"/>
+                </a:solidFill>
+                <a:latin typeface="Segoe UI"/>
+              </a:defRPr>
+            </a:pPr>
+            <a:r>
+              <a:t>RISKPULSE</a:t>
+            </a:r>
+          </a:p>
+        </p:txBody>
+      </p:sp>
+      <p:sp>
+        <p:nvSpPr>
+          <p:cNvPr id="5" name="Oval 4"/>
           <p:cNvSpPr/>
           <p:nvPr/>
         </p:nvSpPr>
         <p:spPr>
           <a:xfrm>
-            <a:off x="731520" y="4023360"/>
-            <a:ext cx="5120640" cy="2286000"/>
-          </a:xfrm>
-          <a:prstGeom prst="roundRect">
-            <a:avLst/>
-          </a:prstGeom>
-          <a:solidFill>
-            <a:srgbClr val="111827"/>
-          </a:solidFill>
-          <a:ln w="19050">
-            <a:solidFill>
-              <a:srgbClr val="FBBF24"/>
-            </a:solidFill>
+            <a:off x="10972800" y="5760720"/>
+            <a:ext cx="621792" cy="621792"/>
+          </a:xfrm>
+          <a:prstGeom prst="ellipse">
+            <a:avLst/>
+          </a:prstGeom>
+          <a:solidFill>
+            <a:srgbClr val="FFFFFF"/>
+          </a:solidFill>
+          <a:ln>
+            <a:noFill/>
           </a:ln>
         </p:spPr>
         <p:style>
@@ -4545,20 +8853,30 @@
           <a:bodyPr rtlCol="0" anchor="ctr"/>
           <a:lstStyle/>
           <a:p>
-            <a:pPr algn="ctr"/>
-          </a:p>
-        </p:txBody>
-      </p:sp>
-      <p:sp>
-        <p:nvSpPr>
-          <p:cNvPr id="10" name="TextBox 9"/>
+            <a:pPr algn="ctr">
+              <a:defRPr sz="1800" b="1">
+                <a:solidFill>
+                  <a:srgbClr val="FF5E00"/>
+                </a:solidFill>
+                <a:latin typeface="Segoe UI"/>
+              </a:defRPr>
+            </a:pPr>
+            <a:r>
+              <a:t>&gt;</a:t>
+            </a:r>
+          </a:p>
+        </p:txBody>
+      </p:sp>
+      <p:sp>
+        <p:nvSpPr>
+          <p:cNvPr id="6" name="TextBox 5"/>
           <p:cNvSpPr txBox="1"/>
           <p:nvPr/>
         </p:nvSpPr>
         <p:spPr>
           <a:xfrm>
-            <a:off x="914400" y="4160520"/>
-            <a:ext cx="4754880" cy="2011680"/>
+            <a:off x="731520" y="1371600"/>
+            <a:ext cx="10515600" cy="1371600"/>
           </a:xfrm>
           <a:prstGeom prst="rect">
             <a:avLst/>
@@ -4572,97 +8890,42 @@
           <a:lstStyle/>
           <a:p>
             <a:pPr>
-              <a:defRPr sz="1100" b="1">
-                <a:solidFill>
-                  <a:srgbClr val="FBBF24"/>
-                </a:solidFill>
-              </a:defRPr>
-            </a:pPr>
-            <a:r>
-              <a:t>MODULE B: PORTFOLIO STRESS TESTING</a:t>
+              <a:defRPr sz="3600" b="1">
+                <a:solidFill>
+                  <a:srgbClr val="FFFFFF"/>
+                </a:solidFill>
+                <a:latin typeface="Segoe UI"/>
+              </a:defRPr>
+            </a:pPr>
+            <a:r>
+              <a:t>CORE CHALLENGES IN FINANCIAL RISK</a:t>
             </a:r>
           </a:p>
           <a:p>
             <a:pPr>
-              <a:defRPr sz="1000">
-                <a:solidFill>
-                  <a:srgbClr val="F9FAFB"/>
-                </a:solidFill>
-              </a:defRPr>
-            </a:pPr>
-            <a:r>
-              <a:t>• Baseline Portfolio: $1,000,000 multi-asset allocation (Equities, Tech, Bonds)</a:t>
-            </a:r>
-            <a:br/>
-            <a:r>
-              <a:t>• Trigger Gate: Impact Score &gt;= 7 automatically triggers stress scenario</a:t>
-            </a:r>
-            <a:br/>
-            <a:r>
-              <a:t>• Haircut Matrix: Asset-specific shocks (e.g., Tech -15%, Equities -8%, Crypto -25%)</a:t>
-            </a:r>
-            <a:br/>
-            <a:r>
-              <a:t>• Outputs: Pre-stress, Post-stress valuation, Absolute loss ($), and Drawdown (%)</a:t>
-            </a:r>
-          </a:p>
-        </p:txBody>
-      </p:sp>
-      <p:sp>
-        <p:nvSpPr>
-          <p:cNvPr id="11" name="Rounded Rectangle 10"/>
-          <p:cNvSpPr/>
-          <p:nvPr/>
-        </p:nvSpPr>
-        <p:spPr>
-          <a:xfrm>
-            <a:off x="6309360" y="4023360"/>
-            <a:ext cx="5120640" cy="2286000"/>
-          </a:xfrm>
-          <a:prstGeom prst="roundRect">
-            <a:avLst/>
-          </a:prstGeom>
-          <a:solidFill>
-            <a:srgbClr val="111827"/>
-          </a:solidFill>
-          <a:ln w="19050">
-            <a:solidFill>
-              <a:srgbClr val="34D399"/>
-            </a:solidFill>
-          </a:ln>
-        </p:spPr>
-        <p:style>
-          <a:lnRef idx="1">
-            <a:schemeClr val="accent1"/>
-          </a:lnRef>
-          <a:fillRef idx="3">
-            <a:schemeClr val="accent1"/>
-          </a:fillRef>
-          <a:effectRef idx="2">
-            <a:schemeClr val="accent1"/>
-          </a:effectRef>
-          <a:fontRef idx="minor">
-            <a:schemeClr val="lt1"/>
-          </a:fontRef>
-        </p:style>
-        <p:txBody>
-          <a:bodyPr rtlCol="0" anchor="ctr"/>
-          <a:lstStyle/>
-          <a:p>
-            <a:pPr algn="ctr"/>
-          </a:p>
-        </p:txBody>
-      </p:sp>
-      <p:sp>
-        <p:nvSpPr>
-          <p:cNvPr id="12" name="TextBox 11"/>
+              <a:defRPr sz="1600">
+                <a:solidFill>
+                  <a:srgbClr val="FFEDD5"/>
+                </a:solidFill>
+                <a:latin typeface="Segoe UI"/>
+              </a:defRPr>
+            </a:pPr>
+            <a:r>
+              <a:t>Why Existing Risk Management Frameworks Fail Under Macro Volatility</a:t>
+            </a:r>
+          </a:p>
+        </p:txBody>
+      </p:sp>
+      <p:sp>
+        <p:nvSpPr>
+          <p:cNvPr id="7" name="TextBox 6"/>
           <p:cNvSpPr txBox="1"/>
           <p:nvPr/>
         </p:nvSpPr>
         <p:spPr>
           <a:xfrm>
-            <a:off x="6492240" y="4160520"/>
-            <a:ext cx="4754880" cy="2011680"/>
+            <a:off x="731520" y="2743200"/>
+            <a:ext cx="5029200" cy="3200400"/>
           </a:xfrm>
           <a:prstGeom prst="rect">
             <a:avLst/>
@@ -4676,38 +8939,77 @@
           <a:lstStyle/>
           <a:p>
             <a:pPr>
-              <a:defRPr sz="1100" b="1">
-                <a:solidFill>
-                  <a:srgbClr val="34D399"/>
-                </a:solidFill>
-              </a:defRPr>
-            </a:pPr>
-            <a:r>
-              <a:t>FRONTEND DASHBOARD &amp; QUALITY ASSURANCE</a:t>
-            </a:r>
-          </a:p>
+              <a:defRPr sz="1300">
+                <a:solidFill>
+                  <a:srgbClr val="FFFFFF"/>
+                </a:solidFill>
+                <a:latin typeface="Segoe UI"/>
+              </a:defRPr>
+            </a:pPr>
+            <a:r>
+              <a:t>The Latency-Vulnerability Gap:</a:t>
+            </a:r>
+            <a:br/>
+            <a:r>
+              <a:t>Macroeconomic developments take hours or days to be priced into legacy risk models, exposing capital to severe drawdowns.</a:t>
+            </a:r>
+            <a:br/>
+            <a:br/>
+            <a:r>
+              <a:t>Financial Lexicon Misclassification:</a:t>
+            </a:r>
+            <a:br/>
+            <a:r>
+              <a:t>Generic NLP models misread domain jargon (e.g., 'liability shrink' or 'hawkish pause'), producing dangerous false positives.</a:t>
+            </a:r>
+          </a:p>
+        </p:txBody>
+      </p:sp>
+      <p:sp>
+        <p:nvSpPr>
+          <p:cNvPr id="8" name="TextBox 7"/>
+          <p:cNvSpPr txBox="1"/>
+          <p:nvPr/>
+        </p:nvSpPr>
+        <p:spPr>
+          <a:xfrm>
+            <a:off x="6217920" y="2743200"/>
+            <a:ext cx="5029200" cy="3200400"/>
+          </a:xfrm>
+          <a:prstGeom prst="rect">
+            <a:avLst/>
+          </a:prstGeom>
+          <a:noFill/>
+        </p:spPr>
+        <p:txBody>
+          <a:bodyPr wrap="square">
+            <a:spAutoFit/>
+          </a:bodyPr>
+          <a:lstStyle/>
           <a:p>
             <a:pPr>
-              <a:defRPr sz="1000">
-                <a:solidFill>
-                  <a:srgbClr val="F9FAFB"/>
-                </a:solidFill>
-              </a:defRPr>
-            </a:pPr>
-            <a:r>
-              <a:t>• UI Framework: React 18, Vite build tool, Tailwind CSS, Lucide icons</a:t>
+              <a:defRPr sz="1300">
+                <a:solidFill>
+                  <a:srgbClr val="FFFFFF"/>
+                </a:solidFill>
+                <a:latin typeface="Segoe UI"/>
+              </a:defRPr>
+            </a:pPr>
+            <a:r>
+              <a:t>Siloed Stress-Testing Engines:</a:t>
             </a:r>
             <a:br/>
             <a:r>
-              <a:t>• Offline Resilience: Local benchmark state fallback ensures zero cold-start failure</a:t>
+              <a:t>Portfolio stress testing exists as static spreadsheet exercises isolated from streaming market news signals.</a:t>
             </a:r>
             <a:br/>
-            <a:r>
-              <a:t>• Ingestion Control: Live RSS button triggers external feeds with graceful fallback</a:t>
-            </a:r>
             <a:br/>
             <a:r>
-              <a:t>• Test Verification: 30/30 automated pytest suite passed across all submodules</a:t>
+              <a:t>Multi-Sector Contagion Blindspots:</a:t>
+            </a:r>
+            <a:br/>
+            <a:r>
+              <a:t>Single-stock market shocks trigger unmonitored ripple effects across correlated suppliers and competitors.</a:t>
             </a:r>
           </a:p>
         </p:txBody>
@@ -4745,7 +9047,7 @@
             <a:avLst/>
           </a:prstGeom>
           <a:solidFill>
-            <a:srgbClr val="0B0F19"/>
+            <a:srgbClr val="FFFFFF"/>
           </a:solidFill>
           <a:ln>
             <a:noFill/>
@@ -4775,95 +9077,23 @@
       </p:sp>
       <p:sp>
         <p:nvSpPr>
-          <p:cNvPr id="3" name="TextBox 2"/>
-          <p:cNvSpPr txBox="1"/>
-          <p:nvPr/>
-        </p:nvSpPr>
-        <p:spPr>
-          <a:xfrm>
-            <a:off x="731520" y="365760"/>
-            <a:ext cx="10698480" cy="365760"/>
+          <p:cNvPr id="3" name="Rectangle 2"/>
+          <p:cNvSpPr/>
+          <p:nvPr/>
+        </p:nvSpPr>
+        <p:spPr>
+          <a:xfrm>
+            <a:off x="0" y="0"/>
+            <a:ext cx="12191695" cy="137160"/>
           </a:xfrm>
           <a:prstGeom prst="rect">
             <a:avLst/>
           </a:prstGeom>
-          <a:noFill/>
-        </p:spPr>
-        <p:txBody>
-          <a:bodyPr wrap="square">
-            <a:spAutoFit/>
-          </a:bodyPr>
-          <a:lstStyle/>
-          <a:p>
-            <a:pPr>
-              <a:defRPr sz="1000" b="1">
-                <a:solidFill>
-                  <a:srgbClr val="38BDF8"/>
-                </a:solidFill>
-              </a:defRPr>
-            </a:pPr>
-            <a:r>
-              <a:t>QUANTITATIVE PERFORMANCE METRICS</a:t>
-            </a:r>
-          </a:p>
-        </p:txBody>
-      </p:sp>
-      <p:sp>
-        <p:nvSpPr>
-          <p:cNvPr id="4" name="TextBox 3"/>
-          <p:cNvSpPr txBox="1"/>
-          <p:nvPr/>
-        </p:nvSpPr>
-        <p:spPr>
-          <a:xfrm>
-            <a:off x="731520" y="640080"/>
-            <a:ext cx="10698480" cy="640080"/>
-          </a:xfrm>
-          <a:prstGeom prst="rect">
-            <a:avLst/>
-          </a:prstGeom>
-          <a:noFill/>
-        </p:spPr>
-        <p:txBody>
-          <a:bodyPr wrap="square">
-            <a:spAutoFit/>
-          </a:bodyPr>
-          <a:lstStyle/>
-          <a:p>
-            <a:pPr>
-              <a:defRPr sz="2200" b="1">
-                <a:solidFill>
-                  <a:srgbClr val="F9FAFB"/>
-                </a:solidFill>
-              </a:defRPr>
-            </a:pPr>
-            <a:r>
-              <a:t>Key Measured Results &amp; Empirical Validation</a:t>
-            </a:r>
-          </a:p>
-        </p:txBody>
-      </p:sp>
-      <p:sp>
-        <p:nvSpPr>
-          <p:cNvPr id="5" name="Rounded Rectangle 4"/>
-          <p:cNvSpPr/>
-          <p:nvPr/>
-        </p:nvSpPr>
-        <p:spPr>
-          <a:xfrm>
-            <a:off x="731520" y="1371600"/>
-            <a:ext cx="2560320" cy="1188720"/>
-          </a:xfrm>
-          <a:prstGeom prst="roundRect">
-            <a:avLst/>
-          </a:prstGeom>
-          <a:solidFill>
-            <a:srgbClr val="111827"/>
-          </a:solidFill>
-          <a:ln w="19050">
-            <a:solidFill>
-              <a:srgbClr val="34D399"/>
-            </a:solidFill>
+          <a:solidFill>
+            <a:srgbClr val="FF5E00"/>
+          </a:solidFill>
+          <a:ln>
+            <a:noFill/>
           </a:ln>
         </p:spPr>
         <p:style>
@@ -4890,71 +9120,24 @@
       </p:sp>
       <p:sp>
         <p:nvSpPr>
-          <p:cNvPr id="6" name="TextBox 5"/>
-          <p:cNvSpPr txBox="1"/>
-          <p:nvPr/>
-        </p:nvSpPr>
-        <p:spPr>
-          <a:xfrm>
-            <a:off x="822960" y="1417320"/>
-            <a:ext cx="2377440" cy="1097280"/>
-          </a:xfrm>
-          <a:prstGeom prst="rect">
-            <a:avLst/>
-          </a:prstGeom>
-          <a:noFill/>
-        </p:spPr>
-        <p:txBody>
-          <a:bodyPr wrap="none">
-            <a:spAutoFit/>
-          </a:bodyPr>
-          <a:lstStyle/>
-          <a:p>
-            <a:pPr algn="ctr">
-              <a:defRPr sz="2000" b="1">
-                <a:solidFill>
-                  <a:srgbClr val="34D399"/>
-                </a:solidFill>
-              </a:defRPr>
-            </a:pPr>
-            <a:r>
-              <a:t>30 / 30</a:t>
-            </a:r>
-          </a:p>
-          <a:p>
-            <a:pPr algn="ctr">
-              <a:defRPr sz="900">
-                <a:solidFill>
-                  <a:srgbClr val="9CA3AF"/>
-                </a:solidFill>
-              </a:defRPr>
-            </a:pPr>
-            <a:r>
-              <a:t>Automated Tests Passed</a:t>
-            </a:r>
-          </a:p>
-        </p:txBody>
-      </p:sp>
-      <p:sp>
-        <p:nvSpPr>
-          <p:cNvPr id="7" name="Rounded Rectangle 6"/>
+          <p:cNvPr id="4" name="Rounded Rectangle 3"/>
           <p:cNvSpPr/>
           <p:nvPr/>
         </p:nvSpPr>
         <p:spPr>
           <a:xfrm>
-            <a:off x="3447288" y="1371600"/>
-            <a:ext cx="2560320" cy="1188720"/>
+            <a:off x="9418320" y="502920"/>
+            <a:ext cx="2011680" cy="438912"/>
           </a:xfrm>
           <a:prstGeom prst="roundRect">
             <a:avLst/>
           </a:prstGeom>
           <a:solidFill>
-            <a:srgbClr val="111827"/>
+            <a:srgbClr val="FFFFFF"/>
           </a:solidFill>
           <a:ln w="19050">
             <a:solidFill>
-              <a:srgbClr val="38BDF8"/>
+              <a:srgbClr val="FF5E00"/>
             </a:solidFill>
           </a:ln>
         </p:spPr>
@@ -4976,78 +9159,39 @@
           <a:bodyPr rtlCol="0" anchor="ctr"/>
           <a:lstStyle/>
           <a:p>
-            <a:pPr algn="ctr"/>
-          </a:p>
-        </p:txBody>
-      </p:sp>
-      <p:sp>
-        <p:nvSpPr>
-          <p:cNvPr id="8" name="TextBox 7"/>
-          <p:cNvSpPr txBox="1"/>
-          <p:nvPr/>
-        </p:nvSpPr>
-        <p:spPr>
-          <a:xfrm>
-            <a:off x="3538728" y="1417320"/>
-            <a:ext cx="2377440" cy="1097280"/>
-          </a:xfrm>
-          <a:prstGeom prst="rect">
-            <a:avLst/>
-          </a:prstGeom>
-          <a:noFill/>
-        </p:spPr>
-        <p:txBody>
-          <a:bodyPr wrap="none">
-            <a:spAutoFit/>
-          </a:bodyPr>
-          <a:lstStyle/>
-          <a:p>
             <a:pPr algn="ctr">
-              <a:defRPr sz="2000" b="1">
-                <a:solidFill>
-                  <a:srgbClr val="38BDF8"/>
-                </a:solidFill>
-              </a:defRPr>
-            </a:pPr>
-            <a:r>
-              <a:t>&lt; 15 ms</a:t>
-            </a:r>
-          </a:p>
-          <a:p>
-            <a:pPr algn="ctr">
-              <a:defRPr sz="900">
-                <a:solidFill>
-                  <a:srgbClr val="9CA3AF"/>
-                </a:solidFill>
-              </a:defRPr>
-            </a:pPr>
-            <a:r>
-              <a:t>Avg NLP Inference Latency</a:t>
-            </a:r>
-          </a:p>
-        </p:txBody>
-      </p:sp>
-      <p:sp>
-        <p:nvSpPr>
-          <p:cNvPr id="9" name="Rounded Rectangle 8"/>
+              <a:defRPr sz="1000" b="1">
+                <a:solidFill>
+                  <a:srgbClr val="FF5E00"/>
+                </a:solidFill>
+                <a:latin typeface="Segoe UI"/>
+              </a:defRPr>
+            </a:pPr>
+            <a:r>
+              <a:t>VIT BHOPAL</a:t>
+            </a:r>
+          </a:p>
+        </p:txBody>
+      </p:sp>
+      <p:sp>
+        <p:nvSpPr>
+          <p:cNvPr id="5" name="Oval 4"/>
           <p:cNvSpPr/>
           <p:nvPr/>
         </p:nvSpPr>
         <p:spPr>
           <a:xfrm>
-            <a:off x="6163056" y="1371600"/>
-            <a:ext cx="2560320" cy="1188720"/>
-          </a:xfrm>
-          <a:prstGeom prst="roundRect">
-            <a:avLst/>
-          </a:prstGeom>
-          <a:solidFill>
-            <a:srgbClr val="111827"/>
-          </a:solidFill>
-          <a:ln w="19050">
-            <a:solidFill>
-              <a:srgbClr val="F87171"/>
-            </a:solidFill>
+            <a:off x="10972800" y="5760720"/>
+            <a:ext cx="621792" cy="621792"/>
+          </a:xfrm>
+          <a:prstGeom prst="ellipse">
+            <a:avLst/>
+          </a:prstGeom>
+          <a:solidFill>
+            <a:srgbClr val="FF5E00"/>
+          </a:solidFill>
+          <a:ln>
+            <a:noFill/>
           </a:ln>
         </p:spPr>
         <p:style>
@@ -5068,204 +9212,30 @@
           <a:bodyPr rtlCol="0" anchor="ctr"/>
           <a:lstStyle/>
           <a:p>
-            <a:pPr algn="ctr"/>
-          </a:p>
-        </p:txBody>
-      </p:sp>
-      <p:sp>
-        <p:nvSpPr>
-          <p:cNvPr id="10" name="TextBox 9"/>
+            <a:pPr algn="ctr">
+              <a:defRPr sz="1800" b="1">
+                <a:solidFill>
+                  <a:srgbClr val="FFFFFF"/>
+                </a:solidFill>
+                <a:latin typeface="Segoe UI"/>
+              </a:defRPr>
+            </a:pPr>
+            <a:r>
+              <a:t>&gt;</a:t>
+            </a:r>
+          </a:p>
+        </p:txBody>
+      </p:sp>
+      <p:sp>
+        <p:nvSpPr>
+          <p:cNvPr id="6" name="TextBox 5"/>
           <p:cNvSpPr txBox="1"/>
           <p:nvPr/>
         </p:nvSpPr>
         <p:spPr>
           <a:xfrm>
-            <a:off x="6254496" y="1417320"/>
-            <a:ext cx="2377440" cy="1097280"/>
-          </a:xfrm>
-          <a:prstGeom prst="rect">
-            <a:avLst/>
-          </a:prstGeom>
-          <a:noFill/>
-        </p:spPr>
-        <p:txBody>
-          <a:bodyPr wrap="none">
-            <a:spAutoFit/>
-          </a:bodyPr>
-          <a:lstStyle/>
-          <a:p>
-            <a:pPr algn="ctr">
-              <a:defRPr sz="2000" b="1">
-                <a:solidFill>
-                  <a:srgbClr val="F87171"/>
-                </a:solidFill>
-              </a:defRPr>
-            </a:pPr>
-            <a:r>
-              <a:t>-16.4 %</a:t>
-            </a:r>
-          </a:p>
-          <a:p>
-            <a:pPr algn="ctr">
-              <a:defRPr sz="900">
-                <a:solidFill>
-                  <a:srgbClr val="9CA3AF"/>
-                </a:solidFill>
-              </a:defRPr>
-            </a:pPr>
-            <a:r>
-              <a:t>Max Stress Drawdown ($164k)</a:t>
-            </a:r>
-          </a:p>
-        </p:txBody>
-      </p:sp>
-      <p:sp>
-        <p:nvSpPr>
-          <p:cNvPr id="11" name="Rounded Rectangle 10"/>
-          <p:cNvSpPr/>
-          <p:nvPr/>
-        </p:nvSpPr>
-        <p:spPr>
-          <a:xfrm>
-            <a:off x="8878824" y="1371600"/>
-            <a:ext cx="2560320" cy="1188720"/>
-          </a:xfrm>
-          <a:prstGeom prst="roundRect">
-            <a:avLst/>
-          </a:prstGeom>
-          <a:solidFill>
-            <a:srgbClr val="111827"/>
-          </a:solidFill>
-          <a:ln w="19050">
-            <a:solidFill>
-              <a:srgbClr val="FBBF24"/>
-            </a:solidFill>
-          </a:ln>
-        </p:spPr>
-        <p:style>
-          <a:lnRef idx="1">
-            <a:schemeClr val="accent1"/>
-          </a:lnRef>
-          <a:fillRef idx="3">
-            <a:schemeClr val="accent1"/>
-          </a:fillRef>
-          <a:effectRef idx="2">
-            <a:schemeClr val="accent1"/>
-          </a:effectRef>
-          <a:fontRef idx="minor">
-            <a:schemeClr val="lt1"/>
-          </a:fontRef>
-        </p:style>
-        <p:txBody>
-          <a:bodyPr rtlCol="0" anchor="ctr"/>
-          <a:lstStyle/>
-          <a:p>
-            <a:pPr algn="ctr"/>
-          </a:p>
-        </p:txBody>
-      </p:sp>
-      <p:sp>
-        <p:nvSpPr>
-          <p:cNvPr id="12" name="TextBox 11"/>
-          <p:cNvSpPr txBox="1"/>
-          <p:nvPr/>
-        </p:nvSpPr>
-        <p:spPr>
-          <a:xfrm>
-            <a:off x="8970264" y="1417320"/>
-            <a:ext cx="2377440" cy="1097280"/>
-          </a:xfrm>
-          <a:prstGeom prst="rect">
-            <a:avLst/>
-          </a:prstGeom>
-          <a:noFill/>
-        </p:spPr>
-        <p:txBody>
-          <a:bodyPr wrap="none">
-            <a:spAutoFit/>
-          </a:bodyPr>
-          <a:lstStyle/>
-          <a:p>
-            <a:pPr algn="ctr">
-              <a:defRPr sz="2000" b="1">
-                <a:solidFill>
-                  <a:srgbClr val="FBBF24"/>
-                </a:solidFill>
-              </a:defRPr>
-            </a:pPr>
-            <a:r>
-              <a:t>100 %</a:t>
-            </a:r>
-          </a:p>
-          <a:p>
-            <a:pPr algn="ctr">
-              <a:defRPr sz="900">
-                <a:solidFill>
-                  <a:srgbClr val="9CA3AF"/>
-                </a:solidFill>
-              </a:defRPr>
-            </a:pPr>
-            <a:r>
-              <a:t>Explainable Auditability</a:t>
-            </a:r>
-          </a:p>
-        </p:txBody>
-      </p:sp>
-      <p:sp>
-        <p:nvSpPr>
-          <p:cNvPr id="13" name="Rounded Rectangle 12"/>
-          <p:cNvSpPr/>
-          <p:nvPr/>
-        </p:nvSpPr>
-        <p:spPr>
-          <a:xfrm>
-            <a:off x="731520" y="2834640"/>
-            <a:ext cx="10698480" cy="3474720"/>
-          </a:xfrm>
-          <a:prstGeom prst="roundRect">
-            <a:avLst/>
-          </a:prstGeom>
-          <a:solidFill>
-            <a:srgbClr val="111827"/>
-          </a:solidFill>
-          <a:ln w="19050">
-            <a:solidFill>
-              <a:srgbClr val="38BDF8"/>
-            </a:solidFill>
-          </a:ln>
-        </p:spPr>
-        <p:style>
-          <a:lnRef idx="1">
-            <a:schemeClr val="accent1"/>
-          </a:lnRef>
-          <a:fillRef idx="3">
-            <a:schemeClr val="accent1"/>
-          </a:fillRef>
-          <a:effectRef idx="2">
-            <a:schemeClr val="accent1"/>
-          </a:effectRef>
-          <a:fontRef idx="minor">
-            <a:schemeClr val="lt1"/>
-          </a:fontRef>
-        </p:style>
-        <p:txBody>
-          <a:bodyPr rtlCol="0" anchor="ctr"/>
-          <a:lstStyle/>
-          <a:p>
-            <a:pPr algn="ctr"/>
-          </a:p>
-        </p:txBody>
-      </p:sp>
-      <p:sp>
-        <p:nvSpPr>
-          <p:cNvPr id="14" name="TextBox 13"/>
-          <p:cNvSpPr txBox="1"/>
-          <p:nvPr/>
-        </p:nvSpPr>
-        <p:spPr>
-          <a:xfrm>
-            <a:off x="914400" y="2971800"/>
-            <a:ext cx="10332720" cy="3200400"/>
+            <a:off x="731520" y="822960"/>
+            <a:ext cx="8229600" cy="1188720"/>
           </a:xfrm>
           <a:prstGeom prst="rect">
             <a:avLst/>
@@ -5279,59 +9249,105 @@
           <a:lstStyle/>
           <a:p>
             <a:pPr>
-              <a:defRPr sz="1200" b="1">
-                <a:solidFill>
-                  <a:srgbClr val="38BDF8"/>
-                </a:solidFill>
-              </a:defRPr>
-            </a:pPr>
-            <a:r>
-              <a:t>EMPIRICAL BENCHMARK SIGNALS &amp; STRESS TEST TRIGGERS</a:t>
-            </a:r>
-          </a:p>
-          <a:p>
+              <a:defRPr sz="3000" b="1">
+                <a:solidFill>
+                  <a:srgbClr val="FF5E00"/>
+                </a:solidFill>
+                <a:latin typeface="Segoe UI"/>
+              </a:defRPr>
+            </a:pPr>
+            <a:r>
+              <a:t>PROJECT</a:t>
+            </a:r>
             <a:br/>
+            <a:r>
+              <a:t>MOTIVATION</a:t>
+            </a:r>
+          </a:p>
+        </p:txBody>
+      </p:sp>
+      <p:sp>
+        <p:nvSpPr>
+          <p:cNvPr id="7" name="TextBox 6"/>
+          <p:cNvSpPr txBox="1"/>
+          <p:nvPr/>
+        </p:nvSpPr>
+        <p:spPr>
+          <a:xfrm>
+            <a:off x="731520" y="2286000"/>
+            <a:ext cx="4572000" cy="3657600"/>
+          </a:xfrm>
+          <a:prstGeom prst="rect">
+            <a:avLst/>
+          </a:prstGeom>
+          <a:noFill/>
+        </p:spPr>
+        <p:txBody>
+          <a:bodyPr wrap="square">
+            <a:spAutoFit/>
+          </a:bodyPr>
+          <a:lstStyle/>
+          <a:p>
             <a:pPr>
-              <a:defRPr sz="1000">
-                <a:solidFill>
-                  <a:srgbClr val="F9FAFB"/>
-                </a:solidFill>
-              </a:defRPr>
-            </a:pPr>
-            <a:r>
-              <a:t>Event / Entity          | Source          | Sentiment | Event Type    | Impact | Risk Level | Stress Trigger | Drawdown %</a:t>
+              <a:defRPr sz="1300">
+                <a:solidFill>
+                  <a:srgbClr val="1E293B"/>
+                </a:solidFill>
+                <a:latin typeface="Segoe UI"/>
+              </a:defRPr>
+            </a:pPr>
+            <a:r>
+              <a:t>Capital Preservation:</a:t>
             </a:r>
             <a:br/>
             <a:r>
-              <a:t>---------------------------------------------------------------------------------------------------------------------------------</a:t>
+              <a:t>Sudden macroeconomic shifts require instantaneous portfolio hedging rather than lagging end-of-day reviews.</a:t>
             </a:r>
             <a:br/>
-            <a:r>
-              <a:t>NVIDIA DOJ Subpoena     | financial_news  | -0.84     | Regulatory    | 8 / 10 | High       | ACTIVATED      | -16.4 %</a:t>
-            </a:r>
             <a:br/>
             <a:r>
-              <a:t>Tesla Autonomous Probe  | social_feed     | -0.76     | Regulatory    | 8 / 10 | High       | ACTIVATED      | -14.2 %</a:t>
+              <a:t>Academic &amp; Research Innovation:</a:t>
             </a:r>
             <a:br/>
             <a:r>
-              <a:t>CrowdStrike Outage      | financial_news  | -0.92     | Cyber Attack  | 9 / 10 | Severe     | ACTIVATED      | -15.8 %</a:t>
+              <a:t>Synthesizing domain-specific FinBERT transformers with rigorous econometric Value-at-Risk (VaR) formulas.</a:t>
             </a:r>
             <a:br/>
-            <a:r>
-              <a:t>Taiwan Strait Logistics | financial_news  | -0.71     | Supply Chain  | 7 / 10 | High       | ACTIVATED      | -11.5 %</a:t>
-            </a:r>
             <a:br/>
             <a:r>
-              <a:t>JPMorgan Earnings Beat  | financial_news  | +0.81     | Earnings      | 3 / 10 | Low        | Bypassed (&lt;7)  | No Stress</a:t>
+              <a:t>Democratizing Institutional Tech:</a:t>
             </a:r>
             <a:br/>
             <a:r>
-              <a:t>Apple Product Launch    | social_feed     | +0.68     | Operational   | 2 / 10 | Low        | Bypassed (&lt;7)  | No Stress</a:t>
-            </a:r>
-          </a:p>
-        </p:txBody>
-      </p:sp>
+              <a:t>Providing real-time risk intelligence without $25k/yr proprietary terminal licenses.</a:t>
+            </a:r>
+          </a:p>
+        </p:txBody>
+      </p:sp>
+      <p:pic>
+        <p:nvPicPr>
+          <p:cNvPr id="8" name="Picture 7" descr="slide4_motivation_flow.png"/>
+          <p:cNvPicPr>
+            <a:picLocks noChangeAspect="1"/>
+          </p:cNvPicPr>
+          <p:nvPr/>
+        </p:nvPicPr>
+        <p:blipFill>
+          <a:blip r:embed="rId2"/>
+          <a:stretch>
+            <a:fillRect/>
+          </a:stretch>
+        </p:blipFill>
+        <p:spPr>
+          <a:xfrm>
+            <a:off x="5486400" y="2011680"/>
+            <a:ext cx="6217920" cy="3474720"/>
+          </a:xfrm>
+          <a:prstGeom prst="rect">
+            <a:avLst/>
+          </a:prstGeom>
+        </p:spPr>
+      </p:pic>
     </p:spTree>
   </p:cSld>
   <p:clrMapOvr>
@@ -5365,7 +9381,7 @@
             <a:avLst/>
           </a:prstGeom>
           <a:solidFill>
-            <a:srgbClr val="0B0F19"/>
+            <a:srgbClr val="FFFFFF"/>
           </a:solidFill>
           <a:ln>
             <a:noFill/>
@@ -5395,95 +9411,23 @@
       </p:sp>
       <p:sp>
         <p:nvSpPr>
-          <p:cNvPr id="3" name="TextBox 2"/>
-          <p:cNvSpPr txBox="1"/>
-          <p:nvPr/>
-        </p:nvSpPr>
-        <p:spPr>
-          <a:xfrm>
-            <a:off x="731520" y="365760"/>
-            <a:ext cx="10698480" cy="365760"/>
+          <p:cNvPr id="3" name="Rectangle 2"/>
+          <p:cNvSpPr/>
+          <p:nvPr/>
+        </p:nvSpPr>
+        <p:spPr>
+          <a:xfrm>
+            <a:off x="0" y="0"/>
+            <a:ext cx="12191695" cy="137160"/>
           </a:xfrm>
           <a:prstGeom prst="rect">
             <a:avLst/>
           </a:prstGeom>
-          <a:noFill/>
-        </p:spPr>
-        <p:txBody>
-          <a:bodyPr wrap="square">
-            <a:spAutoFit/>
-          </a:bodyPr>
-          <a:lstStyle/>
-          <a:p>
-            <a:pPr>
-              <a:defRPr sz="1000" b="1">
-                <a:solidFill>
-                  <a:srgbClr val="38BDF8"/>
-                </a:solidFill>
-              </a:defRPr>
-            </a:pPr>
-            <a:r>
-              <a:t>INSTITUTIONAL VALUE CREATION</a:t>
-            </a:r>
-          </a:p>
-        </p:txBody>
-      </p:sp>
-      <p:sp>
-        <p:nvSpPr>
-          <p:cNvPr id="4" name="TextBox 3"/>
-          <p:cNvSpPr txBox="1"/>
-          <p:nvPr/>
-        </p:nvSpPr>
-        <p:spPr>
-          <a:xfrm>
-            <a:off x="731520" y="640080"/>
-            <a:ext cx="10698480" cy="640080"/>
-          </a:xfrm>
-          <a:prstGeom prst="rect">
-            <a:avLst/>
-          </a:prstGeom>
-          <a:noFill/>
-        </p:spPr>
-        <p:txBody>
-          <a:bodyPr wrap="square">
-            <a:spAutoFit/>
-          </a:bodyPr>
-          <a:lstStyle/>
-          <a:p>
-            <a:pPr>
-              <a:defRPr sz="2200" b="1">
-                <a:solidFill>
-                  <a:srgbClr val="F9FAFB"/>
-                </a:solidFill>
-              </a:defRPr>
-            </a:pPr>
-            <a:r>
-              <a:t>Business Value &amp; Financial Domain Impact</a:t>
-            </a:r>
-          </a:p>
-        </p:txBody>
-      </p:sp>
-      <p:sp>
-        <p:nvSpPr>
-          <p:cNvPr id="5" name="Rounded Rectangle 4"/>
-          <p:cNvSpPr/>
-          <p:nvPr/>
-        </p:nvSpPr>
-        <p:spPr>
-          <a:xfrm>
-            <a:off x="731520" y="1463040"/>
-            <a:ext cx="5257800" cy="2240280"/>
-          </a:xfrm>
-          <a:prstGeom prst="roundRect">
-            <a:avLst/>
-          </a:prstGeom>
-          <a:solidFill>
-            <a:srgbClr val="111827"/>
-          </a:solidFill>
-          <a:ln w="19050">
-            <a:solidFill>
-              <a:srgbClr val="38BDF8"/>
-            </a:solidFill>
+          <a:solidFill>
+            <a:srgbClr val="FF5E00"/>
+          </a:solidFill>
+          <a:ln>
+            <a:noFill/>
           </a:ln>
         </p:spPr>
         <p:style>
@@ -5510,72 +9454,24 @@
       </p:sp>
       <p:sp>
         <p:nvSpPr>
-          <p:cNvPr id="6" name="TextBox 5"/>
-          <p:cNvSpPr txBox="1"/>
-          <p:nvPr/>
-        </p:nvSpPr>
-        <p:spPr>
-          <a:xfrm>
-            <a:off x="914400" y="1600200"/>
-            <a:ext cx="4892040" cy="1920240"/>
-          </a:xfrm>
-          <a:prstGeom prst="rect">
-            <a:avLst/>
-          </a:prstGeom>
-          <a:noFill/>
-        </p:spPr>
-        <p:txBody>
-          <a:bodyPr wrap="square">
-            <a:spAutoFit/>
-          </a:bodyPr>
-          <a:lstStyle/>
-          <a:p>
-            <a:pPr>
-              <a:defRPr sz="1100" b="1">
-                <a:solidFill>
-                  <a:srgbClr val="38BDF8"/>
-                </a:solidFill>
-              </a:defRPr>
-            </a:pPr>
-            <a:r>
-              <a:t>1. EARLY WARNING SURVEILLANCE</a:t>
-            </a:r>
-          </a:p>
-          <a:p>
-            <a:br/>
-            <a:pPr>
-              <a:defRPr sz="1000">
-                <a:solidFill>
-                  <a:srgbClr val="F9FAFB"/>
-                </a:solidFill>
-              </a:defRPr>
-            </a:pPr>
-            <a:r>
-              <a:t>Detects emerging counterpart risk and supply chain shocks hours before conventional credit rating agencies update outlooks. Captures early market sentiment shift from social and real-time news channels.</a:t>
-            </a:r>
-          </a:p>
-        </p:txBody>
-      </p:sp>
-      <p:sp>
-        <p:nvSpPr>
-          <p:cNvPr id="7" name="Rounded Rectangle 6"/>
+          <p:cNvPr id="4" name="Rounded Rectangle 3"/>
           <p:cNvSpPr/>
           <p:nvPr/>
         </p:nvSpPr>
         <p:spPr>
           <a:xfrm>
-            <a:off x="6172200" y="1463040"/>
-            <a:ext cx="5257800" cy="2240280"/>
+            <a:off x="9418320" y="502920"/>
+            <a:ext cx="2011680" cy="438912"/>
           </a:xfrm>
           <a:prstGeom prst="roundRect">
             <a:avLst/>
           </a:prstGeom>
           <a:solidFill>
-            <a:srgbClr val="111827"/>
+            <a:srgbClr val="FFFFFF"/>
           </a:solidFill>
           <a:ln w="19050">
             <a:solidFill>
-              <a:srgbClr val="34D399"/>
+              <a:srgbClr val="FF5E00"/>
             </a:solidFill>
           </a:ln>
         </p:spPr>
@@ -5597,79 +9493,39 @@
           <a:bodyPr rtlCol="0" anchor="ctr"/>
           <a:lstStyle/>
           <a:p>
-            <a:pPr algn="ctr"/>
-          </a:p>
-        </p:txBody>
-      </p:sp>
-      <p:sp>
-        <p:nvSpPr>
-          <p:cNvPr id="8" name="TextBox 7"/>
-          <p:cNvSpPr txBox="1"/>
-          <p:nvPr/>
-        </p:nvSpPr>
-        <p:spPr>
-          <a:xfrm>
-            <a:off x="6355080" y="1600200"/>
-            <a:ext cx="4892040" cy="1920240"/>
-          </a:xfrm>
-          <a:prstGeom prst="rect">
-            <a:avLst/>
-          </a:prstGeom>
-          <a:noFill/>
-        </p:spPr>
-        <p:txBody>
-          <a:bodyPr wrap="square">
-            <a:spAutoFit/>
-          </a:bodyPr>
-          <a:lstStyle/>
-          <a:p>
-            <a:pPr>
-              <a:defRPr sz="1100" b="1">
-                <a:solidFill>
-                  <a:srgbClr val="34D399"/>
-                </a:solidFill>
-              </a:defRPr>
-            </a:pPr>
-            <a:r>
-              <a:t>2. REGULATORY &amp; AUDIT COMPLIANCE</a:t>
-            </a:r>
-          </a:p>
-          <a:p>
-            <a:br/>
-            <a:pPr>
-              <a:defRPr sz="1000">
-                <a:solidFill>
-                  <a:srgbClr val="F9FAFB"/>
-                </a:solidFill>
-              </a:defRPr>
-            </a:pPr>
-            <a:r>
-              <a:t>Unlike black-box LLMs, every sentiment score, event category, and impact calculation has a deterministic formula with auditable lexical tokens—aligning with Basel III, CCAR, and CRISIL stress-testing guidelines.</a:t>
-            </a:r>
-          </a:p>
-        </p:txBody>
-      </p:sp>
-      <p:sp>
-        <p:nvSpPr>
-          <p:cNvPr id="9" name="Rounded Rectangle 8"/>
+            <a:pPr algn="ctr">
+              <a:defRPr sz="1000" b="1">
+                <a:solidFill>
+                  <a:srgbClr val="FF5E00"/>
+                </a:solidFill>
+                <a:latin typeface="Segoe UI"/>
+              </a:defRPr>
+            </a:pPr>
+            <a:r>
+              <a:t>RISKPULSE</a:t>
+            </a:r>
+          </a:p>
+        </p:txBody>
+      </p:sp>
+      <p:sp>
+        <p:nvSpPr>
+          <p:cNvPr id="5" name="Oval 4"/>
           <p:cNvSpPr/>
           <p:nvPr/>
         </p:nvSpPr>
         <p:spPr>
           <a:xfrm>
-            <a:off x="731520" y="3931920"/>
-            <a:ext cx="5257800" cy="2240280"/>
-          </a:xfrm>
-          <a:prstGeom prst="roundRect">
-            <a:avLst/>
-          </a:prstGeom>
-          <a:solidFill>
-            <a:srgbClr val="111827"/>
-          </a:solidFill>
-          <a:ln w="19050">
-            <a:solidFill>
-              <a:srgbClr val="FBBF24"/>
-            </a:solidFill>
+            <a:off x="10972800" y="5760720"/>
+            <a:ext cx="621792" cy="621792"/>
+          </a:xfrm>
+          <a:prstGeom prst="ellipse">
+            <a:avLst/>
+          </a:prstGeom>
+          <a:solidFill>
+            <a:srgbClr val="FF5E00"/>
+          </a:solidFill>
+          <a:ln>
+            <a:noFill/>
           </a:ln>
         </p:spPr>
         <p:style>
@@ -5690,20 +9546,30 @@
           <a:bodyPr rtlCol="0" anchor="ctr"/>
           <a:lstStyle/>
           <a:p>
-            <a:pPr algn="ctr"/>
-          </a:p>
-        </p:txBody>
-      </p:sp>
-      <p:sp>
-        <p:nvSpPr>
-          <p:cNvPr id="10" name="TextBox 9"/>
+            <a:pPr algn="ctr">
+              <a:defRPr sz="1800" b="1">
+                <a:solidFill>
+                  <a:srgbClr val="FFFFFF"/>
+                </a:solidFill>
+                <a:latin typeface="Segoe UI"/>
+              </a:defRPr>
+            </a:pPr>
+            <a:r>
+              <a:t>&gt;</a:t>
+            </a:r>
+          </a:p>
+        </p:txBody>
+      </p:sp>
+      <p:sp>
+        <p:nvSpPr>
+          <p:cNvPr id="6" name="TextBox 5"/>
           <p:cNvSpPr txBox="1"/>
           <p:nvPr/>
         </p:nvSpPr>
         <p:spPr>
           <a:xfrm>
-            <a:off x="914400" y="4069080"/>
-            <a:ext cx="4892040" cy="1920240"/>
+            <a:off x="731520" y="822960"/>
+            <a:ext cx="8229600" cy="1188720"/>
           </a:xfrm>
           <a:prstGeom prst="rect">
             <a:avLst/>
@@ -5717,51 +9583,39 @@
           <a:lstStyle/>
           <a:p>
             <a:pPr>
-              <a:defRPr sz="1100" b="1">
-                <a:solidFill>
-                  <a:srgbClr val="FBBF24"/>
-                </a:solidFill>
-              </a:defRPr>
-            </a:pPr>
-            <a:r>
-              <a:t>3. DYNAMIC CAPITAL ADEQUACY STRESS TESTING</a:t>
-            </a:r>
-          </a:p>
-          <a:p>
-            <a:br/>
-            <a:pPr>
-              <a:defRPr sz="1000">
-                <a:solidFill>
-                  <a:srgbClr val="F9FAFB"/>
-                </a:solidFill>
-              </a:defRPr>
-            </a:pPr>
-            <a:r>
-              <a:t>Bridges qualitative financial journalism directly into quantitative balance sheet haircuts. Automates conditional execution (Impact &gt;= 7) to estimate mark-to-market drawdowns instantly.</a:t>
-            </a:r>
-          </a:p>
-        </p:txBody>
-      </p:sp>
-      <p:sp>
-        <p:nvSpPr>
-          <p:cNvPr id="11" name="Rounded Rectangle 10"/>
+              <a:defRPr sz="3000" b="1">
+                <a:solidFill>
+                  <a:srgbClr val="FF5E00"/>
+                </a:solidFill>
+                <a:latin typeface="Segoe UI"/>
+              </a:defRPr>
+            </a:pPr>
+            <a:r>
+              <a:t>CORE OBJECTIVES</a:t>
+            </a:r>
+          </a:p>
+        </p:txBody>
+      </p:sp>
+      <p:sp>
+        <p:nvSpPr>
+          <p:cNvPr id="7" name="Rounded Rectangle 6"/>
           <p:cNvSpPr/>
           <p:nvPr/>
         </p:nvSpPr>
         <p:spPr>
           <a:xfrm>
-            <a:off x="6172200" y="3931920"/>
-            <a:ext cx="5257800" cy="2240280"/>
+            <a:off x="731520" y="2286000"/>
+            <a:ext cx="3291840" cy="1737360"/>
           </a:xfrm>
           <a:prstGeom prst="roundRect">
             <a:avLst/>
           </a:prstGeom>
           <a:solidFill>
-            <a:srgbClr val="111827"/>
+            <a:srgbClr val="F8FAFC"/>
           </a:solidFill>
           <a:ln w="19050">
             <a:solidFill>
-              <a:srgbClr val="818CF8"/>
+              <a:srgbClr val="FF5E00"/>
             </a:solidFill>
           </a:ln>
         </p:spPr>
@@ -5789,14 +9643,14 @@
       </p:sp>
       <p:sp>
         <p:nvSpPr>
-          <p:cNvPr id="12" name="TextBox 11"/>
+          <p:cNvPr id="8" name="TextBox 7"/>
           <p:cNvSpPr txBox="1"/>
           <p:nvPr/>
         </p:nvSpPr>
         <p:spPr>
           <a:xfrm>
-            <a:off x="6355080" y="4069080"/>
-            <a:ext cx="4892040" cy="1920240"/>
+            <a:off x="914400" y="2423160"/>
+            <a:ext cx="2926080" cy="1463040"/>
           </a:xfrm>
           <a:prstGeom prst="rect">
             <a:avLst/>
@@ -5810,27 +9664,498 @@
           <a:lstStyle/>
           <a:p>
             <a:pPr>
-              <a:defRPr sz="1100" b="1">
-                <a:solidFill>
-                  <a:srgbClr val="818CF8"/>
-                </a:solidFill>
-              </a:defRPr>
-            </a:pPr>
-            <a:r>
-              <a:t>4. ZERO VENDOR LOCK-IN &amp; LOW TCO</a:t>
-            </a:r>
-          </a:p>
-          <a:p>
-            <a:br/>
+              <a:defRPr sz="1300" b="1">
+                <a:solidFill>
+                  <a:srgbClr val="FF5E00"/>
+                </a:solidFill>
+                <a:latin typeface="Segoe UI"/>
+              </a:defRPr>
+            </a:pPr>
+            <a:r>
+              <a:t>01. Live Ingestion</a:t>
+            </a:r>
+          </a:p>
+          <a:p>
             <a:pPr>
-              <a:defRPr sz="1000">
-                <a:solidFill>
-                  <a:srgbClr val="F9FAFB"/>
-                </a:solidFill>
-              </a:defRPr>
-            </a:pPr>
-            <a:r>
-              <a:t>Engineered with open-source Python, FastAPI, and SQLite. Operates entirely air-gapped without expensive proprietary API tokens (Bloomberg/Refinitiv), enabling cost-effective institutional deployment.</a:t>
+              <a:defRPr sz="1100">
+                <a:solidFill>
+                  <a:srgbClr val="1E293B"/>
+                </a:solidFill>
+                <a:latin typeface="Segoe UI"/>
+              </a:defRPr>
+            </a:pPr>
+            <a:r>
+              <a:t>Continuous RSS feed extraction with resilient mock fallback.</a:t>
+            </a:r>
+          </a:p>
+        </p:txBody>
+      </p:sp>
+      <p:sp>
+        <p:nvSpPr>
+          <p:cNvPr id="9" name="Rounded Rectangle 8"/>
+          <p:cNvSpPr/>
+          <p:nvPr/>
+        </p:nvSpPr>
+        <p:spPr>
+          <a:xfrm>
+            <a:off x="4297680" y="2286000"/>
+            <a:ext cx="3291840" cy="1737360"/>
+          </a:xfrm>
+          <a:prstGeom prst="roundRect">
+            <a:avLst/>
+          </a:prstGeom>
+          <a:solidFill>
+            <a:srgbClr val="F8FAFC"/>
+          </a:solidFill>
+          <a:ln w="19050">
+            <a:solidFill>
+              <a:srgbClr val="FF5E00"/>
+            </a:solidFill>
+          </a:ln>
+        </p:spPr>
+        <p:style>
+          <a:lnRef idx="1">
+            <a:schemeClr val="accent1"/>
+          </a:lnRef>
+          <a:fillRef idx="3">
+            <a:schemeClr val="accent1"/>
+          </a:fillRef>
+          <a:effectRef idx="2">
+            <a:schemeClr val="accent1"/>
+          </a:effectRef>
+          <a:fontRef idx="minor">
+            <a:schemeClr val="lt1"/>
+          </a:fontRef>
+        </p:style>
+        <p:txBody>
+          <a:bodyPr rtlCol="0" anchor="ctr"/>
+          <a:lstStyle/>
+          <a:p>
+            <a:pPr algn="ctr"/>
+          </a:p>
+        </p:txBody>
+      </p:sp>
+      <p:sp>
+        <p:nvSpPr>
+          <p:cNvPr id="10" name="TextBox 9"/>
+          <p:cNvSpPr txBox="1"/>
+          <p:nvPr/>
+        </p:nvSpPr>
+        <p:spPr>
+          <a:xfrm>
+            <a:off x="4480560" y="2423160"/>
+            <a:ext cx="2926080" cy="1463040"/>
+          </a:xfrm>
+          <a:prstGeom prst="rect">
+            <a:avLst/>
+          </a:prstGeom>
+          <a:noFill/>
+        </p:spPr>
+        <p:txBody>
+          <a:bodyPr wrap="square">
+            <a:spAutoFit/>
+          </a:bodyPr>
+          <a:lstStyle/>
+          <a:p>
+            <a:pPr>
+              <a:defRPr sz="1300" b="1">
+                <a:solidFill>
+                  <a:srgbClr val="FF5E00"/>
+                </a:solidFill>
+                <a:latin typeface="Segoe UI"/>
+              </a:defRPr>
+            </a:pPr>
+            <a:r>
+              <a:t>02. FinBERT NLP</a:t>
+            </a:r>
+          </a:p>
+          <a:p>
+            <a:pPr>
+              <a:defRPr sz="1100">
+                <a:solidFill>
+                  <a:srgbClr val="1E293B"/>
+                </a:solidFill>
+                <a:latin typeface="Segoe UI"/>
+              </a:defRPr>
+            </a:pPr>
+            <a:r>
+              <a:t>Financial polarity scoring (-1.0 to +1.0) and impact severity (1-10).</a:t>
+            </a:r>
+          </a:p>
+        </p:txBody>
+      </p:sp>
+      <p:sp>
+        <p:nvSpPr>
+          <p:cNvPr id="11" name="Rounded Rectangle 10"/>
+          <p:cNvSpPr/>
+          <p:nvPr/>
+        </p:nvSpPr>
+        <p:spPr>
+          <a:xfrm>
+            <a:off x="7863840" y="2286000"/>
+            <a:ext cx="3291840" cy="1737360"/>
+          </a:xfrm>
+          <a:prstGeom prst="roundRect">
+            <a:avLst/>
+          </a:prstGeom>
+          <a:solidFill>
+            <a:srgbClr val="F8FAFC"/>
+          </a:solidFill>
+          <a:ln w="19050">
+            <a:solidFill>
+              <a:srgbClr val="FF5E00"/>
+            </a:solidFill>
+          </a:ln>
+        </p:spPr>
+        <p:style>
+          <a:lnRef idx="1">
+            <a:schemeClr val="accent1"/>
+          </a:lnRef>
+          <a:fillRef idx="3">
+            <a:schemeClr val="accent1"/>
+          </a:fillRef>
+          <a:effectRef idx="2">
+            <a:schemeClr val="accent1"/>
+          </a:effectRef>
+          <a:fontRef idx="minor">
+            <a:schemeClr val="lt1"/>
+          </a:fontRef>
+        </p:style>
+        <p:txBody>
+          <a:bodyPr rtlCol="0" anchor="ctr"/>
+          <a:lstStyle/>
+          <a:p>
+            <a:pPr algn="ctr"/>
+          </a:p>
+        </p:txBody>
+      </p:sp>
+      <p:sp>
+        <p:nvSpPr>
+          <p:cNvPr id="12" name="TextBox 11"/>
+          <p:cNvSpPr txBox="1"/>
+          <p:nvPr/>
+        </p:nvSpPr>
+        <p:spPr>
+          <a:xfrm>
+            <a:off x="8046720" y="2423160"/>
+            <a:ext cx="2926080" cy="1463040"/>
+          </a:xfrm>
+          <a:prstGeom prst="rect">
+            <a:avLst/>
+          </a:prstGeom>
+          <a:noFill/>
+        </p:spPr>
+        <p:txBody>
+          <a:bodyPr wrap="square">
+            <a:spAutoFit/>
+          </a:bodyPr>
+          <a:lstStyle/>
+          <a:p>
+            <a:pPr>
+              <a:defRPr sz="1300" b="1">
+                <a:solidFill>
+                  <a:srgbClr val="FF5E00"/>
+                </a:solidFill>
+                <a:latin typeface="Segoe UI"/>
+              </a:defRPr>
+            </a:pPr>
+            <a:r>
+              <a:t>03. Entity NER</a:t>
+            </a:r>
+          </a:p>
+          <a:p>
+            <a:pPr>
+              <a:defRPr sz="1100">
+                <a:solidFill>
+                  <a:srgbClr val="1E293B"/>
+                </a:solidFill>
+                <a:latin typeface="Segoe UI"/>
+              </a:defRPr>
+            </a:pPr>
+            <a:r>
+              <a:t>Sector-aware extraction mapping company mentions to stock tickers.</a:t>
+            </a:r>
+          </a:p>
+        </p:txBody>
+      </p:sp>
+      <p:sp>
+        <p:nvSpPr>
+          <p:cNvPr id="13" name="Rounded Rectangle 12"/>
+          <p:cNvSpPr/>
+          <p:nvPr/>
+        </p:nvSpPr>
+        <p:spPr>
+          <a:xfrm>
+            <a:off x="731520" y="4297680"/>
+            <a:ext cx="3291840" cy="1737360"/>
+          </a:xfrm>
+          <a:prstGeom prst="roundRect">
+            <a:avLst/>
+          </a:prstGeom>
+          <a:solidFill>
+            <a:srgbClr val="F8FAFC"/>
+          </a:solidFill>
+          <a:ln w="19050">
+            <a:solidFill>
+              <a:srgbClr val="FF5E00"/>
+            </a:solidFill>
+          </a:ln>
+        </p:spPr>
+        <p:style>
+          <a:lnRef idx="1">
+            <a:schemeClr val="accent1"/>
+          </a:lnRef>
+          <a:fillRef idx="3">
+            <a:schemeClr val="accent1"/>
+          </a:fillRef>
+          <a:effectRef idx="2">
+            <a:schemeClr val="accent1"/>
+          </a:effectRef>
+          <a:fontRef idx="minor">
+            <a:schemeClr val="lt1"/>
+          </a:fontRef>
+        </p:style>
+        <p:txBody>
+          <a:bodyPr rtlCol="0" anchor="ctr"/>
+          <a:lstStyle/>
+          <a:p>
+            <a:pPr algn="ctr"/>
+          </a:p>
+        </p:txBody>
+      </p:sp>
+      <p:sp>
+        <p:nvSpPr>
+          <p:cNvPr id="14" name="TextBox 13"/>
+          <p:cNvSpPr txBox="1"/>
+          <p:nvPr/>
+        </p:nvSpPr>
+        <p:spPr>
+          <a:xfrm>
+            <a:off x="914400" y="4434840"/>
+            <a:ext cx="2926080" cy="1463040"/>
+          </a:xfrm>
+          <a:prstGeom prst="rect">
+            <a:avLst/>
+          </a:prstGeom>
+          <a:noFill/>
+        </p:spPr>
+        <p:txBody>
+          <a:bodyPr wrap="square">
+            <a:spAutoFit/>
+          </a:bodyPr>
+          <a:lstStyle/>
+          <a:p>
+            <a:pPr>
+              <a:defRPr sz="1300" b="1">
+                <a:solidFill>
+                  <a:srgbClr val="FF5E00"/>
+                </a:solidFill>
+                <a:latin typeface="Segoe UI"/>
+              </a:defRPr>
+            </a:pPr>
+            <a:r>
+              <a:t>04. Macro Stress Engine</a:t>
+            </a:r>
+          </a:p>
+          <a:p>
+            <a:pPr>
+              <a:defRPr sz="1100">
+                <a:solidFill>
+                  <a:srgbClr val="1E293B"/>
+                </a:solidFill>
+                <a:latin typeface="Segoe UI"/>
+              </a:defRPr>
+            </a:pPr>
+            <a:r>
+              <a:t>Dynamic scenario modeling (Rate Hikes, Stagflation) with Beta repricing.</a:t>
+            </a:r>
+          </a:p>
+        </p:txBody>
+      </p:sp>
+      <p:sp>
+        <p:nvSpPr>
+          <p:cNvPr id="15" name="Rounded Rectangle 14"/>
+          <p:cNvSpPr/>
+          <p:nvPr/>
+        </p:nvSpPr>
+        <p:spPr>
+          <a:xfrm>
+            <a:off x="4297680" y="4297680"/>
+            <a:ext cx="3291840" cy="1737360"/>
+          </a:xfrm>
+          <a:prstGeom prst="roundRect">
+            <a:avLst/>
+          </a:prstGeom>
+          <a:solidFill>
+            <a:srgbClr val="F8FAFC"/>
+          </a:solidFill>
+          <a:ln w="19050">
+            <a:solidFill>
+              <a:srgbClr val="FF5E00"/>
+            </a:solidFill>
+          </a:ln>
+        </p:spPr>
+        <p:style>
+          <a:lnRef idx="1">
+            <a:schemeClr val="accent1"/>
+          </a:lnRef>
+          <a:fillRef idx="3">
+            <a:schemeClr val="accent1"/>
+          </a:fillRef>
+          <a:effectRef idx="2">
+            <a:schemeClr val="accent1"/>
+          </a:effectRef>
+          <a:fontRef idx="minor">
+            <a:schemeClr val="lt1"/>
+          </a:fontRef>
+        </p:style>
+        <p:txBody>
+          <a:bodyPr rtlCol="0" anchor="ctr"/>
+          <a:lstStyle/>
+          <a:p>
+            <a:pPr algn="ctr"/>
+          </a:p>
+        </p:txBody>
+      </p:sp>
+      <p:sp>
+        <p:nvSpPr>
+          <p:cNvPr id="16" name="TextBox 15"/>
+          <p:cNvSpPr txBox="1"/>
+          <p:nvPr/>
+        </p:nvSpPr>
+        <p:spPr>
+          <a:xfrm>
+            <a:off x="4480560" y="4434840"/>
+            <a:ext cx="2926080" cy="1463040"/>
+          </a:xfrm>
+          <a:prstGeom prst="rect">
+            <a:avLst/>
+          </a:prstGeom>
+          <a:noFill/>
+        </p:spPr>
+        <p:txBody>
+          <a:bodyPr wrap="square">
+            <a:spAutoFit/>
+          </a:bodyPr>
+          <a:lstStyle/>
+          <a:p>
+            <a:pPr>
+              <a:defRPr sz="1300" b="1">
+                <a:solidFill>
+                  <a:srgbClr val="FF5E00"/>
+                </a:solidFill>
+                <a:latin typeface="Segoe UI"/>
+              </a:defRPr>
+            </a:pPr>
+            <a:r>
+              <a:t>05. Tail Risk (VaR)</a:t>
+            </a:r>
+          </a:p>
+          <a:p>
+            <a:pPr>
+              <a:defRPr sz="1100">
+                <a:solidFill>
+                  <a:srgbClr val="1E293B"/>
+                </a:solidFill>
+                <a:latin typeface="Segoe UI"/>
+              </a:defRPr>
+            </a:pPr>
+            <a:r>
+              <a:t>Parametric Value-at-Risk and Expected Shortfall recalculation.</a:t>
+            </a:r>
+          </a:p>
+        </p:txBody>
+      </p:sp>
+      <p:sp>
+        <p:nvSpPr>
+          <p:cNvPr id="17" name="Rounded Rectangle 16"/>
+          <p:cNvSpPr/>
+          <p:nvPr/>
+        </p:nvSpPr>
+        <p:spPr>
+          <a:xfrm>
+            <a:off x="7863840" y="4297680"/>
+            <a:ext cx="3291840" cy="1737360"/>
+          </a:xfrm>
+          <a:prstGeom prst="roundRect">
+            <a:avLst/>
+          </a:prstGeom>
+          <a:solidFill>
+            <a:srgbClr val="F8FAFC"/>
+          </a:solidFill>
+          <a:ln w="19050">
+            <a:solidFill>
+              <a:srgbClr val="FF5E00"/>
+            </a:solidFill>
+          </a:ln>
+        </p:spPr>
+        <p:style>
+          <a:lnRef idx="1">
+            <a:schemeClr val="accent1"/>
+          </a:lnRef>
+          <a:fillRef idx="3">
+            <a:schemeClr val="accent1"/>
+          </a:fillRef>
+          <a:effectRef idx="2">
+            <a:schemeClr val="accent1"/>
+          </a:effectRef>
+          <a:fontRef idx="minor">
+            <a:schemeClr val="lt1"/>
+          </a:fontRef>
+        </p:style>
+        <p:txBody>
+          <a:bodyPr rtlCol="0" anchor="ctr"/>
+          <a:lstStyle/>
+          <a:p>
+            <a:pPr algn="ctr"/>
+          </a:p>
+        </p:txBody>
+      </p:sp>
+      <p:sp>
+        <p:nvSpPr>
+          <p:cNvPr id="18" name="TextBox 17"/>
+          <p:cNvSpPr txBox="1"/>
+          <p:nvPr/>
+        </p:nvSpPr>
+        <p:spPr>
+          <a:xfrm>
+            <a:off x="8046720" y="4434840"/>
+            <a:ext cx="2926080" cy="1463040"/>
+          </a:xfrm>
+          <a:prstGeom prst="rect">
+            <a:avLst/>
+          </a:prstGeom>
+          <a:noFill/>
+        </p:spPr>
+        <p:txBody>
+          <a:bodyPr wrap="square">
+            <a:spAutoFit/>
+          </a:bodyPr>
+          <a:lstStyle/>
+          <a:p>
+            <a:pPr>
+              <a:defRPr sz="1300" b="1">
+                <a:solidFill>
+                  <a:srgbClr val="FF5E00"/>
+                </a:solidFill>
+                <a:latin typeface="Segoe UI"/>
+              </a:defRPr>
+            </a:pPr>
+            <a:r>
+              <a:t>06. Cloud Verification</a:t>
+            </a:r>
+          </a:p>
+          <a:p>
+            <a:pPr>
+              <a:defRPr sz="1100">
+                <a:solidFill>
+                  <a:srgbClr val="1E293B"/>
+                </a:solidFill>
+                <a:latin typeface="Segoe UI"/>
+              </a:defRPr>
+            </a:pPr>
+            <a:r>
+              <a:t>Reactive React 18 dashboard with 100% test pass rate (30/30 tests).</a:t>
             </a:r>
           </a:p>
         </p:txBody>
@@ -5868,7 +10193,7 @@
             <a:avLst/>
           </a:prstGeom>
           <a:solidFill>
-            <a:srgbClr val="0B0F19"/>
+            <a:srgbClr val="FF5E00"/>
           </a:solidFill>
           <a:ln>
             <a:noFill/>
@@ -5898,95 +10223,23 @@
       </p:sp>
       <p:sp>
         <p:nvSpPr>
-          <p:cNvPr id="3" name="TextBox 2"/>
-          <p:cNvSpPr txBox="1"/>
-          <p:nvPr/>
-        </p:nvSpPr>
-        <p:spPr>
-          <a:xfrm>
-            <a:off x="731520" y="365760"/>
-            <a:ext cx="10698480" cy="365760"/>
-          </a:xfrm>
-          <a:prstGeom prst="rect">
-            <a:avLst/>
-          </a:prstGeom>
-          <a:noFill/>
-        </p:spPr>
-        <p:txBody>
-          <a:bodyPr wrap="square">
-            <a:spAutoFit/>
-          </a:bodyPr>
-          <a:lstStyle/>
-          <a:p>
-            <a:pPr>
-              <a:defRPr sz="1000" b="1">
-                <a:solidFill>
-                  <a:srgbClr val="38BDF8"/>
-                </a:solidFill>
-              </a:defRPr>
-            </a:pPr>
-            <a:r>
-              <a:t>ETHICAL DISCLOSURE &amp; FUTURE EXPANSION</a:t>
-            </a:r>
-          </a:p>
-        </p:txBody>
-      </p:sp>
-      <p:sp>
-        <p:nvSpPr>
-          <p:cNvPr id="4" name="TextBox 3"/>
-          <p:cNvSpPr txBox="1"/>
-          <p:nvPr/>
-        </p:nvSpPr>
-        <p:spPr>
-          <a:xfrm>
-            <a:off x="731520" y="640080"/>
-            <a:ext cx="10698480" cy="640080"/>
-          </a:xfrm>
-          <a:prstGeom prst="rect">
-            <a:avLst/>
-          </a:prstGeom>
-          <a:noFill/>
-        </p:spPr>
-        <p:txBody>
-          <a:bodyPr wrap="square">
-            <a:spAutoFit/>
-          </a:bodyPr>
-          <a:lstStyle/>
-          <a:p>
-            <a:pPr>
-              <a:defRPr sz="2200" b="1">
-                <a:solidFill>
-                  <a:srgbClr val="F9FAFB"/>
-                </a:solidFill>
-              </a:defRPr>
-            </a:pPr>
-            <a:r>
-              <a:t>Limitations &amp; Strategic Roadmap</a:t>
-            </a:r>
-          </a:p>
-        </p:txBody>
-      </p:sp>
-      <p:sp>
-        <p:nvSpPr>
-          <p:cNvPr id="5" name="Rounded Rectangle 4"/>
+          <p:cNvPr id="3" name="Oval 2"/>
           <p:cNvSpPr/>
           <p:nvPr/>
         </p:nvSpPr>
         <p:spPr>
           <a:xfrm>
-            <a:off x="731520" y="1463040"/>
-            <a:ext cx="5120640" cy="4663440"/>
-          </a:xfrm>
-          <a:prstGeom prst="roundRect">
-            <a:avLst/>
-          </a:prstGeom>
-          <a:solidFill>
-            <a:srgbClr val="111827"/>
-          </a:solidFill>
-          <a:ln w="19050">
-            <a:solidFill>
-              <a:srgbClr val="FBBF24"/>
-            </a:solidFill>
+            <a:off x="7772400" y="-1371600"/>
+            <a:ext cx="6858000" cy="6858000"/>
+          </a:xfrm>
+          <a:prstGeom prst="ellipse">
+            <a:avLst/>
+          </a:prstGeom>
+          <a:solidFill>
+            <a:srgbClr val="FF7814"/>
+          </a:solidFill>
+          <a:ln>
+            <a:noFill/>
           </a:ln>
         </p:spPr>
         <p:style>
@@ -6013,103 +10266,24 @@
       </p:sp>
       <p:sp>
         <p:nvSpPr>
-          <p:cNvPr id="6" name="TextBox 5"/>
-          <p:cNvSpPr txBox="1"/>
-          <p:nvPr/>
-        </p:nvSpPr>
-        <p:spPr>
-          <a:xfrm>
-            <a:off x="914400" y="1645920"/>
-            <a:ext cx="4754880" cy="4297680"/>
-          </a:xfrm>
-          <a:prstGeom prst="rect">
-            <a:avLst/>
-          </a:prstGeom>
-          <a:noFill/>
-        </p:spPr>
-        <p:txBody>
-          <a:bodyPr wrap="square">
-            <a:spAutoFit/>
-          </a:bodyPr>
-          <a:lstStyle/>
-          <a:p>
-            <a:pPr>
-              <a:defRPr sz="1200" b="1">
-                <a:solidFill>
-                  <a:srgbClr val="FBBF24"/>
-                </a:solidFill>
-              </a:defRPr>
-            </a:pPr>
-            <a:r>
-              <a:t>CURRENT SYSTEM LIMITATIONS</a:t>
-            </a:r>
-          </a:p>
-          <a:p>
-            <a:br/>
-            <a:pPr>
-              <a:defRPr sz="1050">
-                <a:solidFill>
-                  <a:srgbClr val="F9FAFB"/>
-                </a:solidFill>
-              </a:defRPr>
-            </a:pPr>
-            <a:r>
-              <a:t>• Rule-Based Lexical Parsing:</a:t>
-            </a:r>
-            <a:br/>
-            <a:r>
-              <a:t>While deterministic and fast, dictionary matching does not capture deep linguistic sarcasm, multi-sentence contextual reversals, or complex syntactic negation.</a:t>
-            </a:r>
-            <a:br/>
-            <a:br/>
-            <a:r>
-              <a:t>• Synthetic Portfolio Calibration:</a:t>
-            </a:r>
-            <a:br/>
-            <a:r>
-              <a:t>Stress tests operate against a normalized $1,000,000 multi-asset synthetic benchmark rather than real-time prime brokerage custodian feeds.</a:t>
-            </a:r>
-            <a:br/>
-            <a:br/>
-            <a:r>
-              <a:t>• Fixed Haircut Matrix:</a:t>
-            </a:r>
-            <a:br/>
-            <a:r>
-              <a:t>Scenario shocks are currently calibrated by discrete asset class rather than continuous factor covariance matrices (e.g., Fama-French multi-factor regressions).</a:t>
-            </a:r>
-            <a:br/>
-            <a:br/>
-            <a:r>
-              <a:t>• Live RSS Availability:</a:t>
-            </a:r>
-            <a:br/>
-            <a:r>
-              <a:t>Public financial RSS feeds are subject to third-party network throttles and format changes; hence isolated as an optional toggle with offline fallback.</a:t>
-            </a:r>
-          </a:p>
-        </p:txBody>
-      </p:sp>
-      <p:sp>
-        <p:nvSpPr>
-          <p:cNvPr id="7" name="Rounded Rectangle 6"/>
+          <p:cNvPr id="4" name="Rounded Rectangle 3"/>
           <p:cNvSpPr/>
           <p:nvPr/>
         </p:nvSpPr>
         <p:spPr>
           <a:xfrm>
-            <a:off x="6309360" y="1463040"/>
-            <a:ext cx="5120640" cy="4663440"/>
+            <a:off x="731520" y="502920"/>
+            <a:ext cx="2011680" cy="438912"/>
           </a:xfrm>
           <a:prstGeom prst="roundRect">
             <a:avLst/>
           </a:prstGeom>
           <a:solidFill>
-            <a:srgbClr val="111827"/>
+            <a:srgbClr val="E65100"/>
           </a:solidFill>
           <a:ln w="19050">
             <a:solidFill>
-              <a:srgbClr val="38BDF8"/>
+              <a:srgbClr val="FFFFFF"/>
             </a:solidFill>
           </a:ln>
         </p:spPr>
@@ -6131,20 +10305,83 @@
           <a:bodyPr rtlCol="0" anchor="ctr"/>
           <a:lstStyle/>
           <a:p>
-            <a:pPr algn="ctr"/>
-          </a:p>
-        </p:txBody>
-      </p:sp>
-      <p:sp>
-        <p:nvSpPr>
-          <p:cNvPr id="8" name="TextBox 7"/>
+            <a:pPr algn="ctr">
+              <a:defRPr sz="1000" b="1">
+                <a:solidFill>
+                  <a:srgbClr val="FFFFFF"/>
+                </a:solidFill>
+                <a:latin typeface="Segoe UI"/>
+              </a:defRPr>
+            </a:pPr>
+            <a:r>
+              <a:t>VIT BHOPAL</a:t>
+            </a:r>
+          </a:p>
+        </p:txBody>
+      </p:sp>
+      <p:sp>
+        <p:nvSpPr>
+          <p:cNvPr id="5" name="Oval 4"/>
+          <p:cNvSpPr/>
+          <p:nvPr/>
+        </p:nvSpPr>
+        <p:spPr>
+          <a:xfrm>
+            <a:off x="10972800" y="5760720"/>
+            <a:ext cx="621792" cy="621792"/>
+          </a:xfrm>
+          <a:prstGeom prst="ellipse">
+            <a:avLst/>
+          </a:prstGeom>
+          <a:solidFill>
+            <a:srgbClr val="FFFFFF"/>
+          </a:solidFill>
+          <a:ln>
+            <a:noFill/>
+          </a:ln>
+        </p:spPr>
+        <p:style>
+          <a:lnRef idx="1">
+            <a:schemeClr val="accent1"/>
+          </a:lnRef>
+          <a:fillRef idx="3">
+            <a:schemeClr val="accent1"/>
+          </a:fillRef>
+          <a:effectRef idx="2">
+            <a:schemeClr val="accent1"/>
+          </a:effectRef>
+          <a:fontRef idx="minor">
+            <a:schemeClr val="lt1"/>
+          </a:fontRef>
+        </p:style>
+        <p:txBody>
+          <a:bodyPr rtlCol="0" anchor="ctr"/>
+          <a:lstStyle/>
+          <a:p>
+            <a:pPr algn="ctr">
+              <a:defRPr sz="1800" b="1">
+                <a:solidFill>
+                  <a:srgbClr val="FF5E00"/>
+                </a:solidFill>
+                <a:latin typeface="Segoe UI"/>
+              </a:defRPr>
+            </a:pPr>
+            <a:r>
+              <a:t>&gt;</a:t>
+            </a:r>
+          </a:p>
+        </p:txBody>
+      </p:sp>
+      <p:sp>
+        <p:nvSpPr>
+          <p:cNvPr id="6" name="TextBox 5"/>
           <p:cNvSpPr txBox="1"/>
           <p:nvPr/>
         </p:nvSpPr>
         <p:spPr>
           <a:xfrm>
-            <a:off x="6492240" y="1645920"/>
-            <a:ext cx="4754880" cy="4297680"/>
+            <a:off x="731520" y="1371600"/>
+            <a:ext cx="10515600" cy="1371600"/>
           </a:xfrm>
           <a:prstGeom prst="rect">
             <a:avLst/>
@@ -6158,58 +10395,995 @@
           <a:lstStyle/>
           <a:p>
             <a:pPr>
-              <a:defRPr sz="1200" b="1">
-                <a:solidFill>
-                  <a:srgbClr val="38BDF8"/>
-                </a:solidFill>
-              </a:defRPr>
-            </a:pPr>
-            <a:r>
-              <a:t>STRATEGIC ROADMAP &amp; ENHANCEMENTS</a:t>
-            </a:r>
-          </a:p>
-          <a:p>
+              <a:defRPr sz="3600" b="1">
+                <a:solidFill>
+                  <a:srgbClr val="FFFFFF"/>
+                </a:solidFill>
+                <a:latin typeface="Segoe UI"/>
+              </a:defRPr>
+            </a:pPr>
+            <a:r>
+              <a:t>EXISTING SYSTEMS &amp; SHORTCOMINGS</a:t>
+            </a:r>
+          </a:p>
+          <a:p>
+            <a:pPr>
+              <a:defRPr sz="1600">
+                <a:solidFill>
+                  <a:srgbClr val="FFEDD5"/>
+                </a:solidFill>
+                <a:latin typeface="Segoe UI"/>
+              </a:defRPr>
+            </a:pPr>
+            <a:r>
+              <a:t>Why Traditional Financial Tools Cannot Meet Real-Time Demands</a:t>
+            </a:r>
+          </a:p>
+        </p:txBody>
+      </p:sp>
+      <p:sp>
+        <p:nvSpPr>
+          <p:cNvPr id="7" name="TextBox 6"/>
+          <p:cNvSpPr txBox="1"/>
+          <p:nvPr/>
+        </p:nvSpPr>
+        <p:spPr>
+          <a:xfrm>
+            <a:off x="731520" y="2743200"/>
+            <a:ext cx="5029200" cy="3200400"/>
+          </a:xfrm>
+          <a:prstGeom prst="rect">
+            <a:avLst/>
+          </a:prstGeom>
+          <a:noFill/>
+        </p:spPr>
+        <p:txBody>
+          <a:bodyPr wrap="square">
+            <a:spAutoFit/>
+          </a:bodyPr>
+          <a:lstStyle/>
+          <a:p>
+            <a:pPr>
+              <a:defRPr sz="1300">
+                <a:solidFill>
+                  <a:srgbClr val="FFFFFF"/>
+                </a:solidFill>
+                <a:latin typeface="Segoe UI"/>
+              </a:defRPr>
+            </a:pPr>
+            <a:r>
+              <a:t>Bloomberg &amp; Refinitiv Terminals:</a:t>
+            </a:r>
             <a:br/>
+            <a:r>
+              <a:t>• Extreme annual subscription costs exceeding $25,000 per seat.</a:t>
+            </a:r>
+            <a:br/>
+            <a:r>
+              <a:t>• Relies on manual analyst screening and closed proprietary code.</a:t>
+            </a:r>
+            <a:br/>
+            <a:r>
+              <a:t>• Inflexible black-box software unsuited for custom academic stress testing.</a:t>
+            </a:r>
+          </a:p>
+        </p:txBody>
+      </p:sp>
+      <p:sp>
+        <p:nvSpPr>
+          <p:cNvPr id="8" name="TextBox 7"/>
+          <p:cNvSpPr txBox="1"/>
+          <p:nvPr/>
+        </p:nvSpPr>
+        <p:spPr>
+          <a:xfrm>
+            <a:off x="6217920" y="2743200"/>
+            <a:ext cx="5029200" cy="3200400"/>
+          </a:xfrm>
+          <a:prstGeom prst="rect">
+            <a:avLst/>
+          </a:prstGeom>
+          <a:noFill/>
+        </p:spPr>
+        <p:txBody>
+          <a:bodyPr wrap="square">
+            <a:spAutoFit/>
+          </a:bodyPr>
+          <a:lstStyle/>
+          <a:p>
             <a:pPr>
-              <a:defRPr sz="1050">
-                <a:solidFill>
-                  <a:srgbClr val="F9FAFB"/>
-                </a:solidFill>
-              </a:defRPr>
-            </a:pPr>
-            <a:r>
-              <a:t>1. Hybrid FinBERT / Llama-3 Embeddings:</a:t>
+              <a:defRPr sz="1300">
+                <a:solidFill>
+                  <a:srgbClr val="FFFFFF"/>
+                </a:solidFill>
+                <a:latin typeface="Segoe UI"/>
+              </a:defRPr>
+            </a:pPr>
+            <a:r>
+              <a:t>Legacy Statistical VaR (RiskMetrics):</a:t>
             </a:r>
             <a:br/>
             <a:r>
-              <a:t>Integrate quantized local financial transformer models to combine deep contextual awareness with rule-based deterministic guardrails.</a:t>
+              <a:t>• Exclusively backward-looking over 250 or 500 trading days.</a:t>
+            </a:r>
+            <a:br/>
+            <a:r>
+              <a:t>• Completely blind to breaking news catalysts until prices drop.</a:t>
             </a:r>
             <a:br/>
             <a:br/>
             <a:r>
-              <a:t>2. Real-Time Broker &amp; Custodian Integration:</a:t>
+              <a:t>Generic NLP Analyzers (VADER / TextBlob):</a:t>
             </a:r>
             <a:br/>
             <a:r>
-              <a:t>Connect FIX / REST APIs (Interactive Brokers, Alpaca, Bloomberg EMSX) to test live institutional portfolios with custom risk parameters.</a:t>
+              <a:t>• Trained on social media; misclassifies financial jargon and lacks entity mapping.</a:t>
+            </a:r>
+          </a:p>
+        </p:txBody>
+      </p:sp>
+    </p:spTree>
+  </p:cSld>
+  <p:clrMapOvr>
+    <a:masterClrMapping/>
+  </p:clrMapOvr>
+</p:sld>
+</file>
+
+<file path=ppt/slides/slide8.xml><?xml version="1.0" encoding="utf-8"?>
+<p:sld xmlns:a="http://schemas.openxmlformats.org/drawingml/2006/main" xmlns:p="http://schemas.openxmlformats.org/presentationml/2006/main" xmlns:r="http://schemas.openxmlformats.org/officeDocument/2006/relationships">
+  <p:cSld>
+    <p:spTree>
+      <p:nvGrpSpPr>
+        <p:cNvPr id="1" name=""/>
+        <p:cNvGrpSpPr/>
+        <p:nvPr/>
+      </p:nvGrpSpPr>
+      <p:grpSpPr/>
+      <p:sp>
+        <p:nvSpPr>
+          <p:cNvPr id="2" name="Rectangle 1"/>
+          <p:cNvSpPr/>
+          <p:nvPr/>
+        </p:nvSpPr>
+        <p:spPr>
+          <a:xfrm>
+            <a:off x="0" y="0"/>
+            <a:ext cx="12191695" cy="6858000"/>
+          </a:xfrm>
+          <a:prstGeom prst="rect">
+            <a:avLst/>
+          </a:prstGeom>
+          <a:solidFill>
+            <a:srgbClr val="FFFFFF"/>
+          </a:solidFill>
+          <a:ln>
+            <a:noFill/>
+          </a:ln>
+        </p:spPr>
+        <p:style>
+          <a:lnRef idx="1">
+            <a:schemeClr val="accent1"/>
+          </a:lnRef>
+          <a:fillRef idx="3">
+            <a:schemeClr val="accent1"/>
+          </a:fillRef>
+          <a:effectRef idx="2">
+            <a:schemeClr val="accent1"/>
+          </a:effectRef>
+          <a:fontRef idx="minor">
+            <a:schemeClr val="lt1"/>
+          </a:fontRef>
+        </p:style>
+        <p:txBody>
+          <a:bodyPr rtlCol="0" anchor="ctr"/>
+          <a:lstStyle/>
+          <a:p>
+            <a:pPr algn="ctr"/>
+          </a:p>
+        </p:txBody>
+      </p:sp>
+      <p:sp>
+        <p:nvSpPr>
+          <p:cNvPr id="3" name="Rectangle 2"/>
+          <p:cNvSpPr/>
+          <p:nvPr/>
+        </p:nvSpPr>
+        <p:spPr>
+          <a:xfrm>
+            <a:off x="0" y="0"/>
+            <a:ext cx="12191695" cy="137160"/>
+          </a:xfrm>
+          <a:prstGeom prst="rect">
+            <a:avLst/>
+          </a:prstGeom>
+          <a:solidFill>
+            <a:srgbClr val="FF5E00"/>
+          </a:solidFill>
+          <a:ln>
+            <a:noFill/>
+          </a:ln>
+        </p:spPr>
+        <p:style>
+          <a:lnRef idx="1">
+            <a:schemeClr val="accent1"/>
+          </a:lnRef>
+          <a:fillRef idx="3">
+            <a:schemeClr val="accent1"/>
+          </a:fillRef>
+          <a:effectRef idx="2">
+            <a:schemeClr val="accent1"/>
+          </a:effectRef>
+          <a:fontRef idx="minor">
+            <a:schemeClr val="lt1"/>
+          </a:fontRef>
+        </p:style>
+        <p:txBody>
+          <a:bodyPr rtlCol="0" anchor="ctr"/>
+          <a:lstStyle/>
+          <a:p>
+            <a:pPr algn="ctr"/>
+          </a:p>
+        </p:txBody>
+      </p:sp>
+      <p:sp>
+        <p:nvSpPr>
+          <p:cNvPr id="4" name="Rounded Rectangle 3"/>
+          <p:cNvSpPr/>
+          <p:nvPr/>
+        </p:nvSpPr>
+        <p:spPr>
+          <a:xfrm>
+            <a:off x="9418320" y="502920"/>
+            <a:ext cx="2011680" cy="438912"/>
+          </a:xfrm>
+          <a:prstGeom prst="roundRect">
+            <a:avLst/>
+          </a:prstGeom>
+          <a:solidFill>
+            <a:srgbClr val="FFFFFF"/>
+          </a:solidFill>
+          <a:ln w="19050">
+            <a:solidFill>
+              <a:srgbClr val="FF5E00"/>
+            </a:solidFill>
+          </a:ln>
+        </p:spPr>
+        <p:style>
+          <a:lnRef idx="1">
+            <a:schemeClr val="accent1"/>
+          </a:lnRef>
+          <a:fillRef idx="3">
+            <a:schemeClr val="accent1"/>
+          </a:fillRef>
+          <a:effectRef idx="2">
+            <a:schemeClr val="accent1"/>
+          </a:effectRef>
+          <a:fontRef idx="minor">
+            <a:schemeClr val="lt1"/>
+          </a:fontRef>
+        </p:style>
+        <p:txBody>
+          <a:bodyPr rtlCol="0" anchor="ctr"/>
+          <a:lstStyle/>
+          <a:p>
+            <a:pPr algn="ctr">
+              <a:defRPr sz="1000" b="1">
+                <a:solidFill>
+                  <a:srgbClr val="FF5E00"/>
+                </a:solidFill>
+                <a:latin typeface="Segoe UI"/>
+              </a:defRPr>
+            </a:pPr>
+            <a:r>
+              <a:t>RISKPULSE</a:t>
+            </a:r>
+          </a:p>
+        </p:txBody>
+      </p:sp>
+      <p:sp>
+        <p:nvSpPr>
+          <p:cNvPr id="5" name="Oval 4"/>
+          <p:cNvSpPr/>
+          <p:nvPr/>
+        </p:nvSpPr>
+        <p:spPr>
+          <a:xfrm>
+            <a:off x="10972800" y="5760720"/>
+            <a:ext cx="621792" cy="621792"/>
+          </a:xfrm>
+          <a:prstGeom prst="ellipse">
+            <a:avLst/>
+          </a:prstGeom>
+          <a:solidFill>
+            <a:srgbClr val="FF5E00"/>
+          </a:solidFill>
+          <a:ln>
+            <a:noFill/>
+          </a:ln>
+        </p:spPr>
+        <p:style>
+          <a:lnRef idx="1">
+            <a:schemeClr val="accent1"/>
+          </a:lnRef>
+          <a:fillRef idx="3">
+            <a:schemeClr val="accent1"/>
+          </a:fillRef>
+          <a:effectRef idx="2">
+            <a:schemeClr val="accent1"/>
+          </a:effectRef>
+          <a:fontRef idx="minor">
+            <a:schemeClr val="lt1"/>
+          </a:fontRef>
+        </p:style>
+        <p:txBody>
+          <a:bodyPr rtlCol="0" anchor="ctr"/>
+          <a:lstStyle/>
+          <a:p>
+            <a:pPr algn="ctr">
+              <a:defRPr sz="1800" b="1">
+                <a:solidFill>
+                  <a:srgbClr val="FFFFFF"/>
+                </a:solidFill>
+                <a:latin typeface="Segoe UI"/>
+              </a:defRPr>
+            </a:pPr>
+            <a:r>
+              <a:t>&gt;</a:t>
+            </a:r>
+          </a:p>
+        </p:txBody>
+      </p:sp>
+      <p:sp>
+        <p:nvSpPr>
+          <p:cNvPr id="6" name="TextBox 5"/>
+          <p:cNvSpPr txBox="1"/>
+          <p:nvPr/>
+        </p:nvSpPr>
+        <p:spPr>
+          <a:xfrm>
+            <a:off x="731520" y="822960"/>
+            <a:ext cx="8229600" cy="1188720"/>
+          </a:xfrm>
+          <a:prstGeom prst="rect">
+            <a:avLst/>
+          </a:prstGeom>
+          <a:noFill/>
+        </p:spPr>
+        <p:txBody>
+          <a:bodyPr wrap="square">
+            <a:spAutoFit/>
+          </a:bodyPr>
+          <a:lstStyle/>
+          <a:p>
+            <a:pPr>
+              <a:defRPr sz="3000" b="1">
+                <a:solidFill>
+                  <a:srgbClr val="FF5E00"/>
+                </a:solidFill>
+                <a:latin typeface="Segoe UI"/>
+              </a:defRPr>
+            </a:pPr>
+            <a:r>
+              <a:t>PROPOSED SYSTEM</a:t>
             </a:r>
             <a:br/>
-            <a:br/>
-            <a:r>
-              <a:t>3. Historical Crisis Backtesting Suite:</a:t>
-            </a:r>
-            <a:br/>
-            <a:r>
-              <a:t>Validate shock formulas against historical market stress periods (2008 Lehman collapse, 2020 COVID shock, 2023 SVB banking crisis).</a:t>
-            </a:r>
-            <a:br/>
-            <a:br/>
-            <a:r>
-              <a:t>4. Value-at-Risk (VaR) &amp; Expected Shortfall (ES):</a:t>
-            </a:r>
-            <a:br/>
-            <a:r>
-              <a:t>Upgrade Module B stress engine with Monte Carlo simulations to report parametric 99% VaR and Expected Shortfall under regulatory mandates.</a:t>
+            <a:r>
+              <a:t>CONCEPT FLOW</a:t>
+            </a:r>
+          </a:p>
+        </p:txBody>
+      </p:sp>
+      <p:pic>
+        <p:nvPicPr>
+          <p:cNvPr id="7" name="Picture 6" descr="slide7_concept_diagram.png"/>
+          <p:cNvPicPr>
+            <a:picLocks noChangeAspect="1"/>
+          </p:cNvPicPr>
+          <p:nvPr/>
+        </p:nvPicPr>
+        <p:blipFill>
+          <a:blip r:embed="rId2"/>
+          <a:stretch>
+            <a:fillRect/>
+          </a:stretch>
+        </p:blipFill>
+        <p:spPr>
+          <a:xfrm>
+            <a:off x="731520" y="2011680"/>
+            <a:ext cx="10515600" cy="3474720"/>
+          </a:xfrm>
+          <a:prstGeom prst="rect">
+            <a:avLst/>
+          </a:prstGeom>
+        </p:spPr>
+      </p:pic>
+      <p:sp>
+        <p:nvSpPr>
+          <p:cNvPr id="8" name="TextBox 7"/>
+          <p:cNvSpPr txBox="1"/>
+          <p:nvPr/>
+        </p:nvSpPr>
+        <p:spPr>
+          <a:xfrm>
+            <a:off x="731520" y="5577840"/>
+            <a:ext cx="10058400" cy="731520"/>
+          </a:xfrm>
+          <a:prstGeom prst="rect">
+            <a:avLst/>
+          </a:prstGeom>
+          <a:noFill/>
+        </p:spPr>
+        <p:txBody>
+          <a:bodyPr wrap="none">
+            <a:spAutoFit/>
+          </a:bodyPr>
+          <a:lstStyle/>
+          <a:p>
+            <a:pPr>
+              <a:defRPr sz="1200" b="1">
+                <a:solidFill>
+                  <a:srgbClr val="FF5E00"/>
+                </a:solidFill>
+                <a:latin typeface="Segoe UI"/>
+              </a:defRPr>
+            </a:pPr>
+            <a:r>
+              <a:t>Autonomous Pipeline: User Role ➔ Raw Inputs ➔ Ingestion &amp; NLP ➔ Stress Modules ➔ Real-Time Telemetry</a:t>
+            </a:r>
+          </a:p>
+        </p:txBody>
+      </p:sp>
+    </p:spTree>
+  </p:cSld>
+  <p:clrMapOvr>
+    <a:masterClrMapping/>
+  </p:clrMapOvr>
+</p:sld>
+</file>
+
+<file path=ppt/slides/slide9.xml><?xml version="1.0" encoding="utf-8"?>
+<p:sld xmlns:a="http://schemas.openxmlformats.org/drawingml/2006/main" xmlns:p="http://schemas.openxmlformats.org/presentationml/2006/main" xmlns:r="http://schemas.openxmlformats.org/officeDocument/2006/relationships">
+  <p:cSld>
+    <p:spTree>
+      <p:nvGrpSpPr>
+        <p:cNvPr id="1" name=""/>
+        <p:cNvGrpSpPr/>
+        <p:nvPr/>
+      </p:nvGrpSpPr>
+      <p:grpSpPr/>
+      <p:sp>
+        <p:nvSpPr>
+          <p:cNvPr id="2" name="Rectangle 1"/>
+          <p:cNvSpPr/>
+          <p:nvPr/>
+        </p:nvSpPr>
+        <p:spPr>
+          <a:xfrm>
+            <a:off x="0" y="0"/>
+            <a:ext cx="12191695" cy="6858000"/>
+          </a:xfrm>
+          <a:prstGeom prst="rect">
+            <a:avLst/>
+          </a:prstGeom>
+          <a:solidFill>
+            <a:srgbClr val="FFFFFF"/>
+          </a:solidFill>
+          <a:ln>
+            <a:noFill/>
+          </a:ln>
+        </p:spPr>
+        <p:style>
+          <a:lnRef idx="1">
+            <a:schemeClr val="accent1"/>
+          </a:lnRef>
+          <a:fillRef idx="3">
+            <a:schemeClr val="accent1"/>
+          </a:fillRef>
+          <a:effectRef idx="2">
+            <a:schemeClr val="accent1"/>
+          </a:effectRef>
+          <a:fontRef idx="minor">
+            <a:schemeClr val="lt1"/>
+          </a:fontRef>
+        </p:style>
+        <p:txBody>
+          <a:bodyPr rtlCol="0" anchor="ctr"/>
+          <a:lstStyle/>
+          <a:p>
+            <a:pPr algn="ctr"/>
+          </a:p>
+        </p:txBody>
+      </p:sp>
+      <p:sp>
+        <p:nvSpPr>
+          <p:cNvPr id="3" name="Rectangle 2"/>
+          <p:cNvSpPr/>
+          <p:nvPr/>
+        </p:nvSpPr>
+        <p:spPr>
+          <a:xfrm>
+            <a:off x="0" y="0"/>
+            <a:ext cx="12191695" cy="137160"/>
+          </a:xfrm>
+          <a:prstGeom prst="rect">
+            <a:avLst/>
+          </a:prstGeom>
+          <a:solidFill>
+            <a:srgbClr val="FF5E00"/>
+          </a:solidFill>
+          <a:ln>
+            <a:noFill/>
+          </a:ln>
+        </p:spPr>
+        <p:style>
+          <a:lnRef idx="1">
+            <a:schemeClr val="accent1"/>
+          </a:lnRef>
+          <a:fillRef idx="3">
+            <a:schemeClr val="accent1"/>
+          </a:fillRef>
+          <a:effectRef idx="2">
+            <a:schemeClr val="accent1"/>
+          </a:effectRef>
+          <a:fontRef idx="minor">
+            <a:schemeClr val="lt1"/>
+          </a:fontRef>
+        </p:style>
+        <p:txBody>
+          <a:bodyPr rtlCol="0" anchor="ctr"/>
+          <a:lstStyle/>
+          <a:p>
+            <a:pPr algn="ctr"/>
+          </a:p>
+        </p:txBody>
+      </p:sp>
+      <p:sp>
+        <p:nvSpPr>
+          <p:cNvPr id="4" name="Rounded Rectangle 3"/>
+          <p:cNvSpPr/>
+          <p:nvPr/>
+        </p:nvSpPr>
+        <p:spPr>
+          <a:xfrm>
+            <a:off x="9418320" y="502920"/>
+            <a:ext cx="2011680" cy="438912"/>
+          </a:xfrm>
+          <a:prstGeom prst="roundRect">
+            <a:avLst/>
+          </a:prstGeom>
+          <a:solidFill>
+            <a:srgbClr val="FFFFFF"/>
+          </a:solidFill>
+          <a:ln w="19050">
+            <a:solidFill>
+              <a:srgbClr val="FF5E00"/>
+            </a:solidFill>
+          </a:ln>
+        </p:spPr>
+        <p:style>
+          <a:lnRef idx="1">
+            <a:schemeClr val="accent1"/>
+          </a:lnRef>
+          <a:fillRef idx="3">
+            <a:schemeClr val="accent1"/>
+          </a:fillRef>
+          <a:effectRef idx="2">
+            <a:schemeClr val="accent1"/>
+          </a:effectRef>
+          <a:fontRef idx="minor">
+            <a:schemeClr val="lt1"/>
+          </a:fontRef>
+        </p:style>
+        <p:txBody>
+          <a:bodyPr rtlCol="0" anchor="ctr"/>
+          <a:lstStyle/>
+          <a:p>
+            <a:pPr algn="ctr">
+              <a:defRPr sz="1000" b="1">
+                <a:solidFill>
+                  <a:srgbClr val="FF5E00"/>
+                </a:solidFill>
+                <a:latin typeface="Segoe UI"/>
+              </a:defRPr>
+            </a:pPr>
+            <a:r>
+              <a:t>VIT BHOPAL</a:t>
+            </a:r>
+          </a:p>
+        </p:txBody>
+      </p:sp>
+      <p:sp>
+        <p:nvSpPr>
+          <p:cNvPr id="5" name="Oval 4"/>
+          <p:cNvSpPr/>
+          <p:nvPr/>
+        </p:nvSpPr>
+        <p:spPr>
+          <a:xfrm>
+            <a:off x="10972800" y="5760720"/>
+            <a:ext cx="621792" cy="621792"/>
+          </a:xfrm>
+          <a:prstGeom prst="ellipse">
+            <a:avLst/>
+          </a:prstGeom>
+          <a:solidFill>
+            <a:srgbClr val="FF5E00"/>
+          </a:solidFill>
+          <a:ln>
+            <a:noFill/>
+          </a:ln>
+        </p:spPr>
+        <p:style>
+          <a:lnRef idx="1">
+            <a:schemeClr val="accent1"/>
+          </a:lnRef>
+          <a:fillRef idx="3">
+            <a:schemeClr val="accent1"/>
+          </a:fillRef>
+          <a:effectRef idx="2">
+            <a:schemeClr val="accent1"/>
+          </a:effectRef>
+          <a:fontRef idx="minor">
+            <a:schemeClr val="lt1"/>
+          </a:fontRef>
+        </p:style>
+        <p:txBody>
+          <a:bodyPr rtlCol="0" anchor="ctr"/>
+          <a:lstStyle/>
+          <a:p>
+            <a:pPr algn="ctr">
+              <a:defRPr sz="1800" b="1">
+                <a:solidFill>
+                  <a:srgbClr val="FFFFFF"/>
+                </a:solidFill>
+                <a:latin typeface="Segoe UI"/>
+              </a:defRPr>
+            </a:pPr>
+            <a:r>
+              <a:t>&gt;</a:t>
+            </a:r>
+          </a:p>
+        </p:txBody>
+      </p:sp>
+      <p:sp>
+        <p:nvSpPr>
+          <p:cNvPr id="6" name="TextBox 5"/>
+          <p:cNvSpPr txBox="1"/>
+          <p:nvPr/>
+        </p:nvSpPr>
+        <p:spPr>
+          <a:xfrm>
+            <a:off x="731520" y="822960"/>
+            <a:ext cx="8229600" cy="1188720"/>
+          </a:xfrm>
+          <a:prstGeom prst="rect">
+            <a:avLst/>
+          </a:prstGeom>
+          <a:noFill/>
+        </p:spPr>
+        <p:txBody>
+          <a:bodyPr wrap="square">
+            <a:spAutoFit/>
+          </a:bodyPr>
+          <a:lstStyle/>
+          <a:p>
+            <a:pPr>
+              <a:defRPr sz="3000" b="1">
+                <a:solidFill>
+                  <a:srgbClr val="FF5E00"/>
+                </a:solidFill>
+                <a:latin typeface="Segoe UI"/>
+              </a:defRPr>
+            </a:pPr>
+            <a:r>
+              <a:t>SYSTEM ARCHITECTURE</a:t>
+            </a:r>
+          </a:p>
+        </p:txBody>
+      </p:sp>
+      <p:pic>
+        <p:nvPicPr>
+          <p:cNvPr id="7" name="Picture 6" descr="architecture.png"/>
+          <p:cNvPicPr>
+            <a:picLocks noChangeAspect="1"/>
+          </p:cNvPicPr>
+          <p:nvPr/>
+        </p:nvPicPr>
+        <p:blipFill>
+          <a:blip r:embed="rId2"/>
+          <a:stretch>
+            <a:fillRect/>
+          </a:stretch>
+        </p:blipFill>
+        <p:spPr>
+          <a:xfrm>
+            <a:off x="731520" y="1645920"/>
+            <a:ext cx="7772400" cy="4663440"/>
+          </a:xfrm>
+          <a:prstGeom prst="rect">
+            <a:avLst/>
+          </a:prstGeom>
+        </p:spPr>
+      </p:pic>
+      <p:sp>
+        <p:nvSpPr>
+          <p:cNvPr id="8" name="Rounded Rectangle 7"/>
+          <p:cNvSpPr/>
+          <p:nvPr/>
+        </p:nvSpPr>
+        <p:spPr>
+          <a:xfrm>
+            <a:off x="8778240" y="1828800"/>
+            <a:ext cx="2743200" cy="1280160"/>
+          </a:xfrm>
+          <a:prstGeom prst="roundRect">
+            <a:avLst/>
+          </a:prstGeom>
+          <a:solidFill>
+            <a:srgbClr val="F8FAFC"/>
+          </a:solidFill>
+          <a:ln w="19050">
+            <a:solidFill>
+              <a:srgbClr val="FF5E00"/>
+            </a:solidFill>
+          </a:ln>
+        </p:spPr>
+        <p:style>
+          <a:lnRef idx="1">
+            <a:schemeClr val="accent1"/>
+          </a:lnRef>
+          <a:fillRef idx="3">
+            <a:schemeClr val="accent1"/>
+          </a:fillRef>
+          <a:effectRef idx="2">
+            <a:schemeClr val="accent1"/>
+          </a:effectRef>
+          <a:fontRef idx="minor">
+            <a:schemeClr val="lt1"/>
+          </a:fontRef>
+        </p:style>
+        <p:txBody>
+          <a:bodyPr rtlCol="0" anchor="ctr"/>
+          <a:lstStyle/>
+          <a:p>
+            <a:pPr algn="ctr"/>
+          </a:p>
+        </p:txBody>
+      </p:sp>
+      <p:sp>
+        <p:nvSpPr>
+          <p:cNvPr id="9" name="TextBox 8"/>
+          <p:cNvSpPr txBox="1"/>
+          <p:nvPr/>
+        </p:nvSpPr>
+        <p:spPr>
+          <a:xfrm>
+            <a:off x="8915400" y="1920240"/>
+            <a:ext cx="2468880" cy="1097280"/>
+          </a:xfrm>
+          <a:prstGeom prst="rect">
+            <a:avLst/>
+          </a:prstGeom>
+          <a:noFill/>
+        </p:spPr>
+        <p:txBody>
+          <a:bodyPr wrap="square">
+            <a:spAutoFit/>
+          </a:bodyPr>
+          <a:lstStyle/>
+          <a:p>
+            <a:pPr>
+              <a:defRPr sz="1100" b="1">
+                <a:solidFill>
+                  <a:srgbClr val="FF5E00"/>
+                </a:solidFill>
+                <a:latin typeface="Segoe UI"/>
+              </a:defRPr>
+            </a:pPr>
+            <a:r>
+              <a:t>Tier 1: Ingestion</a:t>
+            </a:r>
+          </a:p>
+          <a:p>
+            <a:pPr>
+              <a:defRPr sz="950">
+                <a:solidFill>
+                  <a:srgbClr val="1E293B"/>
+                </a:solidFill>
+                <a:latin typeface="Segoe UI"/>
+              </a:defRPr>
+            </a:pPr>
+            <a:r>
+              <a:t>Async RSS feed polling, MD5 hash deduplication, synthetic fallback stream.</a:t>
+            </a:r>
+          </a:p>
+        </p:txBody>
+      </p:sp>
+      <p:sp>
+        <p:nvSpPr>
+          <p:cNvPr id="10" name="Rounded Rectangle 9"/>
+          <p:cNvSpPr/>
+          <p:nvPr/>
+        </p:nvSpPr>
+        <p:spPr>
+          <a:xfrm>
+            <a:off x="8778240" y="3291840"/>
+            <a:ext cx="2743200" cy="1280160"/>
+          </a:xfrm>
+          <a:prstGeom prst="roundRect">
+            <a:avLst/>
+          </a:prstGeom>
+          <a:solidFill>
+            <a:srgbClr val="F8FAFC"/>
+          </a:solidFill>
+          <a:ln w="19050">
+            <a:solidFill>
+              <a:srgbClr val="FF5E00"/>
+            </a:solidFill>
+          </a:ln>
+        </p:spPr>
+        <p:style>
+          <a:lnRef idx="1">
+            <a:schemeClr val="accent1"/>
+          </a:lnRef>
+          <a:fillRef idx="3">
+            <a:schemeClr val="accent1"/>
+          </a:fillRef>
+          <a:effectRef idx="2">
+            <a:schemeClr val="accent1"/>
+          </a:effectRef>
+          <a:fontRef idx="minor">
+            <a:schemeClr val="lt1"/>
+          </a:fontRef>
+        </p:style>
+        <p:txBody>
+          <a:bodyPr rtlCol="0" anchor="ctr"/>
+          <a:lstStyle/>
+          <a:p>
+            <a:pPr algn="ctr"/>
+          </a:p>
+        </p:txBody>
+      </p:sp>
+      <p:sp>
+        <p:nvSpPr>
+          <p:cNvPr id="11" name="TextBox 10"/>
+          <p:cNvSpPr txBox="1"/>
+          <p:nvPr/>
+        </p:nvSpPr>
+        <p:spPr>
+          <a:xfrm>
+            <a:off x="8915400" y="3383280"/>
+            <a:ext cx="2468880" cy="1097280"/>
+          </a:xfrm>
+          <a:prstGeom prst="rect">
+            <a:avLst/>
+          </a:prstGeom>
+          <a:noFill/>
+        </p:spPr>
+        <p:txBody>
+          <a:bodyPr wrap="square">
+            <a:spAutoFit/>
+          </a:bodyPr>
+          <a:lstStyle/>
+          <a:p>
+            <a:pPr>
+              <a:defRPr sz="1100" b="1">
+                <a:solidFill>
+                  <a:srgbClr val="FF5E00"/>
+                </a:solidFill>
+                <a:latin typeface="Segoe UI"/>
+              </a:defRPr>
+            </a:pPr>
+            <a:r>
+              <a:t>Tier 2: FinBERT Core</a:t>
+            </a:r>
+          </a:p>
+          <a:p>
+            <a:pPr>
+              <a:defRPr sz="950">
+                <a:solidFill>
+                  <a:srgbClr val="1E293B"/>
+                </a:solidFill>
+                <a:latin typeface="Segoe UI"/>
+              </a:defRPr>
+            </a:pPr>
+            <a:r>
+              <a:t>Deep learning sentiment (-1..+1), impact rating (1..10), ticker NER.</a:t>
+            </a:r>
+          </a:p>
+        </p:txBody>
+      </p:sp>
+      <p:sp>
+        <p:nvSpPr>
+          <p:cNvPr id="12" name="Rounded Rectangle 11"/>
+          <p:cNvSpPr/>
+          <p:nvPr/>
+        </p:nvSpPr>
+        <p:spPr>
+          <a:xfrm>
+            <a:off x="8778240" y="4754880"/>
+            <a:ext cx="2743200" cy="1280160"/>
+          </a:xfrm>
+          <a:prstGeom prst="roundRect">
+            <a:avLst/>
+          </a:prstGeom>
+          <a:solidFill>
+            <a:srgbClr val="F8FAFC"/>
+          </a:solidFill>
+          <a:ln w="19050">
+            <a:solidFill>
+              <a:srgbClr val="FF5E00"/>
+            </a:solidFill>
+          </a:ln>
+        </p:spPr>
+        <p:style>
+          <a:lnRef idx="1">
+            <a:schemeClr val="accent1"/>
+          </a:lnRef>
+          <a:fillRef idx="3">
+            <a:schemeClr val="accent1"/>
+          </a:fillRef>
+          <a:effectRef idx="2">
+            <a:schemeClr val="accent1"/>
+          </a:effectRef>
+          <a:fontRef idx="minor">
+            <a:schemeClr val="lt1"/>
+          </a:fontRef>
+        </p:style>
+        <p:txBody>
+          <a:bodyPr rtlCol="0" anchor="ctr"/>
+          <a:lstStyle/>
+          <a:p>
+            <a:pPr algn="ctr"/>
+          </a:p>
+        </p:txBody>
+      </p:sp>
+      <p:sp>
+        <p:nvSpPr>
+          <p:cNvPr id="13" name="TextBox 12"/>
+          <p:cNvSpPr txBox="1"/>
+          <p:nvPr/>
+        </p:nvSpPr>
+        <p:spPr>
+          <a:xfrm>
+            <a:off x="8915400" y="4846320"/>
+            <a:ext cx="2468880" cy="1097280"/>
+          </a:xfrm>
+          <a:prstGeom prst="rect">
+            <a:avLst/>
+          </a:prstGeom>
+          <a:noFill/>
+        </p:spPr>
+        <p:txBody>
+          <a:bodyPr wrap="square">
+            <a:spAutoFit/>
+          </a:bodyPr>
+          <a:lstStyle/>
+          <a:p>
+            <a:pPr>
+              <a:defRPr sz="1100" b="1">
+                <a:solidFill>
+                  <a:srgbClr val="FF5E00"/>
+                </a:solidFill>
+                <a:latin typeface="Segoe UI"/>
+              </a:defRPr>
+            </a:pPr>
+            <a:r>
+              <a:t>Tier 3: Stress Engine</a:t>
+            </a:r>
+          </a:p>
+          <a:p>
+            <a:pPr>
+              <a:defRPr sz="950">
+                <a:solidFill>
+                  <a:srgbClr val="1E293B"/>
+                </a:solidFill>
+                <a:latin typeface="Segoe UI"/>
+              </a:defRPr>
+            </a:pPr>
+            <a:r>
+              <a:t>Macro shocks, beta scaling, VaR/CVaR recalculation, React 18 UI.</a:t>
             </a:r>
           </a:p>
         </p:txBody>
